--- a/Nico-Silas.pptx
+++ b/Nico-Silas.pptx
@@ -271,7 +271,7 @@
           <a:p>
             <a:fld id="{F4965A79-D83B-41BE-9FBE-6F4A5E0B5FA3}" type="datetimeFigureOut">
               <a:rPr lang="en-DE" smtClean="0"/>
-              <a:t>18/03/2026</a:t>
+              <a:t>23/03/2026</a:t>
             </a:fld>
             <a:endParaRPr lang="en-DE"/>
           </a:p>
@@ -471,7 +471,7 @@
           <a:p>
             <a:fld id="{F4965A79-D83B-41BE-9FBE-6F4A5E0B5FA3}" type="datetimeFigureOut">
               <a:rPr lang="en-DE" smtClean="0"/>
-              <a:t>18/03/2026</a:t>
+              <a:t>23/03/2026</a:t>
             </a:fld>
             <a:endParaRPr lang="en-DE"/>
           </a:p>
@@ -681,7 +681,7 @@
           <a:p>
             <a:fld id="{F4965A79-D83B-41BE-9FBE-6F4A5E0B5FA3}" type="datetimeFigureOut">
               <a:rPr lang="en-DE" smtClean="0"/>
-              <a:t>18/03/2026</a:t>
+              <a:t>23/03/2026</a:t>
             </a:fld>
             <a:endParaRPr lang="en-DE"/>
           </a:p>
@@ -881,7 +881,7 @@
           <a:p>
             <a:fld id="{F4965A79-D83B-41BE-9FBE-6F4A5E0B5FA3}" type="datetimeFigureOut">
               <a:rPr lang="en-DE" smtClean="0"/>
-              <a:t>18/03/2026</a:t>
+              <a:t>23/03/2026</a:t>
             </a:fld>
             <a:endParaRPr lang="en-DE"/>
           </a:p>
@@ -1157,7 +1157,7 @@
           <a:p>
             <a:fld id="{F4965A79-D83B-41BE-9FBE-6F4A5E0B5FA3}" type="datetimeFigureOut">
               <a:rPr lang="en-DE" smtClean="0"/>
-              <a:t>18/03/2026</a:t>
+              <a:t>23/03/2026</a:t>
             </a:fld>
             <a:endParaRPr lang="en-DE"/>
           </a:p>
@@ -1425,7 +1425,7 @@
           <a:p>
             <a:fld id="{F4965A79-D83B-41BE-9FBE-6F4A5E0B5FA3}" type="datetimeFigureOut">
               <a:rPr lang="en-DE" smtClean="0"/>
-              <a:t>18/03/2026</a:t>
+              <a:t>23/03/2026</a:t>
             </a:fld>
             <a:endParaRPr lang="en-DE"/>
           </a:p>
@@ -1840,7 +1840,7 @@
           <a:p>
             <a:fld id="{F4965A79-D83B-41BE-9FBE-6F4A5E0B5FA3}" type="datetimeFigureOut">
               <a:rPr lang="en-DE" smtClean="0"/>
-              <a:t>18/03/2026</a:t>
+              <a:t>23/03/2026</a:t>
             </a:fld>
             <a:endParaRPr lang="en-DE"/>
           </a:p>
@@ -1982,7 +1982,7 @@
           <a:p>
             <a:fld id="{F4965A79-D83B-41BE-9FBE-6F4A5E0B5FA3}" type="datetimeFigureOut">
               <a:rPr lang="en-DE" smtClean="0"/>
-              <a:t>18/03/2026</a:t>
+              <a:t>23/03/2026</a:t>
             </a:fld>
             <a:endParaRPr lang="en-DE"/>
           </a:p>
@@ -2095,7 +2095,7 @@
           <a:p>
             <a:fld id="{F4965A79-D83B-41BE-9FBE-6F4A5E0B5FA3}" type="datetimeFigureOut">
               <a:rPr lang="en-DE" smtClean="0"/>
-              <a:t>18/03/2026</a:t>
+              <a:t>23/03/2026</a:t>
             </a:fld>
             <a:endParaRPr lang="en-DE"/>
           </a:p>
@@ -2408,7 +2408,7 @@
           <a:p>
             <a:fld id="{F4965A79-D83B-41BE-9FBE-6F4A5E0B5FA3}" type="datetimeFigureOut">
               <a:rPr lang="en-DE" smtClean="0"/>
-              <a:t>18/03/2026</a:t>
+              <a:t>23/03/2026</a:t>
             </a:fld>
             <a:endParaRPr lang="en-DE"/>
           </a:p>
@@ -2697,7 +2697,7 @@
           <a:p>
             <a:fld id="{F4965A79-D83B-41BE-9FBE-6F4A5E0B5FA3}" type="datetimeFigureOut">
               <a:rPr lang="en-DE" smtClean="0"/>
-              <a:t>18/03/2026</a:t>
+              <a:t>23/03/2026</a:t>
             </a:fld>
             <a:endParaRPr lang="en-DE"/>
           </a:p>
@@ -2940,7 +2940,7 @@
           <a:p>
             <a:fld id="{F4965A79-D83B-41BE-9FBE-6F4A5E0B5FA3}" type="datetimeFigureOut">
               <a:rPr lang="en-DE" smtClean="0"/>
-              <a:t>18/03/2026</a:t>
+              <a:t>23/03/2026</a:t>
             </a:fld>
             <a:endParaRPr lang="en-DE"/>
           </a:p>
@@ -4524,7 +4524,7 @@
           <a:p>
             <a:r>
               <a:rPr lang="en-US" dirty="0" err="1"/>
-              <a:t>Jetztige</a:t>
+              <a:t>Jetzige</a:t>
             </a:r>
             <a:r>
               <a:rPr lang="en-US" dirty="0"/>
@@ -4849,6 +4849,73 @@
           <a:bodyPr/>
           <a:lstStyle/>
           <a:p>
+            <a:r>
+              <a:rPr lang="en-US" dirty="0" err="1"/>
+              <a:t>Können</a:t>
+            </a:r>
+            <a:r>
+              <a:rPr lang="en-US" dirty="0"/>
+              <a:t> </a:t>
+            </a:r>
+            <a:r>
+              <a:rPr lang="en-US" dirty="0" err="1"/>
+              <a:t>zum</a:t>
+            </a:r>
+            <a:r>
+              <a:rPr lang="en-US" dirty="0"/>
+              <a:t> EA </a:t>
+            </a:r>
+            <a:r>
+              <a:rPr lang="en-US" dirty="0" err="1"/>
+              <a:t>hingeleitet</a:t>
+            </a:r>
+            <a:r>
+              <a:rPr lang="en-US" dirty="0"/>
+              <a:t> </a:t>
+            </a:r>
+            <a:r>
+              <a:rPr lang="en-US" dirty="0" err="1"/>
+              <a:t>werden</a:t>
+            </a:r>
+            <a:endParaRPr lang="en-US" dirty="0"/>
+          </a:p>
+          <a:p>
+            <a:r>
+              <a:rPr lang="en-US" dirty="0" err="1"/>
+              <a:t>Profitieren</a:t>
+            </a:r>
+            <a:r>
+              <a:rPr lang="en-US" dirty="0"/>
+              <a:t> von </a:t>
+            </a:r>
+            <a:r>
+              <a:rPr lang="en-US" dirty="0" err="1"/>
+              <a:t>Daten</a:t>
+            </a:r>
+            <a:r>
+              <a:rPr lang="en-US" dirty="0"/>
+              <a:t> </a:t>
+            </a:r>
+            <a:r>
+              <a:rPr lang="en-US" dirty="0" err="1"/>
+              <a:t>selbst</a:t>
+            </a:r>
+            <a:r>
+              <a:rPr lang="en-US" dirty="0"/>
+              <a:t> </a:t>
+            </a:r>
+            <a:r>
+              <a:rPr lang="en-US" dirty="0" err="1"/>
+              <a:t>wenn</a:t>
+            </a:r>
+            <a:r>
+              <a:rPr lang="en-US" dirty="0"/>
+              <a:t> Sie den EA nicht direct </a:t>
+            </a:r>
+            <a:r>
+              <a:rPr lang="en-US"/>
+              <a:t>benutzen</a:t>
+            </a:r>
             <a:endParaRPr lang="en-DE"/>
           </a:p>
         </p:txBody>

--- a/Nico-Silas.pptx
+++ b/Nico-Silas.pptx
@@ -7,15 +7,14 @@
   <p:sldIdLst>
     <p:sldId id="256" r:id="rId2"/>
     <p:sldId id="257" r:id="rId3"/>
-    <p:sldId id="258" r:id="rId4"/>
-    <p:sldId id="260" r:id="rId5"/>
-    <p:sldId id="261" r:id="rId6"/>
-    <p:sldId id="262" r:id="rId7"/>
-    <p:sldId id="259" r:id="rId8"/>
-    <p:sldId id="263" r:id="rId9"/>
-    <p:sldId id="264" r:id="rId10"/>
-    <p:sldId id="266" r:id="rId11"/>
-    <p:sldId id="265" r:id="rId12"/>
+    <p:sldId id="260" r:id="rId4"/>
+    <p:sldId id="261" r:id="rId5"/>
+    <p:sldId id="262" r:id="rId6"/>
+    <p:sldId id="259" r:id="rId7"/>
+    <p:sldId id="263" r:id="rId8"/>
+    <p:sldId id="264" r:id="rId9"/>
+    <p:sldId id="266" r:id="rId10"/>
+    <p:sldId id="265" r:id="rId11"/>
   </p:sldIdLst>
   <p:sldSz cx="12192000" cy="6858000"/>
   <p:notesSz cx="6858000" cy="9144000"/>
@@ -271,7 +270,7 @@
           <a:p>
             <a:fld id="{F4965A79-D83B-41BE-9FBE-6F4A5E0B5FA3}" type="datetimeFigureOut">
               <a:rPr lang="en-DE" smtClean="0"/>
-              <a:t>23/03/2026</a:t>
+              <a:t>26/03/2026</a:t>
             </a:fld>
             <a:endParaRPr lang="en-DE"/>
           </a:p>
@@ -471,7 +470,7 @@
           <a:p>
             <a:fld id="{F4965A79-D83B-41BE-9FBE-6F4A5E0B5FA3}" type="datetimeFigureOut">
               <a:rPr lang="en-DE" smtClean="0"/>
-              <a:t>23/03/2026</a:t>
+              <a:t>26/03/2026</a:t>
             </a:fld>
             <a:endParaRPr lang="en-DE"/>
           </a:p>
@@ -681,7 +680,7 @@
           <a:p>
             <a:fld id="{F4965A79-D83B-41BE-9FBE-6F4A5E0B5FA3}" type="datetimeFigureOut">
               <a:rPr lang="en-DE" smtClean="0"/>
-              <a:t>23/03/2026</a:t>
+              <a:t>26/03/2026</a:t>
             </a:fld>
             <a:endParaRPr lang="en-DE"/>
           </a:p>
@@ -881,7 +880,7 @@
           <a:p>
             <a:fld id="{F4965A79-D83B-41BE-9FBE-6F4A5E0B5FA3}" type="datetimeFigureOut">
               <a:rPr lang="en-DE" smtClean="0"/>
-              <a:t>23/03/2026</a:t>
+              <a:t>26/03/2026</a:t>
             </a:fld>
             <a:endParaRPr lang="en-DE"/>
           </a:p>
@@ -1157,7 +1156,7 @@
           <a:p>
             <a:fld id="{F4965A79-D83B-41BE-9FBE-6F4A5E0B5FA3}" type="datetimeFigureOut">
               <a:rPr lang="en-DE" smtClean="0"/>
-              <a:t>23/03/2026</a:t>
+              <a:t>26/03/2026</a:t>
             </a:fld>
             <a:endParaRPr lang="en-DE"/>
           </a:p>
@@ -1425,7 +1424,7 @@
           <a:p>
             <a:fld id="{F4965A79-D83B-41BE-9FBE-6F4A5E0B5FA3}" type="datetimeFigureOut">
               <a:rPr lang="en-DE" smtClean="0"/>
-              <a:t>23/03/2026</a:t>
+              <a:t>26/03/2026</a:t>
             </a:fld>
             <a:endParaRPr lang="en-DE"/>
           </a:p>
@@ -1840,7 +1839,7 @@
           <a:p>
             <a:fld id="{F4965A79-D83B-41BE-9FBE-6F4A5E0B5FA3}" type="datetimeFigureOut">
               <a:rPr lang="en-DE" smtClean="0"/>
-              <a:t>23/03/2026</a:t>
+              <a:t>26/03/2026</a:t>
             </a:fld>
             <a:endParaRPr lang="en-DE"/>
           </a:p>
@@ -1982,7 +1981,7 @@
           <a:p>
             <a:fld id="{F4965A79-D83B-41BE-9FBE-6F4A5E0B5FA3}" type="datetimeFigureOut">
               <a:rPr lang="en-DE" smtClean="0"/>
-              <a:t>23/03/2026</a:t>
+              <a:t>26/03/2026</a:t>
             </a:fld>
             <a:endParaRPr lang="en-DE"/>
           </a:p>
@@ -2095,7 +2094,7 @@
           <a:p>
             <a:fld id="{F4965A79-D83B-41BE-9FBE-6F4A5E0B5FA3}" type="datetimeFigureOut">
               <a:rPr lang="en-DE" smtClean="0"/>
-              <a:t>23/03/2026</a:t>
+              <a:t>26/03/2026</a:t>
             </a:fld>
             <a:endParaRPr lang="en-DE"/>
           </a:p>
@@ -2408,7 +2407,7 @@
           <a:p>
             <a:fld id="{F4965A79-D83B-41BE-9FBE-6F4A5E0B5FA3}" type="datetimeFigureOut">
               <a:rPr lang="en-DE" smtClean="0"/>
-              <a:t>23/03/2026</a:t>
+              <a:t>26/03/2026</a:t>
             </a:fld>
             <a:endParaRPr lang="en-DE"/>
           </a:p>
@@ -2697,7 +2696,7 @@
           <a:p>
             <a:fld id="{F4965A79-D83B-41BE-9FBE-6F4A5E0B5FA3}" type="datetimeFigureOut">
               <a:rPr lang="en-DE" smtClean="0"/>
-              <a:t>23/03/2026</a:t>
+              <a:t>26/03/2026</a:t>
             </a:fld>
             <a:endParaRPr lang="en-DE"/>
           </a:p>
@@ -2940,7 +2939,7 @@
           <a:p>
             <a:fld id="{F4965A79-D83B-41BE-9FBE-6F4A5E0B5FA3}" type="datetimeFigureOut">
               <a:rPr lang="en-DE" smtClean="0"/>
-              <a:t>23/03/2026</a:t>
+              <a:t>26/03/2026</a:t>
             </a:fld>
             <a:endParaRPr lang="en-DE"/>
           </a:p>
@@ -3445,500 +3444,6 @@
           <p:cNvPr id="2" name="Title 1">
             <a:extLst>
               <a:ext uri="{FF2B5EF4-FFF2-40B4-BE49-F238E27FC236}">
-                <a16:creationId xmlns:a16="http://schemas.microsoft.com/office/drawing/2014/main" id="{0A600FA2-9A03-B57A-7C25-BCE3E0633F36}"/>
-              </a:ext>
-            </a:extLst>
-          </p:cNvPr>
-          <p:cNvSpPr>
-            <a:spLocks noGrp="1"/>
-          </p:cNvSpPr>
-          <p:nvPr>
-            <p:ph type="title"/>
-          </p:nvPr>
-        </p:nvSpPr>
-        <p:spPr/>
-        <p:txBody>
-          <a:bodyPr/>
-          <a:lstStyle/>
-          <a:p>
-            <a:r>
-              <a:rPr lang="en-US" dirty="0"/>
-              <a:t>Chatbot </a:t>
-            </a:r>
-            <a:r>
-              <a:rPr lang="en-US" dirty="0" err="1"/>
-              <a:t>Hürden</a:t>
-            </a:r>
-            <a:r>
-              <a:rPr lang="en-US" dirty="0"/>
-              <a:t> </a:t>
-            </a:r>
-            <a:r>
-              <a:rPr lang="en-US" dirty="0" err="1"/>
-              <a:t>allgemein</a:t>
-            </a:r>
-            <a:endParaRPr lang="en-DE" dirty="0"/>
-          </a:p>
-        </p:txBody>
-      </p:sp>
-      <p:sp>
-        <p:nvSpPr>
-          <p:cNvPr id="3" name="Content Placeholder 2">
-            <a:extLst>
-              <a:ext uri="{FF2B5EF4-FFF2-40B4-BE49-F238E27FC236}">
-                <a16:creationId xmlns:a16="http://schemas.microsoft.com/office/drawing/2014/main" id="{B999B94F-F759-6D2C-464F-1A45A0195CEB}"/>
-              </a:ext>
-            </a:extLst>
-          </p:cNvPr>
-          <p:cNvSpPr>
-            <a:spLocks noGrp="1"/>
-          </p:cNvSpPr>
-          <p:nvPr>
-            <p:ph idx="1"/>
-          </p:nvPr>
-        </p:nvSpPr>
-        <p:spPr/>
-        <p:txBody>
-          <a:bodyPr>
-            <a:normAutofit/>
-          </a:bodyPr>
-          <a:lstStyle/>
-          <a:p>
-            <a:r>
-              <a:rPr lang="en-US" dirty="0"/>
-              <a:t>Wie </a:t>
-            </a:r>
-            <a:r>
-              <a:rPr lang="en-US" dirty="0" err="1"/>
-              <a:t>kombinieren</a:t>
-            </a:r>
-            <a:r>
-              <a:rPr lang="en-US" dirty="0"/>
-              <a:t> </a:t>
-            </a:r>
-            <a:r>
-              <a:rPr lang="en-US" dirty="0" err="1"/>
-              <a:t>wir</a:t>
-            </a:r>
-            <a:r>
-              <a:rPr lang="en-US" dirty="0"/>
-              <a:t> die </a:t>
-            </a:r>
-            <a:r>
-              <a:rPr lang="en-US" dirty="0" err="1"/>
-              <a:t>zwei</a:t>
-            </a:r>
-            <a:r>
-              <a:rPr lang="en-US" dirty="0"/>
-              <a:t> Bots?</a:t>
-            </a:r>
-          </a:p>
-          <a:p>
-            <a:r>
-              <a:rPr lang="en-US" dirty="0"/>
-              <a:t>Wenn </a:t>
-            </a:r>
-            <a:r>
-              <a:rPr lang="en-US" dirty="0" err="1"/>
-              <a:t>wir</a:t>
-            </a:r>
-            <a:r>
-              <a:rPr lang="en-US" dirty="0"/>
-              <a:t> </a:t>
-            </a:r>
-            <a:r>
-              <a:rPr lang="en-US" dirty="0" err="1"/>
-              <a:t>mehr</a:t>
-            </a:r>
-            <a:r>
-              <a:rPr lang="en-US" dirty="0"/>
-              <a:t> Apps </a:t>
-            </a:r>
-            <a:r>
-              <a:rPr lang="en-US" dirty="0" err="1"/>
-              <a:t>einfügen</a:t>
-            </a:r>
-            <a:r>
-              <a:rPr lang="en-US" dirty="0"/>
-              <a:t>, </a:t>
-            </a:r>
-            <a:r>
-              <a:rPr lang="en-US" dirty="0" err="1"/>
-              <a:t>wird</a:t>
-            </a:r>
-            <a:r>
-              <a:rPr lang="en-US" dirty="0"/>
-              <a:t> der Chatbot </a:t>
-            </a:r>
-            <a:r>
-              <a:rPr lang="en-US" dirty="0" err="1"/>
-              <a:t>dann</a:t>
-            </a:r>
-            <a:r>
-              <a:rPr lang="en-US" dirty="0"/>
-              <a:t> </a:t>
-            </a:r>
-            <a:r>
-              <a:rPr lang="en-US" dirty="0" err="1"/>
-              <a:t>verwirrt</a:t>
-            </a:r>
-            <a:r>
-              <a:rPr lang="en-US" dirty="0"/>
-              <a:t>?</a:t>
-            </a:r>
-          </a:p>
-          <a:p>
-            <a:pPr lvl="1"/>
-            <a:r>
-              <a:rPr lang="en-US" dirty="0">
-                <a:sym typeface="Wingdings" panose="05000000000000000000" pitchFamily="2" charset="2"/>
-              </a:rPr>
-              <a:t> </a:t>
-            </a:r>
-            <a:r>
-              <a:rPr lang="en-US" dirty="0" err="1">
-                <a:sym typeface="Wingdings" panose="05000000000000000000" pitchFamily="2" charset="2"/>
-              </a:rPr>
-              <a:t>oData</a:t>
-            </a:r>
-            <a:r>
-              <a:rPr lang="en-US" dirty="0">
-                <a:sym typeface="Wingdings" panose="05000000000000000000" pitchFamily="2" charset="2"/>
-              </a:rPr>
-              <a:t> </a:t>
-            </a:r>
-            <a:r>
-              <a:rPr lang="en-US" dirty="0" err="1">
-                <a:sym typeface="Wingdings" panose="05000000000000000000" pitchFamily="2" charset="2"/>
-              </a:rPr>
-              <a:t>Schnitstelle</a:t>
-            </a:r>
-            <a:r>
-              <a:rPr lang="en-US" dirty="0">
-                <a:sym typeface="Wingdings" panose="05000000000000000000" pitchFamily="2" charset="2"/>
-              </a:rPr>
-              <a:t> nicht </a:t>
-            </a:r>
-            <a:r>
-              <a:rPr lang="en-US" dirty="0" err="1">
-                <a:sym typeface="Wingdings" panose="05000000000000000000" pitchFamily="2" charset="2"/>
-              </a:rPr>
-              <a:t>nach</a:t>
-            </a:r>
-            <a:r>
-              <a:rPr lang="en-US" dirty="0">
-                <a:sym typeface="Wingdings" panose="05000000000000000000" pitchFamily="2" charset="2"/>
-              </a:rPr>
-              <a:t> Apps </a:t>
-            </a:r>
-            <a:r>
-              <a:rPr lang="en-US" dirty="0" err="1">
-                <a:sym typeface="Wingdings" panose="05000000000000000000" pitchFamily="2" charset="2"/>
-              </a:rPr>
-              <a:t>sortieren</a:t>
-            </a:r>
-            <a:r>
-              <a:rPr lang="en-US" dirty="0">
-                <a:sym typeface="Wingdings" panose="05000000000000000000" pitchFamily="2" charset="2"/>
-              </a:rPr>
-              <a:t> </a:t>
-            </a:r>
-            <a:r>
-              <a:rPr lang="en-US" dirty="0" err="1">
-                <a:sym typeface="Wingdings" panose="05000000000000000000" pitchFamily="2" charset="2"/>
-              </a:rPr>
-              <a:t>sondern</a:t>
-            </a:r>
-            <a:r>
-              <a:rPr lang="en-US" dirty="0">
-                <a:sym typeface="Wingdings" panose="05000000000000000000" pitchFamily="2" charset="2"/>
-              </a:rPr>
-              <a:t> “</a:t>
-            </a:r>
-            <a:r>
-              <a:rPr lang="en-US" dirty="0" err="1">
-                <a:sym typeface="Wingdings" panose="05000000000000000000" pitchFamily="2" charset="2"/>
-              </a:rPr>
-              <a:t>anders</a:t>
-            </a:r>
-            <a:r>
-              <a:rPr lang="en-US" dirty="0">
-                <a:sym typeface="Wingdings" panose="05000000000000000000" pitchFamily="2" charset="2"/>
-              </a:rPr>
-              <a:t>”?</a:t>
-            </a:r>
-          </a:p>
-          <a:p>
-            <a:r>
-              <a:rPr lang="en-US" dirty="0" err="1">
-                <a:sym typeface="Wingdings" panose="05000000000000000000" pitchFamily="2" charset="2"/>
-              </a:rPr>
-              <a:t>Welche</a:t>
-            </a:r>
-            <a:r>
-              <a:rPr lang="en-US" dirty="0">
-                <a:sym typeface="Wingdings" panose="05000000000000000000" pitchFamily="2" charset="2"/>
-              </a:rPr>
-              <a:t> </a:t>
-            </a:r>
-            <a:r>
-              <a:rPr lang="en-US" dirty="0" err="1">
-                <a:sym typeface="Wingdings" panose="05000000000000000000" pitchFamily="2" charset="2"/>
-              </a:rPr>
-              <a:t>Dokumente</a:t>
-            </a:r>
-            <a:r>
-              <a:rPr lang="en-US" dirty="0">
-                <a:sym typeface="Wingdings" panose="05000000000000000000" pitchFamily="2" charset="2"/>
-              </a:rPr>
-              <a:t> </a:t>
-            </a:r>
-            <a:r>
-              <a:rPr lang="en-US" dirty="0" err="1">
-                <a:sym typeface="Wingdings" panose="05000000000000000000" pitchFamily="2" charset="2"/>
-              </a:rPr>
-              <a:t>fügen</a:t>
-            </a:r>
-            <a:r>
-              <a:rPr lang="en-US" dirty="0">
-                <a:sym typeface="Wingdings" panose="05000000000000000000" pitchFamily="2" charset="2"/>
-              </a:rPr>
-              <a:t> </a:t>
-            </a:r>
-            <a:r>
-              <a:rPr lang="en-US" dirty="0" err="1">
-                <a:sym typeface="Wingdings" panose="05000000000000000000" pitchFamily="2" charset="2"/>
-              </a:rPr>
-              <a:t>wir</a:t>
-            </a:r>
-            <a:r>
-              <a:rPr lang="en-US" dirty="0">
-                <a:sym typeface="Wingdings" panose="05000000000000000000" pitchFamily="2" charset="2"/>
-              </a:rPr>
-              <a:t> </a:t>
-            </a:r>
-            <a:r>
-              <a:rPr lang="en-US" dirty="0" err="1">
-                <a:sym typeface="Wingdings" panose="05000000000000000000" pitchFamily="2" charset="2"/>
-              </a:rPr>
-              <a:t>noch</a:t>
-            </a:r>
-            <a:r>
-              <a:rPr lang="en-US" dirty="0">
-                <a:sym typeface="Wingdings" panose="05000000000000000000" pitchFamily="2" charset="2"/>
-              </a:rPr>
-              <a:t> </a:t>
-            </a:r>
-            <a:r>
-              <a:rPr lang="en-US" dirty="0" err="1">
-                <a:sym typeface="Wingdings" panose="05000000000000000000" pitchFamily="2" charset="2"/>
-              </a:rPr>
-              <a:t>hinzu</a:t>
-            </a:r>
-            <a:r>
-              <a:rPr lang="en-US" dirty="0">
-                <a:sym typeface="Wingdings" panose="05000000000000000000" pitchFamily="2" charset="2"/>
-              </a:rPr>
-              <a:t>?</a:t>
-            </a:r>
-          </a:p>
-          <a:p>
-            <a:pPr lvl="1"/>
-            <a:r>
-              <a:rPr lang="en-US" dirty="0">
-                <a:sym typeface="Wingdings" panose="05000000000000000000" pitchFamily="2" charset="2"/>
-              </a:rPr>
-              <a:t>Wir </a:t>
-            </a:r>
-            <a:r>
-              <a:rPr lang="en-US" dirty="0" err="1">
-                <a:sym typeface="Wingdings" panose="05000000000000000000" pitchFamily="2" charset="2"/>
-              </a:rPr>
-              <a:t>müssen</a:t>
-            </a:r>
-            <a:r>
-              <a:rPr lang="en-US" dirty="0">
-                <a:sym typeface="Wingdings" panose="05000000000000000000" pitchFamily="2" charset="2"/>
-              </a:rPr>
-              <a:t> alle </a:t>
-            </a:r>
-            <a:r>
-              <a:rPr lang="en-US" dirty="0" err="1">
-                <a:sym typeface="Wingdings" panose="05000000000000000000" pitchFamily="2" charset="2"/>
-              </a:rPr>
-              <a:t>Dokumente</a:t>
-            </a:r>
-            <a:r>
-              <a:rPr lang="en-US" dirty="0">
-                <a:sym typeface="Wingdings" panose="05000000000000000000" pitchFamily="2" charset="2"/>
-              </a:rPr>
-              <a:t> </a:t>
-            </a:r>
-            <a:r>
-              <a:rPr lang="en-US" dirty="0" err="1">
-                <a:sym typeface="Wingdings" panose="05000000000000000000" pitchFamily="2" charset="2"/>
-              </a:rPr>
-              <a:t>regelmäßig</a:t>
-            </a:r>
-            <a:r>
-              <a:rPr lang="en-US" dirty="0">
-                <a:sym typeface="Wingdings" panose="05000000000000000000" pitchFamily="2" charset="2"/>
-              </a:rPr>
-              <a:t> </a:t>
-            </a:r>
-            <a:r>
-              <a:rPr lang="en-US" dirty="0" err="1">
-                <a:sym typeface="Wingdings" panose="05000000000000000000" pitchFamily="2" charset="2"/>
-              </a:rPr>
-              <a:t>updaten</a:t>
-            </a:r>
-            <a:r>
-              <a:rPr lang="en-US" dirty="0">
-                <a:sym typeface="Wingdings" panose="05000000000000000000" pitchFamily="2" charset="2"/>
-              </a:rPr>
-              <a:t> (</a:t>
-            </a:r>
-            <a:r>
-              <a:rPr lang="en-US" dirty="0" err="1">
-                <a:sym typeface="Wingdings" panose="05000000000000000000" pitchFamily="2" charset="2"/>
-              </a:rPr>
-              <a:t>kein</a:t>
-            </a:r>
-            <a:r>
-              <a:rPr lang="en-US" dirty="0">
-                <a:sym typeface="Wingdings" panose="05000000000000000000" pitchFamily="2" charset="2"/>
-              </a:rPr>
-              <a:t> </a:t>
-            </a:r>
-            <a:r>
-              <a:rPr lang="en-US" dirty="0" err="1">
-                <a:sym typeface="Wingdings" panose="05000000000000000000" pitchFamily="2" charset="2"/>
-              </a:rPr>
-              <a:t>dynamischer</a:t>
-            </a:r>
-            <a:r>
-              <a:rPr lang="en-US" dirty="0">
-                <a:sym typeface="Wingdings" panose="05000000000000000000" pitchFamily="2" charset="2"/>
-              </a:rPr>
-              <a:t> </a:t>
-            </a:r>
-            <a:r>
-              <a:rPr lang="en-US" dirty="0" err="1">
-                <a:sym typeface="Wingdings" panose="05000000000000000000" pitchFamily="2" charset="2"/>
-              </a:rPr>
-              <a:t>zugriff</a:t>
-            </a:r>
-            <a:r>
-              <a:rPr lang="en-US" dirty="0">
-                <a:sym typeface="Wingdings" panose="05000000000000000000" pitchFamily="2" charset="2"/>
-              </a:rPr>
-              <a:t> </a:t>
-            </a:r>
-            <a:r>
-              <a:rPr lang="en-US" dirty="0" err="1">
-                <a:sym typeface="Wingdings" panose="05000000000000000000" pitchFamily="2" charset="2"/>
-              </a:rPr>
-              <a:t>momentan</a:t>
-            </a:r>
-            <a:r>
-              <a:rPr lang="en-US" dirty="0">
-                <a:sym typeface="Wingdings" panose="05000000000000000000" pitchFamily="2" charset="2"/>
-              </a:rPr>
-              <a:t>)?</a:t>
-            </a:r>
-          </a:p>
-          <a:p>
-            <a:endParaRPr lang="en-US" dirty="0">
-              <a:sym typeface="Wingdings" panose="05000000000000000000" pitchFamily="2" charset="2"/>
-            </a:endParaRPr>
-          </a:p>
-          <a:p>
-            <a:endParaRPr lang="en-US" dirty="0">
-              <a:sym typeface="Wingdings" panose="05000000000000000000" pitchFamily="2" charset="2"/>
-            </a:endParaRPr>
-          </a:p>
-          <a:p>
-            <a:r>
-              <a:rPr lang="en-US" dirty="0">
-                <a:sym typeface="Wingdings" panose="05000000000000000000" pitchFamily="2" charset="2"/>
-              </a:rPr>
-              <a:t>Wie </a:t>
-            </a:r>
-            <a:r>
-              <a:rPr lang="en-US" dirty="0" err="1">
-                <a:sym typeface="Wingdings" panose="05000000000000000000" pitchFamily="2" charset="2"/>
-              </a:rPr>
-              <a:t>vermitteln</a:t>
-            </a:r>
-            <a:r>
-              <a:rPr lang="en-US" dirty="0">
-                <a:sym typeface="Wingdings" panose="05000000000000000000" pitchFamily="2" charset="2"/>
-              </a:rPr>
-              <a:t> </a:t>
-            </a:r>
-            <a:r>
-              <a:rPr lang="en-US" dirty="0" err="1">
-                <a:sym typeface="Wingdings" panose="05000000000000000000" pitchFamily="2" charset="2"/>
-              </a:rPr>
-              <a:t>wir</a:t>
-            </a:r>
-            <a:r>
-              <a:rPr lang="en-US" dirty="0">
-                <a:sym typeface="Wingdings" panose="05000000000000000000" pitchFamily="2" charset="2"/>
-              </a:rPr>
-              <a:t> den </a:t>
-            </a:r>
-            <a:r>
-              <a:rPr lang="en-US" dirty="0" err="1">
-                <a:sym typeface="Wingdings" panose="05000000000000000000" pitchFamily="2" charset="2"/>
-              </a:rPr>
-              <a:t>Nutzern</a:t>
-            </a:r>
-            <a:r>
-              <a:rPr lang="en-US" dirty="0">
-                <a:sym typeface="Wingdings" panose="05000000000000000000" pitchFamily="2" charset="2"/>
-              </a:rPr>
-              <a:t> den Scope?</a:t>
-            </a:r>
-            <a:endParaRPr lang="en-DE" dirty="0"/>
-          </a:p>
-        </p:txBody>
-      </p:sp>
-    </p:spTree>
-    <p:extLst>
-      <p:ext uri="{BB962C8B-B14F-4D97-AF65-F5344CB8AC3E}">
-        <p14:creationId xmlns:p14="http://schemas.microsoft.com/office/powerpoint/2010/main" val="3232861218"/>
-      </p:ext>
-    </p:extLst>
-  </p:cSld>
-  <p:clrMapOvr>
-    <a:masterClrMapping/>
-  </p:clrMapOvr>
-</p:sld>
-</file>
-
-<file path=ppt/slides/slide11.xml><?xml version="1.0" encoding="utf-8"?>
-<p:sld xmlns:a="http://schemas.openxmlformats.org/drawingml/2006/main" xmlns:r="http://schemas.openxmlformats.org/officeDocument/2006/relationships" xmlns:p="http://schemas.openxmlformats.org/presentationml/2006/main">
-  <p:cSld>
-    <p:spTree>
-      <p:nvGrpSpPr>
-        <p:cNvPr id="1" name=""/>
-        <p:cNvGrpSpPr/>
-        <p:nvPr/>
-      </p:nvGrpSpPr>
-      <p:grpSpPr>
-        <a:xfrm>
-          <a:off x="0" y="0"/>
-          <a:ext cx="0" cy="0"/>
-          <a:chOff x="0" y="0"/>
-          <a:chExt cx="0" cy="0"/>
-        </a:xfrm>
-      </p:grpSpPr>
-      <p:sp>
-        <p:nvSpPr>
-          <p:cNvPr id="2" name="Title 1">
-            <a:extLst>
-              <a:ext uri="{FF2B5EF4-FFF2-40B4-BE49-F238E27FC236}">
                 <a16:creationId xmlns:a16="http://schemas.microsoft.com/office/drawing/2014/main" id="{73EEBAE2-85FB-F6A9-8F21-24F62F1832B8}"/>
               </a:ext>
             </a:extLst>
@@ -4384,7 +3889,7 @@
           <p:cNvPr id="2" name="Title 1">
             <a:extLst>
               <a:ext uri="{FF2B5EF4-FFF2-40B4-BE49-F238E27FC236}">
-                <a16:creationId xmlns:a16="http://schemas.microsoft.com/office/drawing/2014/main" id="{5943973A-63C1-A9C5-7900-ED0608AF6916}"/>
+                <a16:creationId xmlns:a16="http://schemas.microsoft.com/office/drawing/2014/main" id="{D8954E39-CFD7-F13F-0BF5-85AE31376177}"/>
               </a:ext>
             </a:extLst>
           </p:cNvPr>
@@ -4401,9 +3906,10 @@
           <a:lstStyle/>
           <a:p>
             <a:r>
-              <a:rPr lang="de-DE" noProof="0" dirty="0"/>
-              <a:t>Ergebnisse der Usertests mit Fragenkatalog</a:t>
-            </a:r>
+              <a:rPr lang="en-US" dirty="0"/>
+              <a:t>EA Developer</a:t>
+            </a:r>
+            <a:endParaRPr lang="en-DE" dirty="0"/>
           </a:p>
         </p:txBody>
       </p:sp>
@@ -4412,7 +3918,7 @@
           <p:cNvPr id="3" name="Content Placeholder 2">
             <a:extLst>
               <a:ext uri="{FF2B5EF4-FFF2-40B4-BE49-F238E27FC236}">
-                <a16:creationId xmlns:a16="http://schemas.microsoft.com/office/drawing/2014/main" id="{DB53040A-877B-031E-206E-917418F80B94}"/>
+                <a16:creationId xmlns:a16="http://schemas.microsoft.com/office/drawing/2014/main" id="{050FF78C-714E-5C0C-9404-0C8006868A9A}"/>
               </a:ext>
             </a:extLst>
           </p:cNvPr>
@@ -4429,23 +3935,232 @@
           <a:lstStyle/>
           <a:p>
             <a:r>
-              <a:rPr lang="de-DE" noProof="0" dirty="0"/>
-              <a:t>Allgemeines Bild gut</a:t>
-            </a:r>
-          </a:p>
-          <a:p>
-            <a:r>
-              <a:rPr lang="de-DE" dirty="0"/>
-              <a:t>F</a:t>
-            </a:r>
-            <a:endParaRPr lang="de-DE" noProof="0" dirty="0"/>
+              <a:rPr lang="en-US" dirty="0" err="1"/>
+              <a:t>Jetzige</a:t>
+            </a:r>
+            <a:r>
+              <a:rPr lang="en-US" dirty="0"/>
+              <a:t> </a:t>
+            </a:r>
+            <a:r>
+              <a:rPr lang="en-US" dirty="0" err="1"/>
+              <a:t>Funktionen</a:t>
+            </a:r>
+            <a:r>
+              <a:rPr lang="en-US" dirty="0"/>
+              <a:t> </a:t>
+            </a:r>
+            <a:r>
+              <a:rPr lang="en-US" dirty="0" err="1"/>
+              <a:t>eher</a:t>
+            </a:r>
+            <a:r>
+              <a:rPr lang="en-US" dirty="0"/>
+              <a:t> </a:t>
+            </a:r>
+            <a:r>
+              <a:rPr lang="en-US" dirty="0" err="1"/>
+              <a:t>weniger</a:t>
+            </a:r>
+            <a:r>
+              <a:rPr lang="en-US" dirty="0"/>
+              <a:t> </a:t>
+            </a:r>
+            <a:r>
+              <a:rPr lang="en-US" dirty="0" err="1"/>
+              <a:t>Sinnvoll</a:t>
+            </a:r>
+            <a:endParaRPr lang="en-US" dirty="0"/>
+          </a:p>
+          <a:p>
+            <a:r>
+              <a:rPr lang="en-US" dirty="0"/>
+              <a:t>Mit </a:t>
+            </a:r>
+            <a:r>
+              <a:rPr lang="en-US" dirty="0" err="1"/>
+              <a:t>infos</a:t>
+            </a:r>
+            <a:r>
+              <a:rPr lang="en-US" dirty="0"/>
+              <a:t> </a:t>
+            </a:r>
+            <a:r>
+              <a:rPr lang="en-US" dirty="0" err="1"/>
+              <a:t>über</a:t>
+            </a:r>
+            <a:r>
+              <a:rPr lang="en-US" dirty="0"/>
+              <a:t> </a:t>
+            </a:r>
+            <a:r>
+              <a:rPr lang="en-US" dirty="0" err="1"/>
+              <a:t>ehemalige</a:t>
+            </a:r>
+            <a:r>
+              <a:rPr lang="en-US" dirty="0"/>
+              <a:t> Support </a:t>
+            </a:r>
+            <a:r>
+              <a:rPr lang="en-US" dirty="0" err="1"/>
+              <a:t>Anfragen</a:t>
+            </a:r>
+            <a:r>
+              <a:rPr lang="en-US" dirty="0"/>
+              <a:t> und </a:t>
+            </a:r>
+            <a:r>
+              <a:rPr lang="en-US" dirty="0" err="1"/>
+              <a:t>zugriff</a:t>
+            </a:r>
+            <a:r>
+              <a:rPr lang="en-US" dirty="0"/>
+              <a:t> auf Confluence </a:t>
+            </a:r>
+            <a:r>
+              <a:rPr lang="en-US" dirty="0" err="1"/>
+              <a:t>könnte</a:t>
+            </a:r>
+            <a:r>
+              <a:rPr lang="en-US" dirty="0"/>
+              <a:t> </a:t>
+            </a:r>
+            <a:r>
+              <a:rPr lang="en-US" dirty="0" err="1"/>
+              <a:t>ein</a:t>
+            </a:r>
+            <a:r>
+              <a:rPr lang="en-US" dirty="0"/>
+              <a:t> Bot </a:t>
+            </a:r>
+            <a:r>
+              <a:rPr lang="en-US" dirty="0" err="1"/>
+              <a:t>beim</a:t>
+            </a:r>
+            <a:r>
+              <a:rPr lang="en-US" dirty="0"/>
+              <a:t> Support </a:t>
+            </a:r>
+            <a:r>
+              <a:rPr lang="en-US" dirty="0" err="1"/>
+              <a:t>helfen</a:t>
+            </a:r>
+            <a:endParaRPr lang="en-US" dirty="0"/>
+          </a:p>
+          <a:p>
+            <a:endParaRPr lang="en-US" dirty="0"/>
+          </a:p>
+          <a:p>
+            <a:r>
+              <a:rPr lang="en-US" dirty="0">
+                <a:sym typeface="Wingdings" panose="05000000000000000000" pitchFamily="2" charset="2"/>
+              </a:rPr>
+              <a:t> Neuer Bot für EA Devs </a:t>
+            </a:r>
+            <a:r>
+              <a:rPr lang="en-US" dirty="0" err="1">
+                <a:sym typeface="Wingdings" panose="05000000000000000000" pitchFamily="2" charset="2"/>
+              </a:rPr>
+              <a:t>im</a:t>
+            </a:r>
+            <a:r>
+              <a:rPr lang="en-US" dirty="0">
+                <a:sym typeface="Wingdings" panose="05000000000000000000" pitchFamily="2" charset="2"/>
+              </a:rPr>
+              <a:t> Support </a:t>
+            </a:r>
+            <a:r>
+              <a:rPr lang="en-US" dirty="0" err="1">
+                <a:sym typeface="Wingdings" panose="05000000000000000000" pitchFamily="2" charset="2"/>
+              </a:rPr>
+              <a:t>mit</a:t>
+            </a:r>
+            <a:r>
+              <a:rPr lang="en-US" dirty="0">
+                <a:sym typeface="Wingdings" panose="05000000000000000000" pitchFamily="2" charset="2"/>
+              </a:rPr>
+              <a:t> </a:t>
+            </a:r>
+            <a:r>
+              <a:rPr lang="en-US" dirty="0" err="1">
+                <a:sym typeface="Wingdings" panose="05000000000000000000" pitchFamily="2" charset="2"/>
+              </a:rPr>
+              <a:t>Zugriff</a:t>
+            </a:r>
+            <a:r>
+              <a:rPr lang="en-US" dirty="0">
+                <a:sym typeface="Wingdings" panose="05000000000000000000" pitchFamily="2" charset="2"/>
+              </a:rPr>
+              <a:t> auf </a:t>
+            </a:r>
+            <a:r>
+              <a:rPr lang="en-US" dirty="0" err="1">
+                <a:sym typeface="Wingdings" panose="05000000000000000000" pitchFamily="2" charset="2"/>
+              </a:rPr>
+              <a:t>vergangene</a:t>
+            </a:r>
+            <a:r>
+              <a:rPr lang="en-US" dirty="0">
+                <a:sym typeface="Wingdings" panose="05000000000000000000" pitchFamily="2" charset="2"/>
+              </a:rPr>
+              <a:t> Support Tickets / Confluence </a:t>
+            </a:r>
+            <a:r>
+              <a:rPr lang="en-US" dirty="0" err="1">
+                <a:sym typeface="Wingdings" panose="05000000000000000000" pitchFamily="2" charset="2"/>
+              </a:rPr>
+              <a:t>Bereich</a:t>
+            </a:r>
+            <a:r>
+              <a:rPr lang="en-US" dirty="0">
+                <a:sym typeface="Wingdings" panose="05000000000000000000" pitchFamily="2" charset="2"/>
+              </a:rPr>
+              <a:t> (Bot </a:t>
+            </a:r>
+            <a:r>
+              <a:rPr lang="en-US" dirty="0" err="1">
+                <a:sym typeface="Wingdings" panose="05000000000000000000" pitchFamily="2" charset="2"/>
+              </a:rPr>
+              <a:t>steht</a:t>
+            </a:r>
+            <a:r>
+              <a:rPr lang="en-US" dirty="0">
+                <a:sym typeface="Wingdings" panose="05000000000000000000" pitchFamily="2" charset="2"/>
+              </a:rPr>
+              <a:t> nicht direct </a:t>
+            </a:r>
+            <a:r>
+              <a:rPr lang="en-US" dirty="0" err="1">
+                <a:sym typeface="Wingdings" panose="05000000000000000000" pitchFamily="2" charset="2"/>
+              </a:rPr>
+              <a:t>im</a:t>
+            </a:r>
+            <a:r>
+              <a:rPr lang="en-US" dirty="0">
+                <a:sym typeface="Wingdings" panose="05000000000000000000" pitchFamily="2" charset="2"/>
+              </a:rPr>
+              <a:t> </a:t>
+            </a:r>
+            <a:r>
+              <a:rPr lang="en-US" dirty="0" err="1">
+                <a:sym typeface="Wingdings" panose="05000000000000000000" pitchFamily="2" charset="2"/>
+              </a:rPr>
+              <a:t>Kundenkontakt</a:t>
+            </a:r>
+            <a:r>
+              <a:rPr lang="en-US" dirty="0">
+                <a:sym typeface="Wingdings" panose="05000000000000000000" pitchFamily="2" charset="2"/>
+              </a:rPr>
+              <a:t>)</a:t>
+            </a:r>
+            <a:endParaRPr lang="en-DE" dirty="0"/>
           </a:p>
         </p:txBody>
       </p:sp>
     </p:spTree>
     <p:extLst>
       <p:ext uri="{BB962C8B-B14F-4D97-AF65-F5344CB8AC3E}">
-        <p14:creationId xmlns:p14="http://schemas.microsoft.com/office/powerpoint/2010/main" val="2632881477"/>
+        <p14:creationId xmlns:p14="http://schemas.microsoft.com/office/powerpoint/2010/main" val="3782647167"/>
       </p:ext>
     </p:extLst>
   </p:cSld>
@@ -4477,7 +4192,7 @@
           <p:cNvPr id="2" name="Title 1">
             <a:extLst>
               <a:ext uri="{FF2B5EF4-FFF2-40B4-BE49-F238E27FC236}">
-                <a16:creationId xmlns:a16="http://schemas.microsoft.com/office/drawing/2014/main" id="{D8954E39-CFD7-F13F-0BF5-85AE31376177}"/>
+                <a16:creationId xmlns:a16="http://schemas.microsoft.com/office/drawing/2014/main" id="{2EEFFDCC-9871-C9F3-0F16-2D1C9FFC1AC3}"/>
               </a:ext>
             </a:extLst>
           </p:cNvPr>
@@ -4494,8 +4209,32 @@
           <a:lstStyle/>
           <a:p>
             <a:r>
-              <a:rPr lang="en-US" dirty="0"/>
-              <a:t>EA Developer</a:t>
+              <a:rPr lang="en-US" dirty="0" err="1"/>
+              <a:t>Berater</a:t>
+            </a:r>
+            <a:r>
+              <a:rPr lang="en-US" dirty="0"/>
+              <a:t> </a:t>
+            </a:r>
+            <a:r>
+              <a:rPr lang="en-US" dirty="0" err="1"/>
+              <a:t>mit</a:t>
+            </a:r>
+            <a:r>
+              <a:rPr lang="en-US" dirty="0"/>
+              <a:t> </a:t>
+            </a:r>
+            <a:r>
+              <a:rPr lang="en-US" dirty="0" err="1"/>
+              <a:t>wenig</a:t>
+            </a:r>
+            <a:r>
+              <a:rPr lang="en-US" dirty="0"/>
+              <a:t> EA </a:t>
+            </a:r>
+            <a:r>
+              <a:rPr lang="en-US" dirty="0" err="1"/>
+              <a:t>Erfahrung</a:t>
             </a:r>
             <a:endParaRPr lang="en-DE" dirty="0"/>
           </a:p>
@@ -4506,7 +4245,7 @@
           <p:cNvPr id="3" name="Content Placeholder 2">
             <a:extLst>
               <a:ext uri="{FF2B5EF4-FFF2-40B4-BE49-F238E27FC236}">
-                <a16:creationId xmlns:a16="http://schemas.microsoft.com/office/drawing/2014/main" id="{050FF78C-714E-5C0C-9404-0C8006868A9A}"/>
+                <a16:creationId xmlns:a16="http://schemas.microsoft.com/office/drawing/2014/main" id="{2D3346A6-E43C-78FA-ABC0-1A49DC8BD529}"/>
               </a:ext>
             </a:extLst>
           </p:cNvPr>
@@ -4524,222 +4263,121 @@
           <a:p>
             <a:r>
               <a:rPr lang="en-US" dirty="0" err="1"/>
-              <a:t>Jetzige</a:t>
-            </a:r>
-            <a:r>
-              <a:rPr lang="en-US" dirty="0"/>
-              <a:t> </a:t>
-            </a:r>
-            <a:r>
-              <a:rPr lang="en-US" dirty="0" err="1"/>
-              <a:t>Funktionen</a:t>
-            </a:r>
-            <a:r>
-              <a:rPr lang="en-US" dirty="0"/>
-              <a:t> </a:t>
-            </a:r>
-            <a:r>
-              <a:rPr lang="en-US" dirty="0" err="1"/>
-              <a:t>eher</a:t>
-            </a:r>
-            <a:r>
-              <a:rPr lang="en-US" dirty="0"/>
-              <a:t> </a:t>
-            </a:r>
-            <a:r>
-              <a:rPr lang="en-US" dirty="0" err="1"/>
-              <a:t>weniger</a:t>
-            </a:r>
-            <a:r>
-              <a:rPr lang="en-US" dirty="0"/>
-              <a:t> </a:t>
-            </a:r>
-            <a:r>
-              <a:rPr lang="en-US" dirty="0" err="1"/>
-              <a:t>Sinnvoll</a:t>
-            </a:r>
-            <a:endParaRPr lang="en-US" dirty="0"/>
-          </a:p>
-          <a:p>
-            <a:r>
-              <a:rPr lang="en-US" dirty="0"/>
-              <a:t>Mit </a:t>
-            </a:r>
-            <a:r>
-              <a:rPr lang="en-US" dirty="0" err="1"/>
-              <a:t>infos</a:t>
-            </a:r>
-            <a:r>
-              <a:rPr lang="en-US" dirty="0"/>
-              <a:t> </a:t>
-            </a:r>
-            <a:r>
-              <a:rPr lang="en-US" dirty="0" err="1"/>
-              <a:t>über</a:t>
-            </a:r>
-            <a:r>
-              <a:rPr lang="en-US" dirty="0"/>
-              <a:t> </a:t>
-            </a:r>
-            <a:r>
-              <a:rPr lang="en-US" dirty="0" err="1"/>
-              <a:t>ehemalige</a:t>
-            </a:r>
-            <a:r>
-              <a:rPr lang="en-US" dirty="0"/>
-              <a:t> Support </a:t>
-            </a:r>
-            <a:r>
-              <a:rPr lang="en-US" dirty="0" err="1"/>
-              <a:t>Anfragen</a:t>
-            </a:r>
-            <a:r>
-              <a:rPr lang="en-US" dirty="0"/>
-              <a:t> und </a:t>
-            </a:r>
-            <a:r>
-              <a:rPr lang="en-US" dirty="0" err="1"/>
-              <a:t>zugriff</a:t>
-            </a:r>
-            <a:r>
-              <a:rPr lang="en-US" dirty="0"/>
-              <a:t> auf Confluence </a:t>
-            </a:r>
-            <a:r>
-              <a:rPr lang="en-US" dirty="0" err="1"/>
-              <a:t>könnte</a:t>
-            </a:r>
-            <a:r>
-              <a:rPr lang="en-US" dirty="0"/>
-              <a:t> </a:t>
-            </a:r>
-            <a:r>
-              <a:rPr lang="en-US" dirty="0" err="1"/>
-              <a:t>ein</a:t>
-            </a:r>
-            <a:r>
-              <a:rPr lang="en-US" dirty="0"/>
-              <a:t> Bot </a:t>
-            </a:r>
-            <a:r>
-              <a:rPr lang="en-US" dirty="0" err="1"/>
-              <a:t>beim</a:t>
-            </a:r>
-            <a:r>
-              <a:rPr lang="en-US" dirty="0"/>
-              <a:t> Support </a:t>
-            </a:r>
-            <a:r>
-              <a:rPr lang="en-US" dirty="0" err="1"/>
-              <a:t>helfen</a:t>
-            </a:r>
-            <a:endParaRPr lang="en-US" dirty="0"/>
-          </a:p>
-          <a:p>
-            <a:endParaRPr lang="en-US" dirty="0"/>
-          </a:p>
-          <a:p>
-            <a:r>
-              <a:rPr lang="en-US" dirty="0">
-                <a:sym typeface="Wingdings" panose="05000000000000000000" pitchFamily="2" charset="2"/>
-              </a:rPr>
-              <a:t> Neuer Bot für EA Devs </a:t>
-            </a:r>
-            <a:r>
-              <a:rPr lang="en-US" dirty="0" err="1">
-                <a:sym typeface="Wingdings" panose="05000000000000000000" pitchFamily="2" charset="2"/>
-              </a:rPr>
-              <a:t>im</a:t>
-            </a:r>
-            <a:r>
-              <a:rPr lang="en-US" dirty="0">
-                <a:sym typeface="Wingdings" panose="05000000000000000000" pitchFamily="2" charset="2"/>
-              </a:rPr>
-              <a:t> Support </a:t>
-            </a:r>
-            <a:r>
-              <a:rPr lang="en-US" dirty="0" err="1">
-                <a:sym typeface="Wingdings" panose="05000000000000000000" pitchFamily="2" charset="2"/>
-              </a:rPr>
-              <a:t>mit</a:t>
-            </a:r>
-            <a:r>
-              <a:rPr lang="en-US" dirty="0">
-                <a:sym typeface="Wingdings" panose="05000000000000000000" pitchFamily="2" charset="2"/>
-              </a:rPr>
-              <a:t> </a:t>
-            </a:r>
-            <a:r>
-              <a:rPr lang="en-US" dirty="0" err="1">
-                <a:sym typeface="Wingdings" panose="05000000000000000000" pitchFamily="2" charset="2"/>
-              </a:rPr>
-              <a:t>Zugriff</a:t>
-            </a:r>
-            <a:r>
-              <a:rPr lang="en-US" dirty="0">
-                <a:sym typeface="Wingdings" panose="05000000000000000000" pitchFamily="2" charset="2"/>
-              </a:rPr>
-              <a:t> auf </a:t>
-            </a:r>
-            <a:r>
-              <a:rPr lang="en-US" dirty="0" err="1">
-                <a:sym typeface="Wingdings" panose="05000000000000000000" pitchFamily="2" charset="2"/>
-              </a:rPr>
-              <a:t>vergangene</a:t>
-            </a:r>
-            <a:r>
-              <a:rPr lang="en-US" dirty="0">
-                <a:sym typeface="Wingdings" panose="05000000000000000000" pitchFamily="2" charset="2"/>
-              </a:rPr>
-              <a:t> Support Tickets / Confluence </a:t>
-            </a:r>
-            <a:r>
-              <a:rPr lang="en-US" dirty="0" err="1">
-                <a:sym typeface="Wingdings" panose="05000000000000000000" pitchFamily="2" charset="2"/>
-              </a:rPr>
-              <a:t>Bereich</a:t>
-            </a:r>
-            <a:r>
-              <a:rPr lang="en-US" dirty="0">
-                <a:sym typeface="Wingdings" panose="05000000000000000000" pitchFamily="2" charset="2"/>
-              </a:rPr>
-              <a:t> (Bot </a:t>
-            </a:r>
-            <a:r>
-              <a:rPr lang="en-US" dirty="0" err="1">
-                <a:sym typeface="Wingdings" panose="05000000000000000000" pitchFamily="2" charset="2"/>
-              </a:rPr>
-              <a:t>steht</a:t>
-            </a:r>
-            <a:r>
-              <a:rPr lang="en-US" dirty="0">
-                <a:sym typeface="Wingdings" panose="05000000000000000000" pitchFamily="2" charset="2"/>
-              </a:rPr>
-              <a:t> nicht direct </a:t>
-            </a:r>
-            <a:r>
-              <a:rPr lang="en-US" dirty="0" err="1">
-                <a:sym typeface="Wingdings" panose="05000000000000000000" pitchFamily="2" charset="2"/>
-              </a:rPr>
-              <a:t>im</a:t>
-            </a:r>
-            <a:r>
-              <a:rPr lang="en-US" dirty="0">
-                <a:sym typeface="Wingdings" panose="05000000000000000000" pitchFamily="2" charset="2"/>
-              </a:rPr>
-              <a:t> </a:t>
-            </a:r>
-            <a:r>
-              <a:rPr lang="en-US" dirty="0" err="1">
-                <a:sym typeface="Wingdings" panose="05000000000000000000" pitchFamily="2" charset="2"/>
-              </a:rPr>
-              <a:t>Kundenkontakt</a:t>
-            </a:r>
-            <a:r>
-              <a:rPr lang="en-US" dirty="0">
-                <a:sym typeface="Wingdings" panose="05000000000000000000" pitchFamily="2" charset="2"/>
-              </a:rPr>
+              <a:t>Können</a:t>
+            </a:r>
+            <a:r>
+              <a:rPr lang="en-US" dirty="0"/>
+              <a:t> </a:t>
+            </a:r>
+            <a:r>
+              <a:rPr lang="en-US" dirty="0" err="1"/>
+              <a:t>zum</a:t>
+            </a:r>
+            <a:r>
+              <a:rPr lang="en-US" dirty="0"/>
+              <a:t> EA </a:t>
+            </a:r>
+            <a:r>
+              <a:rPr lang="en-US" dirty="0" err="1"/>
+              <a:t>hingeleitet</a:t>
+            </a:r>
+            <a:r>
+              <a:rPr lang="en-US" dirty="0"/>
+              <a:t> </a:t>
+            </a:r>
+            <a:r>
+              <a:rPr lang="en-US" dirty="0" err="1"/>
+              <a:t>werden</a:t>
+            </a:r>
+            <a:r>
+              <a:rPr lang="en-US" dirty="0"/>
+              <a:t> (Schritt für Schritt </a:t>
+            </a:r>
+            <a:r>
+              <a:rPr lang="en-US" dirty="0" err="1"/>
+              <a:t>anleitung</a:t>
+            </a:r>
+            <a:r>
+              <a:rPr lang="en-US" dirty="0"/>
+              <a:t>, </a:t>
+            </a:r>
+            <a:r>
+              <a:rPr lang="en-US" dirty="0" err="1"/>
+              <a:t>tipps</a:t>
+            </a:r>
+            <a:r>
+              <a:rPr lang="en-US" dirty="0"/>
+              <a:t> wo, was </a:t>
+            </a:r>
+            <a:r>
+              <a:rPr lang="en-US" dirty="0" err="1"/>
+              <a:t>zu</a:t>
+            </a:r>
+            <a:r>
+              <a:rPr lang="en-US" dirty="0"/>
+              <a:t> </a:t>
+            </a:r>
+            <a:r>
+              <a:rPr lang="en-US" dirty="0" err="1"/>
+              <a:t>finden</a:t>
+            </a:r>
+            <a:r>
+              <a:rPr lang="en-US" dirty="0"/>
+              <a:t> </a:t>
+            </a:r>
+            <a:r>
+              <a:rPr lang="en-US" dirty="0" err="1"/>
+              <a:t>ist</a:t>
+            </a:r>
+            <a:r>
+              <a:rPr lang="en-US" dirty="0"/>
               <a:t>)</a:t>
+            </a:r>
+          </a:p>
+          <a:p>
+            <a:r>
+              <a:rPr lang="en-US" dirty="0" err="1"/>
+              <a:t>Profitieren</a:t>
+            </a:r>
+            <a:r>
+              <a:rPr lang="en-US" dirty="0"/>
+              <a:t> von </a:t>
+            </a:r>
+            <a:r>
+              <a:rPr lang="en-US" dirty="0" err="1"/>
+              <a:t>Daten</a:t>
+            </a:r>
+            <a:r>
+              <a:rPr lang="en-US" dirty="0"/>
+              <a:t> </a:t>
+            </a:r>
+            <a:r>
+              <a:rPr lang="en-US" dirty="0" err="1"/>
+              <a:t>selbst</a:t>
+            </a:r>
+            <a:r>
+              <a:rPr lang="en-US" dirty="0"/>
+              <a:t> </a:t>
+            </a:r>
+            <a:r>
+              <a:rPr lang="en-US" dirty="0" err="1"/>
+              <a:t>wenn</a:t>
+            </a:r>
+            <a:r>
+              <a:rPr lang="en-US" dirty="0"/>
+              <a:t> Sie den EA nicht </a:t>
+            </a:r>
+            <a:r>
+              <a:rPr lang="en-US" dirty="0" err="1"/>
+              <a:t>direkt</a:t>
+            </a:r>
+            <a:r>
+              <a:rPr lang="en-US" dirty="0"/>
+              <a:t> </a:t>
+            </a:r>
+            <a:r>
+              <a:rPr lang="en-US" dirty="0" err="1"/>
+              <a:t>benutzen</a:t>
             </a:r>
             <a:endParaRPr lang="en-DE" dirty="0"/>
           </a:p>
@@ -4748,7 +4386,7 @@
     </p:spTree>
     <p:extLst>
       <p:ext uri="{BB962C8B-B14F-4D97-AF65-F5344CB8AC3E}">
-        <p14:creationId xmlns:p14="http://schemas.microsoft.com/office/powerpoint/2010/main" val="3782647167"/>
+        <p14:creationId xmlns:p14="http://schemas.microsoft.com/office/powerpoint/2010/main" val="2587883214"/>
       </p:ext>
     </p:extLst>
   </p:cSld>
@@ -4780,7 +4418,7 @@
           <p:cNvPr id="2" name="Title 1">
             <a:extLst>
               <a:ext uri="{FF2B5EF4-FFF2-40B4-BE49-F238E27FC236}">
-                <a16:creationId xmlns:a16="http://schemas.microsoft.com/office/drawing/2014/main" id="{2EEFFDCC-9871-C9F3-0F16-2D1C9FFC1AC3}"/>
+                <a16:creationId xmlns:a16="http://schemas.microsoft.com/office/drawing/2014/main" id="{F78A2596-908E-C0CD-7F62-0C70DEA8A350}"/>
               </a:ext>
             </a:extLst>
           </p:cNvPr>
@@ -4797,8 +4435,177 @@
           <a:lstStyle/>
           <a:p>
             <a:r>
-              <a:rPr lang="en-US" dirty="0" err="1"/>
-              <a:t>Berater</a:t>
+              <a:rPr lang="en-US" dirty="0"/>
+              <a:t>Power User</a:t>
+            </a:r>
+            <a:endParaRPr lang="en-DE" dirty="0"/>
+          </a:p>
+        </p:txBody>
+      </p:sp>
+      <p:sp>
+        <p:nvSpPr>
+          <p:cNvPr id="3" name="Content Placeholder 2">
+            <a:extLst>
+              <a:ext uri="{FF2B5EF4-FFF2-40B4-BE49-F238E27FC236}">
+                <a16:creationId xmlns:a16="http://schemas.microsoft.com/office/drawing/2014/main" id="{6C0E3B94-134A-6694-4624-DFEB9F9BDE00}"/>
+              </a:ext>
+            </a:extLst>
+          </p:cNvPr>
+          <p:cNvSpPr>
+            <a:spLocks noGrp="1"/>
+          </p:cNvSpPr>
+          <p:nvPr>
+            <p:ph idx="1"/>
+          </p:nvPr>
+        </p:nvSpPr>
+        <p:spPr/>
+        <p:txBody>
+          <a:bodyPr/>
+          <a:lstStyle/>
+          <a:p>
+            <a:r>
+              <a:rPr lang="en-US" dirty="0"/>
+              <a:t>Wissen </a:t>
+            </a:r>
+            <a:r>
+              <a:rPr lang="en-US" dirty="0" err="1"/>
+              <a:t>eher</a:t>
+            </a:r>
+            <a:r>
+              <a:rPr lang="en-US" dirty="0"/>
+              <a:t> was Chatbot </a:t>
+            </a:r>
+            <a:r>
+              <a:rPr lang="en-US" dirty="0" err="1"/>
+              <a:t>kann</a:t>
+            </a:r>
+            <a:r>
+              <a:rPr lang="en-US" dirty="0"/>
+              <a:t> </a:t>
+            </a:r>
+            <a:r>
+              <a:rPr lang="en-US" dirty="0" err="1"/>
+              <a:t>wenn</a:t>
+            </a:r>
+            <a:r>
+              <a:rPr lang="en-US" dirty="0"/>
+              <a:t> er die EA </a:t>
+            </a:r>
+            <a:r>
+              <a:rPr lang="en-US" dirty="0" err="1"/>
+              <a:t>Daten</a:t>
+            </a:r>
+            <a:r>
+              <a:rPr lang="en-US" dirty="0"/>
+              <a:t> hat</a:t>
+            </a:r>
+          </a:p>
+          <a:p>
+            <a:r>
+              <a:rPr lang="en-US" dirty="0" err="1"/>
+              <a:t>Würden</a:t>
+            </a:r>
+            <a:r>
+              <a:rPr lang="en-US" dirty="0"/>
+              <a:t> den Chatbot </a:t>
+            </a:r>
+            <a:r>
+              <a:rPr lang="en-US" dirty="0" err="1"/>
+              <a:t>als</a:t>
+            </a:r>
+            <a:r>
+              <a:rPr lang="en-US" dirty="0"/>
+              <a:t> high level </a:t>
+            </a:r>
+            <a:r>
+              <a:rPr lang="en-US" dirty="0" err="1"/>
+              <a:t>Unterstützung</a:t>
+            </a:r>
+            <a:r>
+              <a:rPr lang="en-US" dirty="0"/>
+              <a:t> </a:t>
+            </a:r>
+            <a:r>
+              <a:rPr lang="en-US" dirty="0" err="1"/>
+              <a:t>benutzen</a:t>
+            </a:r>
+            <a:r>
+              <a:rPr lang="en-US" dirty="0"/>
+              <a:t> (</a:t>
+            </a:r>
+            <a:r>
+              <a:rPr lang="en-US" dirty="0" err="1"/>
+              <a:t>erstmal</a:t>
+            </a:r>
+            <a:r>
+              <a:rPr lang="en-US" dirty="0"/>
+              <a:t>)</a:t>
+            </a:r>
+          </a:p>
+          <a:p>
+            <a:r>
+              <a:rPr lang="en-US" dirty="0"/>
+              <a:t>Haben dem Chatbot </a:t>
+            </a:r>
+            <a:r>
+              <a:rPr lang="en-US" dirty="0" err="1"/>
+              <a:t>schon</a:t>
+            </a:r>
+            <a:r>
+              <a:rPr lang="en-US" dirty="0"/>
+              <a:t> </a:t>
+            </a:r>
+            <a:r>
+              <a:rPr lang="en-US" dirty="0" err="1"/>
+              <a:t>komplexere</a:t>
+            </a:r>
+            <a:r>
+              <a:rPr lang="en-US" dirty="0"/>
+              <a:t> </a:t>
+            </a:r>
+            <a:r>
+              <a:rPr lang="en-US" dirty="0" err="1"/>
+              <a:t>Fragen</a:t>
+            </a:r>
+            <a:r>
+              <a:rPr lang="en-US" dirty="0"/>
+              <a:t> </a:t>
+            </a:r>
+            <a:r>
+              <a:rPr lang="en-US" dirty="0" err="1"/>
+              <a:t>zu</a:t>
+            </a:r>
+            <a:r>
+              <a:rPr lang="en-US" dirty="0"/>
+              <a:t> Confluence </a:t>
+            </a:r>
+            <a:r>
+              <a:rPr lang="en-US" dirty="0" err="1"/>
+              <a:t>themen</a:t>
+            </a:r>
+            <a:r>
+              <a:rPr lang="en-US" dirty="0"/>
+              <a:t> </a:t>
+            </a:r>
+            <a:r>
+              <a:rPr lang="en-US" dirty="0" err="1"/>
+              <a:t>gestellt</a:t>
+            </a:r>
+            <a:r>
+              <a:rPr lang="en-US" dirty="0"/>
+              <a:t> die er </a:t>
+            </a:r>
+            <a:r>
+              <a:rPr lang="en-US" dirty="0" err="1"/>
+              <a:t>u.a.</a:t>
+            </a:r>
+            <a:r>
+              <a:rPr lang="en-US" dirty="0"/>
+              <a:t> </a:t>
+            </a:r>
+            <a:r>
+              <a:rPr lang="en-US" dirty="0" err="1"/>
+              <a:t>auch</a:t>
             </a:r>
             <a:r>
               <a:rPr lang="en-US" dirty="0"/>
@@ -4814,116 +4621,36 @@
             </a:r>
             <a:r>
               <a:rPr lang="en-US" dirty="0" err="1"/>
-              <a:t>wenig</a:t>
-            </a:r>
-            <a:r>
-              <a:rPr lang="en-US" dirty="0"/>
-              <a:t> EA </a:t>
+              <a:t>eigener</a:t>
+            </a:r>
+            <a:r>
+              <a:rPr lang="en-US" dirty="0"/>
+              <a:t> </a:t>
             </a:r>
             <a:r>
               <a:rPr lang="en-US" dirty="0" err="1"/>
               <a:t>Erfahrung</a:t>
             </a:r>
+            <a:r>
+              <a:rPr lang="en-US" dirty="0"/>
+              <a:t> </a:t>
+            </a:r>
+            <a:r>
+              <a:rPr lang="en-US" dirty="0" err="1"/>
+              <a:t>beantwortet</a:t>
+            </a:r>
+            <a:r>
+              <a:rPr lang="en-US" dirty="0"/>
+              <a:t> hat</a:t>
+            </a:r>
             <a:endParaRPr lang="en-DE" dirty="0"/>
-          </a:p>
-        </p:txBody>
-      </p:sp>
-      <p:sp>
-        <p:nvSpPr>
-          <p:cNvPr id="3" name="Content Placeholder 2">
-            <a:extLst>
-              <a:ext uri="{FF2B5EF4-FFF2-40B4-BE49-F238E27FC236}">
-                <a16:creationId xmlns:a16="http://schemas.microsoft.com/office/drawing/2014/main" id="{2D3346A6-E43C-78FA-ABC0-1A49DC8BD529}"/>
-              </a:ext>
-            </a:extLst>
-          </p:cNvPr>
-          <p:cNvSpPr>
-            <a:spLocks noGrp="1"/>
-          </p:cNvSpPr>
-          <p:nvPr>
-            <p:ph idx="1"/>
-          </p:nvPr>
-        </p:nvSpPr>
-        <p:spPr/>
-        <p:txBody>
-          <a:bodyPr/>
-          <a:lstStyle/>
-          <a:p>
-            <a:r>
-              <a:rPr lang="en-US" dirty="0" err="1"/>
-              <a:t>Können</a:t>
-            </a:r>
-            <a:r>
-              <a:rPr lang="en-US" dirty="0"/>
-              <a:t> </a:t>
-            </a:r>
-            <a:r>
-              <a:rPr lang="en-US" dirty="0" err="1"/>
-              <a:t>zum</a:t>
-            </a:r>
-            <a:r>
-              <a:rPr lang="en-US" dirty="0"/>
-              <a:t> EA </a:t>
-            </a:r>
-            <a:r>
-              <a:rPr lang="en-US" dirty="0" err="1"/>
-              <a:t>hingeleitet</a:t>
-            </a:r>
-            <a:r>
-              <a:rPr lang="en-US" dirty="0"/>
-              <a:t> </a:t>
-            </a:r>
-            <a:r>
-              <a:rPr lang="en-US" dirty="0" err="1"/>
-              <a:t>werden</a:t>
-            </a:r>
-            <a:endParaRPr lang="en-US" dirty="0"/>
-          </a:p>
-          <a:p>
-            <a:r>
-              <a:rPr lang="en-US" dirty="0" err="1"/>
-              <a:t>Profitieren</a:t>
-            </a:r>
-            <a:r>
-              <a:rPr lang="en-US" dirty="0"/>
-              <a:t> von </a:t>
-            </a:r>
-            <a:r>
-              <a:rPr lang="en-US" dirty="0" err="1"/>
-              <a:t>Daten</a:t>
-            </a:r>
-            <a:r>
-              <a:rPr lang="en-US" dirty="0"/>
-              <a:t> </a:t>
-            </a:r>
-            <a:r>
-              <a:rPr lang="en-US" dirty="0" err="1"/>
-              <a:t>selbst</a:t>
-            </a:r>
-            <a:r>
-              <a:rPr lang="en-US" dirty="0"/>
-              <a:t> </a:t>
-            </a:r>
-            <a:r>
-              <a:rPr lang="en-US" dirty="0" err="1"/>
-              <a:t>wenn</a:t>
-            </a:r>
-            <a:r>
-              <a:rPr lang="en-US" dirty="0"/>
-              <a:t> Sie den EA nicht direct </a:t>
-            </a:r>
-            <a:r>
-              <a:rPr lang="en-US"/>
-              <a:t>benutzen</a:t>
-            </a:r>
-            <a:endParaRPr lang="en-DE"/>
           </a:p>
         </p:txBody>
       </p:sp>
     </p:spTree>
     <p:extLst>
       <p:ext uri="{BB962C8B-B14F-4D97-AF65-F5344CB8AC3E}">
-        <p14:creationId xmlns:p14="http://schemas.microsoft.com/office/powerpoint/2010/main" val="2587883214"/>
+        <p14:creationId xmlns:p14="http://schemas.microsoft.com/office/powerpoint/2010/main" val="4222286360"/>
       </p:ext>
     </p:extLst>
   </p:cSld>
@@ -4955,7 +4682,7 @@
           <p:cNvPr id="2" name="Title 1">
             <a:extLst>
               <a:ext uri="{FF2B5EF4-FFF2-40B4-BE49-F238E27FC236}">
-                <a16:creationId xmlns:a16="http://schemas.microsoft.com/office/drawing/2014/main" id="{F78A2596-908E-C0CD-7F62-0C70DEA8A350}"/>
+                <a16:creationId xmlns:a16="http://schemas.microsoft.com/office/drawing/2014/main" id="{D9357320-6786-8C23-B010-2B46A856BDEF}"/>
               </a:ext>
             </a:extLst>
           </p:cNvPr>
@@ -4972,10 +4699,9 @@
           <a:lstStyle/>
           <a:p>
             <a:r>
-              <a:rPr lang="en-US" dirty="0"/>
-              <a:t>Power User</a:t>
-            </a:r>
-            <a:endParaRPr lang="en-DE" dirty="0"/>
+              <a:rPr lang="de-DE" noProof="0" dirty="0"/>
+              <a:t>Meine Erfahrung</a:t>
+            </a:r>
           </a:p>
         </p:txBody>
       </p:sp>
@@ -4984,7 +4710,7 @@
           <p:cNvPr id="3" name="Content Placeholder 2">
             <a:extLst>
               <a:ext uri="{FF2B5EF4-FFF2-40B4-BE49-F238E27FC236}">
-                <a16:creationId xmlns:a16="http://schemas.microsoft.com/office/drawing/2014/main" id="{6C0E3B94-134A-6694-4624-DFEB9F9BDE00}"/>
+                <a16:creationId xmlns:a16="http://schemas.microsoft.com/office/drawing/2014/main" id="{B79B7A60-5DEA-C19B-9A60-ECC6AA8E4D3B}"/>
               </a:ext>
             </a:extLst>
           </p:cNvPr>
@@ -5000,14 +4726,31 @@
           <a:bodyPr/>
           <a:lstStyle/>
           <a:p>
-            <a:endParaRPr lang="en-DE"/>
+            <a:r>
+              <a:rPr lang="de-DE" noProof="0" dirty="0"/>
+              <a:t>Es war interessant mit Usern zu arbeiten</a:t>
+            </a:r>
+          </a:p>
+          <a:p>
+            <a:pPr lvl="1"/>
+            <a:r>
+              <a:rPr lang="de-DE" noProof="0" dirty="0"/>
+              <a:t>Schwierigkeiten finden</a:t>
+            </a:r>
+          </a:p>
+          <a:p>
+            <a:pPr lvl="1"/>
+            <a:r>
+              <a:rPr lang="de-DE" noProof="0" dirty="0"/>
+              <a:t>Zu ermitteln was sie wollen</a:t>
+            </a:r>
           </a:p>
         </p:txBody>
       </p:sp>
     </p:spTree>
     <p:extLst>
       <p:ext uri="{BB962C8B-B14F-4D97-AF65-F5344CB8AC3E}">
-        <p14:creationId xmlns:p14="http://schemas.microsoft.com/office/powerpoint/2010/main" val="4222286360"/>
+        <p14:creationId xmlns:p14="http://schemas.microsoft.com/office/powerpoint/2010/main" val="2947994304"/>
       </p:ext>
     </p:extLst>
   </p:cSld>
@@ -5039,7 +4782,7 @@
           <p:cNvPr id="2" name="Title 1">
             <a:extLst>
               <a:ext uri="{FF2B5EF4-FFF2-40B4-BE49-F238E27FC236}">
-                <a16:creationId xmlns:a16="http://schemas.microsoft.com/office/drawing/2014/main" id="{D9357320-6786-8C23-B010-2B46A856BDEF}"/>
+                <a16:creationId xmlns:a16="http://schemas.microsoft.com/office/drawing/2014/main" id="{DE990F51-83E8-DE5D-ADC5-CFED3DACA8E6}"/>
               </a:ext>
             </a:extLst>
           </p:cNvPr>
@@ -5056,9 +4799,10 @@
           <a:lstStyle/>
           <a:p>
             <a:r>
-              <a:rPr lang="de-DE" noProof="0" dirty="0"/>
-              <a:t>Meine Erfahrung</a:t>
-            </a:r>
+              <a:rPr lang="en-US" dirty="0"/>
+              <a:t>Joule</a:t>
+            </a:r>
+            <a:endParaRPr lang="en-DE" dirty="0"/>
           </a:p>
         </p:txBody>
       </p:sp>
@@ -5067,7 +4811,7 @@
           <p:cNvPr id="3" name="Content Placeholder 2">
             <a:extLst>
               <a:ext uri="{FF2B5EF4-FFF2-40B4-BE49-F238E27FC236}">
-                <a16:creationId xmlns:a16="http://schemas.microsoft.com/office/drawing/2014/main" id="{B79B7A60-5DEA-C19B-9A60-ECC6AA8E4D3B}"/>
+                <a16:creationId xmlns:a16="http://schemas.microsoft.com/office/drawing/2014/main" id="{CB1FBDE6-E258-2332-C9DC-529E6DAD1A98}"/>
               </a:ext>
             </a:extLst>
           </p:cNvPr>
@@ -5084,30 +4828,234 @@
           <a:lstStyle/>
           <a:p>
             <a:r>
-              <a:rPr lang="de-DE" noProof="0" dirty="0"/>
-              <a:t>Es war interessant mit Usern zu arbeiten</a:t>
-            </a:r>
-          </a:p>
-          <a:p>
-            <a:pPr lvl="1"/>
-            <a:r>
-              <a:rPr lang="de-DE" noProof="0" dirty="0"/>
-              <a:t>Schwierigkeiten finden</a:t>
-            </a:r>
-          </a:p>
-          <a:p>
-            <a:pPr lvl="1"/>
-            <a:r>
-              <a:rPr lang="de-DE" noProof="0" dirty="0"/>
-              <a:t>Zu ermitteln was sie wollen</a:t>
-            </a:r>
+              <a:rPr lang="en-US" dirty="0"/>
+              <a:t>Wenn es </a:t>
+            </a:r>
+            <a:r>
+              <a:rPr lang="en-US" dirty="0" err="1"/>
+              <a:t>funktioniert</a:t>
+            </a:r>
+            <a:r>
+              <a:rPr lang="en-US" dirty="0"/>
+              <a:t> </a:t>
+            </a:r>
+            <a:r>
+              <a:rPr lang="en-US" dirty="0" err="1"/>
+              <a:t>macht</a:t>
+            </a:r>
+            <a:r>
+              <a:rPr lang="en-US" dirty="0"/>
+              <a:t> Joule die Aufgabe an </a:t>
+            </a:r>
+            <a:r>
+              <a:rPr lang="en-US" dirty="0" err="1"/>
+              <a:t>sich</a:t>
+            </a:r>
+            <a:r>
+              <a:rPr lang="en-US" dirty="0"/>
+              <a:t> gut (</a:t>
+            </a:r>
+            <a:r>
+              <a:rPr lang="en-US" dirty="0" err="1"/>
+              <a:t>wenn</a:t>
+            </a:r>
+            <a:r>
+              <a:rPr lang="en-US" dirty="0"/>
+              <a:t> man </a:t>
+            </a:r>
+            <a:r>
+              <a:rPr lang="en-US" dirty="0" err="1"/>
+              <a:t>im</a:t>
+            </a:r>
+            <a:r>
+              <a:rPr lang="en-US" dirty="0"/>
+              <a:t> Debug Modus auf sein reasoning </a:t>
+            </a:r>
+            <a:r>
+              <a:rPr lang="en-US" dirty="0" err="1"/>
+              <a:t>schaut</a:t>
+            </a:r>
+            <a:r>
+              <a:rPr lang="en-US" dirty="0"/>
+              <a:t>)</a:t>
+            </a:r>
+          </a:p>
+          <a:p>
+            <a:r>
+              <a:rPr lang="en-US" dirty="0" err="1"/>
+              <a:t>Troztdem</a:t>
+            </a:r>
+            <a:r>
+              <a:rPr lang="en-US" dirty="0"/>
+              <a:t> </a:t>
+            </a:r>
+            <a:r>
+              <a:rPr lang="en-US" dirty="0" err="1"/>
+              <a:t>stürzt</a:t>
+            </a:r>
+            <a:r>
+              <a:rPr lang="en-US" dirty="0"/>
+              <a:t> es oft ab (</a:t>
+            </a:r>
+            <a:r>
+              <a:rPr lang="en-US" dirty="0" err="1"/>
+              <a:t>evt</a:t>
+            </a:r>
+            <a:r>
+              <a:rPr lang="en-US" dirty="0"/>
+              <a:t>. </a:t>
+            </a:r>
+            <a:r>
+              <a:rPr lang="en-US" dirty="0" err="1"/>
+              <a:t>Verbesserung</a:t>
+            </a:r>
+            <a:r>
+              <a:rPr lang="en-US" dirty="0"/>
+              <a:t> wen SAP Bug fixt)</a:t>
+            </a:r>
+          </a:p>
+          <a:p>
+            <a:r>
+              <a:rPr lang="en-US" dirty="0"/>
+              <a:t>Viel Manuelle </a:t>
+            </a:r>
+            <a:r>
+              <a:rPr lang="en-US" dirty="0" err="1"/>
+              <a:t>Programmierung</a:t>
+            </a:r>
+            <a:r>
+              <a:rPr lang="en-US" dirty="0"/>
+              <a:t> </a:t>
+            </a:r>
+            <a:r>
+              <a:rPr lang="en-US" dirty="0" err="1"/>
+              <a:t>Notwenig</a:t>
+            </a:r>
+            <a:endParaRPr lang="en-US" dirty="0"/>
+          </a:p>
+          <a:p>
+            <a:r>
+              <a:rPr lang="en-US" b="1" dirty="0"/>
+              <a:t>!Man </a:t>
+            </a:r>
+            <a:r>
+              <a:rPr lang="en-US" b="1" dirty="0" err="1"/>
+              <a:t>schreibt</a:t>
+            </a:r>
+            <a:r>
+              <a:rPr lang="en-US" b="1" dirty="0"/>
+              <a:t> erst </a:t>
+            </a:r>
+            <a:r>
+              <a:rPr lang="en-US" b="1" dirty="0" err="1"/>
+              <a:t>mit</a:t>
+            </a:r>
+            <a:r>
+              <a:rPr lang="en-US" b="1" dirty="0"/>
+              <a:t> Joule und es </a:t>
+            </a:r>
+            <a:r>
+              <a:rPr lang="en-US" b="1" dirty="0" err="1"/>
+              <a:t>sucht</a:t>
+            </a:r>
+            <a:r>
+              <a:rPr lang="en-US" b="1" dirty="0"/>
+              <a:t> </a:t>
+            </a:r>
+            <a:r>
+              <a:rPr lang="en-US" b="1" dirty="0" err="1"/>
+              <a:t>dann</a:t>
+            </a:r>
+            <a:r>
+              <a:rPr lang="en-US" b="1" dirty="0"/>
+              <a:t> </a:t>
+            </a:r>
+            <a:r>
+              <a:rPr lang="en-US" b="1" dirty="0" err="1"/>
+              <a:t>passende</a:t>
+            </a:r>
+            <a:r>
+              <a:rPr lang="en-US" b="1" dirty="0"/>
+              <a:t> </a:t>
+            </a:r>
+            <a:r>
+              <a:rPr lang="en-US" b="1" dirty="0" err="1"/>
+              <a:t>Agenten</a:t>
+            </a:r>
+            <a:r>
+              <a:rPr lang="en-US" b="1" dirty="0"/>
+              <a:t> </a:t>
+            </a:r>
+            <a:r>
+              <a:rPr lang="en-US" b="1" dirty="0" err="1"/>
+              <a:t>heraus</a:t>
+            </a:r>
+            <a:r>
+              <a:rPr lang="en-US" b="1" dirty="0"/>
+              <a:t> -&gt; Joule </a:t>
+            </a:r>
+            <a:r>
+              <a:rPr lang="en-US" b="1" dirty="0" err="1"/>
+              <a:t>selbst</a:t>
+            </a:r>
+            <a:r>
+              <a:rPr lang="en-US" b="1" dirty="0"/>
+              <a:t> nicht </a:t>
+            </a:r>
+            <a:r>
+              <a:rPr lang="en-US" b="1" dirty="0" err="1"/>
+              <a:t>konfigurierbar</a:t>
+            </a:r>
+            <a:r>
+              <a:rPr lang="en-US" b="1" dirty="0"/>
+              <a:t>!</a:t>
+            </a:r>
+          </a:p>
+          <a:p>
+            <a:r>
+              <a:rPr lang="en-US" dirty="0"/>
+              <a:t>Sehr </a:t>
+            </a:r>
+            <a:r>
+              <a:rPr lang="en-US" dirty="0" err="1"/>
+              <a:t>kompliziert</a:t>
+            </a:r>
+            <a:r>
+              <a:rPr lang="en-US" dirty="0"/>
+              <a:t> in Joule </a:t>
+            </a:r>
+            <a:r>
+              <a:rPr lang="en-US" dirty="0" err="1"/>
+              <a:t>Dokumente</a:t>
+            </a:r>
+            <a:r>
+              <a:rPr lang="en-US" dirty="0"/>
+              <a:t> </a:t>
+            </a:r>
+            <a:r>
+              <a:rPr lang="en-US" dirty="0" err="1"/>
+              <a:t>einzubinden</a:t>
+            </a:r>
+            <a:r>
+              <a:rPr lang="en-US" dirty="0"/>
+              <a:t> (</a:t>
+            </a:r>
+            <a:r>
+              <a:rPr lang="en-US" dirty="0" err="1"/>
+              <a:t>noch</a:t>
+            </a:r>
+            <a:r>
+              <a:rPr lang="en-US" dirty="0"/>
+              <a:t>?)</a:t>
+            </a:r>
+            <a:endParaRPr lang="en-DE" dirty="0"/>
           </a:p>
         </p:txBody>
       </p:sp>
     </p:spTree>
     <p:extLst>
       <p:ext uri="{BB962C8B-B14F-4D97-AF65-F5344CB8AC3E}">
-        <p14:creationId xmlns:p14="http://schemas.microsoft.com/office/powerpoint/2010/main" val="2947994304"/>
+        <p14:creationId xmlns:p14="http://schemas.microsoft.com/office/powerpoint/2010/main" val="3206477293"/>
       </p:ext>
     </p:extLst>
   </p:cSld>
@@ -5139,7 +5087,7 @@
           <p:cNvPr id="2" name="Title 1">
             <a:extLst>
               <a:ext uri="{FF2B5EF4-FFF2-40B4-BE49-F238E27FC236}">
-                <a16:creationId xmlns:a16="http://schemas.microsoft.com/office/drawing/2014/main" id="{DE990F51-83E8-DE5D-ADC5-CFED3DACA8E6}"/>
+                <a16:creationId xmlns:a16="http://schemas.microsoft.com/office/drawing/2014/main" id="{FFF5BB23-38DA-94E8-76D5-29462C579D26}"/>
               </a:ext>
             </a:extLst>
           </p:cNvPr>
@@ -5157,7 +5105,7 @@
           <a:p>
             <a:r>
               <a:rPr lang="en-US" dirty="0"/>
-              <a:t>Joule</a:t>
+              <a:t>Copilot</a:t>
             </a:r>
             <a:endParaRPr lang="en-DE" dirty="0"/>
           </a:p>
@@ -5168,7 +5116,7 @@
           <p:cNvPr id="3" name="Content Placeholder 2">
             <a:extLst>
               <a:ext uri="{FF2B5EF4-FFF2-40B4-BE49-F238E27FC236}">
-                <a16:creationId xmlns:a16="http://schemas.microsoft.com/office/drawing/2014/main" id="{CB1FBDE6-E258-2332-C9DC-529E6DAD1A98}"/>
+                <a16:creationId xmlns:a16="http://schemas.microsoft.com/office/drawing/2014/main" id="{00F9531C-3E54-F313-1A6E-6C4D007B3406}"/>
               </a:ext>
             </a:extLst>
           </p:cNvPr>
@@ -5185,40 +5133,143 @@
           <a:lstStyle/>
           <a:p>
             <a:r>
-              <a:rPr lang="en-US" dirty="0"/>
-              <a:t>Wenn es </a:t>
-            </a:r>
-            <a:r>
-              <a:rPr lang="en-US" dirty="0" err="1"/>
-              <a:t>funktioniert</a:t>
-            </a:r>
-            <a:r>
-              <a:rPr lang="en-US" dirty="0"/>
-              <a:t> </a:t>
-            </a:r>
-            <a:r>
-              <a:rPr lang="en-US" dirty="0" err="1"/>
-              <a:t>macht</a:t>
-            </a:r>
-            <a:r>
-              <a:rPr lang="en-US" dirty="0"/>
-              <a:t> Joule die Aufgabe an </a:t>
-            </a:r>
-            <a:r>
-              <a:rPr lang="en-US" dirty="0" err="1"/>
-              <a:t>sich</a:t>
-            </a:r>
-            <a:r>
-              <a:rPr lang="en-US" dirty="0"/>
-              <a:t> gut (</a:t>
-            </a:r>
-            <a:r>
-              <a:rPr lang="en-US" dirty="0" err="1"/>
-              <a:t>wenn</a:t>
-            </a:r>
-            <a:r>
-              <a:rPr lang="en-US" dirty="0"/>
-              <a:t> man </a:t>
+              <a:rPr lang="en-US" dirty="0" err="1"/>
+              <a:t>Zugriff</a:t>
+            </a:r>
+            <a:r>
+              <a:rPr lang="en-US" dirty="0"/>
+              <a:t> auf </a:t>
+            </a:r>
+            <a:r>
+              <a:rPr lang="en-US" dirty="0" err="1"/>
+              <a:t>Dokumente</a:t>
+            </a:r>
+            <a:r>
+              <a:rPr lang="en-US" dirty="0"/>
+              <a:t> </a:t>
+            </a:r>
+            <a:r>
+              <a:rPr lang="en-US" dirty="0" err="1"/>
+              <a:t>klappt</a:t>
+            </a:r>
+            <a:r>
+              <a:rPr lang="en-US" dirty="0"/>
+              <a:t> bis </a:t>
+            </a:r>
+            <a:r>
+              <a:rPr lang="en-US" dirty="0" err="1"/>
+              <a:t>jetzt</a:t>
+            </a:r>
+            <a:r>
+              <a:rPr lang="en-US" dirty="0"/>
+              <a:t> in “Ordnung”</a:t>
+            </a:r>
+          </a:p>
+          <a:p>
+            <a:pPr lvl="1"/>
+            <a:r>
+              <a:rPr lang="en-US" dirty="0"/>
+              <a:t>Zum Teil </a:t>
+            </a:r>
+            <a:r>
+              <a:rPr lang="en-US" dirty="0" err="1"/>
+              <a:t>sagt</a:t>
+            </a:r>
+            <a:r>
+              <a:rPr lang="en-US" dirty="0"/>
+              <a:t> es er </a:t>
+            </a:r>
+            <a:r>
+              <a:rPr lang="en-US" dirty="0" err="1"/>
+              <a:t>findet</a:t>
+            </a:r>
+            <a:r>
+              <a:rPr lang="en-US" dirty="0"/>
+              <a:t> Dinge nicht (BO´s </a:t>
+            </a:r>
+            <a:r>
+              <a:rPr lang="en-US" dirty="0" err="1"/>
+              <a:t>zu</a:t>
+            </a:r>
+            <a:r>
+              <a:rPr lang="en-US" dirty="0"/>
+              <a:t> </a:t>
+            </a:r>
+            <a:r>
+              <a:rPr lang="en-US" dirty="0" err="1"/>
+              <a:t>Tabellen</a:t>
+            </a:r>
+            <a:r>
+              <a:rPr lang="en-US" dirty="0"/>
+              <a:t>) </a:t>
+            </a:r>
+            <a:r>
+              <a:rPr lang="en-US" dirty="0" err="1"/>
+              <a:t>obwohl</a:t>
+            </a:r>
+            <a:r>
+              <a:rPr lang="en-US" dirty="0"/>
+              <a:t> </a:t>
+            </a:r>
+            <a:r>
+              <a:rPr lang="en-US" dirty="0" err="1"/>
+              <a:t>sie</a:t>
+            </a:r>
+            <a:r>
+              <a:rPr lang="en-US" dirty="0"/>
+              <a:t> da </a:t>
+            </a:r>
+            <a:r>
+              <a:rPr lang="en-US" dirty="0" err="1"/>
+              <a:t>sind</a:t>
+            </a:r>
+            <a:endParaRPr lang="en-US" dirty="0"/>
+          </a:p>
+          <a:p>
+            <a:pPr lvl="1"/>
+            <a:r>
+              <a:rPr lang="en-US" dirty="0"/>
+              <a:t>Bei </a:t>
+            </a:r>
+            <a:r>
+              <a:rPr lang="en-US" dirty="0" err="1"/>
+              <a:t>sehr</a:t>
+            </a:r>
+            <a:r>
+              <a:rPr lang="en-US" dirty="0"/>
+              <a:t> </a:t>
+            </a:r>
+            <a:r>
+              <a:rPr lang="en-US" dirty="0" err="1"/>
+              <a:t>komplexen</a:t>
+            </a:r>
+            <a:r>
+              <a:rPr lang="en-US" dirty="0"/>
+              <a:t> </a:t>
+            </a:r>
+            <a:r>
+              <a:rPr lang="en-US" dirty="0" err="1"/>
+              <a:t>Fragen</a:t>
+            </a:r>
+            <a:r>
+              <a:rPr lang="en-US" dirty="0"/>
+              <a:t> </a:t>
+            </a:r>
+            <a:r>
+              <a:rPr lang="en-US" dirty="0" err="1"/>
+              <a:t>halluziniert</a:t>
+            </a:r>
+            <a:r>
+              <a:rPr lang="en-US" dirty="0"/>
+              <a:t> er, was die </a:t>
+            </a:r>
+            <a:r>
+              <a:rPr lang="en-US" dirty="0" err="1"/>
+              <a:t>Funktionen</a:t>
+            </a:r>
+            <a:r>
+              <a:rPr lang="en-US" dirty="0"/>
+              <a:t> </a:t>
             </a:r>
             <a:r>
               <a:rPr lang="en-US" dirty="0" err="1"/>
@@ -5226,193 +5277,63 @@
             </a:r>
             <a:r>
               <a:rPr lang="en-US" dirty="0"/>
-              <a:t> Debug Modus auf sein reasoning </a:t>
-            </a:r>
-            <a:r>
-              <a:rPr lang="en-US" dirty="0" err="1"/>
-              <a:t>schaut</a:t>
-            </a:r>
-            <a:r>
-              <a:rPr lang="en-US" dirty="0"/>
-              <a:t>)</a:t>
-            </a:r>
-          </a:p>
-          <a:p>
-            <a:r>
-              <a:rPr lang="en-US" dirty="0" err="1"/>
-              <a:t>Troztdem</a:t>
-            </a:r>
-            <a:r>
-              <a:rPr lang="en-US" dirty="0"/>
-              <a:t> </a:t>
-            </a:r>
-            <a:r>
-              <a:rPr lang="en-US" dirty="0" err="1"/>
-              <a:t>stürzt</a:t>
-            </a:r>
-            <a:r>
-              <a:rPr lang="en-US" dirty="0"/>
-              <a:t> es oft ab (</a:t>
-            </a:r>
-            <a:r>
-              <a:rPr lang="en-US" dirty="0" err="1"/>
-              <a:t>evt</a:t>
-            </a:r>
-            <a:r>
-              <a:rPr lang="en-US" dirty="0"/>
-              <a:t>. </a:t>
-            </a:r>
-            <a:r>
-              <a:rPr lang="en-US" dirty="0" err="1"/>
-              <a:t>Verbesserung</a:t>
-            </a:r>
-            <a:r>
-              <a:rPr lang="en-US" dirty="0"/>
-              <a:t> wen SAP Bug fixt)</a:t>
-            </a:r>
-          </a:p>
-          <a:p>
-            <a:r>
-              <a:rPr lang="en-US" dirty="0"/>
-              <a:t>Viel Manuelle </a:t>
-            </a:r>
-            <a:r>
-              <a:rPr lang="en-US" dirty="0" err="1"/>
-              <a:t>Programmierung</a:t>
-            </a:r>
-            <a:r>
-              <a:rPr lang="en-US" dirty="0"/>
-              <a:t> </a:t>
-            </a:r>
-            <a:r>
-              <a:rPr lang="en-US" dirty="0" err="1"/>
-              <a:t>Notwenig</a:t>
+              <a:t> Doku Bot </a:t>
+            </a:r>
+            <a:r>
+              <a:rPr lang="en-US" dirty="0" err="1"/>
+              <a:t>angeht</a:t>
             </a:r>
             <a:endParaRPr lang="en-US" dirty="0"/>
           </a:p>
           <a:p>
             <a:r>
-              <a:rPr lang="en-US" b="1" dirty="0"/>
-              <a:t>!Man </a:t>
-            </a:r>
-            <a:r>
-              <a:rPr lang="en-US" b="1" dirty="0" err="1"/>
-              <a:t>schreibt</a:t>
-            </a:r>
-            <a:r>
-              <a:rPr lang="en-US" b="1" dirty="0"/>
-              <a:t> erst </a:t>
-            </a:r>
-            <a:r>
-              <a:rPr lang="en-US" b="1" dirty="0" err="1"/>
-              <a:t>mit</a:t>
-            </a:r>
-            <a:r>
-              <a:rPr lang="en-US" b="1" dirty="0"/>
-              <a:t> Joule und es </a:t>
-            </a:r>
-            <a:r>
-              <a:rPr lang="en-US" b="1" dirty="0" err="1"/>
-              <a:t>sucht</a:t>
-            </a:r>
-            <a:r>
-              <a:rPr lang="en-US" b="1" dirty="0"/>
-              <a:t> </a:t>
-            </a:r>
-            <a:r>
-              <a:rPr lang="en-US" b="1" dirty="0" err="1"/>
-              <a:t>dann</a:t>
-            </a:r>
-            <a:r>
-              <a:rPr lang="en-US" b="1" dirty="0"/>
-              <a:t> </a:t>
-            </a:r>
-            <a:r>
-              <a:rPr lang="en-US" b="1" dirty="0" err="1"/>
-              <a:t>passende</a:t>
-            </a:r>
-            <a:r>
-              <a:rPr lang="en-US" b="1" dirty="0"/>
-              <a:t> </a:t>
-            </a:r>
-            <a:r>
-              <a:rPr lang="en-US" b="1" dirty="0" err="1"/>
-              <a:t>Agenten</a:t>
-            </a:r>
-            <a:r>
-              <a:rPr lang="en-US" b="1" dirty="0"/>
-              <a:t> </a:t>
-            </a:r>
-            <a:r>
-              <a:rPr lang="en-US" b="1" dirty="0" err="1"/>
-              <a:t>heraus</a:t>
-            </a:r>
-            <a:r>
-              <a:rPr lang="en-US" b="1" dirty="0"/>
-              <a:t> -&gt; Joule </a:t>
-            </a:r>
-            <a:r>
-              <a:rPr lang="en-US" b="1" dirty="0" err="1"/>
-              <a:t>selbst</a:t>
-            </a:r>
-            <a:r>
-              <a:rPr lang="en-US" b="1" dirty="0"/>
+              <a:rPr lang="en-US" dirty="0"/>
+              <a:t>Ich </a:t>
+            </a:r>
+            <a:r>
+              <a:rPr lang="en-US" dirty="0" err="1"/>
+              <a:t>weiß</a:t>
+            </a:r>
+            <a:r>
+              <a:rPr lang="en-US" dirty="0"/>
               <a:t> nicht </a:t>
             </a:r>
             <a:r>
-              <a:rPr lang="en-US" b="1" dirty="0" err="1"/>
-              <a:t>konfigurierbar</a:t>
-            </a:r>
-            <a:r>
-              <a:rPr lang="en-US" b="1" dirty="0"/>
-              <a:t>!</a:t>
-            </a:r>
-          </a:p>
-          <a:p>
-            <a:r>
-              <a:rPr lang="en-US" dirty="0"/>
-              <a:t>Sehr </a:t>
-            </a:r>
-            <a:r>
-              <a:rPr lang="en-US" dirty="0" err="1"/>
-              <a:t>kompliziert</a:t>
-            </a:r>
-            <a:r>
-              <a:rPr lang="en-US" dirty="0"/>
-              <a:t> in Joule </a:t>
-            </a:r>
-            <a:r>
-              <a:rPr lang="en-US" dirty="0" err="1"/>
-              <a:t>Dokumente</a:t>
-            </a:r>
-            <a:r>
-              <a:rPr lang="en-US" dirty="0"/>
-              <a:t> </a:t>
-            </a:r>
-            <a:r>
-              <a:rPr lang="en-US" dirty="0" err="1"/>
-              <a:t>einzubinden</a:t>
-            </a:r>
-            <a:r>
-              <a:rPr lang="en-US" dirty="0"/>
-              <a:t> (</a:t>
-            </a:r>
-            <a:r>
-              <a:rPr lang="en-US" dirty="0" err="1"/>
-              <a:t>noch</a:t>
-            </a:r>
-            <a:r>
-              <a:rPr lang="en-US" dirty="0"/>
-              <a:t>?)</a:t>
-            </a:r>
-            <a:endParaRPr lang="en-DE" dirty="0"/>
+              <a:rPr lang="en-US" dirty="0" err="1"/>
+              <a:t>wie</a:t>
+            </a:r>
+            <a:r>
+              <a:rPr lang="en-US" dirty="0"/>
+              <a:t> man den </a:t>
+            </a:r>
+            <a:r>
+              <a:rPr lang="en-US" dirty="0" err="1"/>
+              <a:t>zugriff</a:t>
+            </a:r>
+            <a:r>
+              <a:rPr lang="en-US" dirty="0"/>
+              <a:t> auf das </a:t>
+            </a:r>
+            <a:r>
+              <a:rPr lang="en-US" dirty="0" err="1"/>
+              <a:t>oData</a:t>
+            </a:r>
+            <a:r>
+              <a:rPr lang="en-US" dirty="0"/>
+              <a:t> in Copilot </a:t>
+            </a:r>
+            <a:r>
+              <a:rPr lang="en-US" dirty="0" err="1"/>
+              <a:t>einrichtet</a:t>
+            </a:r>
+            <a:endParaRPr lang="en-US" dirty="0"/>
           </a:p>
         </p:txBody>
       </p:sp>
     </p:spTree>
     <p:extLst>
       <p:ext uri="{BB962C8B-B14F-4D97-AF65-F5344CB8AC3E}">
-        <p14:creationId xmlns:p14="http://schemas.microsoft.com/office/powerpoint/2010/main" val="3206477293"/>
+        <p14:creationId xmlns:p14="http://schemas.microsoft.com/office/powerpoint/2010/main" val="374838372"/>
       </p:ext>
     </p:extLst>
   </p:cSld>
@@ -5444,7 +5365,7 @@
           <p:cNvPr id="2" name="Title 1">
             <a:extLst>
               <a:ext uri="{FF2B5EF4-FFF2-40B4-BE49-F238E27FC236}">
-                <a16:creationId xmlns:a16="http://schemas.microsoft.com/office/drawing/2014/main" id="{FFF5BB23-38DA-94E8-76D5-29462C579D26}"/>
+                <a16:creationId xmlns:a16="http://schemas.microsoft.com/office/drawing/2014/main" id="{0A600FA2-9A03-B57A-7C25-BCE3E0633F36}"/>
               </a:ext>
             </a:extLst>
           </p:cNvPr>
@@ -5462,7 +5383,19 @@
           <a:p>
             <a:r>
               <a:rPr lang="en-US" dirty="0"/>
-              <a:t>Copilot</a:t>
+              <a:t>Chatbot </a:t>
+            </a:r>
+            <a:r>
+              <a:rPr lang="en-US" dirty="0" err="1"/>
+              <a:t>Hürden</a:t>
+            </a:r>
+            <a:r>
+              <a:rPr lang="en-US" dirty="0"/>
+              <a:t> </a:t>
+            </a:r>
+            <a:r>
+              <a:rPr lang="en-US" dirty="0" err="1"/>
+              <a:t>allgemein</a:t>
             </a:r>
             <a:endParaRPr lang="en-DE" dirty="0"/>
           </a:p>
@@ -5473,7 +5406,7 @@
           <p:cNvPr id="3" name="Content Placeholder 2">
             <a:extLst>
               <a:ext uri="{FF2B5EF4-FFF2-40B4-BE49-F238E27FC236}">
-                <a16:creationId xmlns:a16="http://schemas.microsoft.com/office/drawing/2014/main" id="{00F9531C-3E54-F313-1A6E-6C4D007B3406}"/>
+                <a16:creationId xmlns:a16="http://schemas.microsoft.com/office/drawing/2014/main" id="{B999B94F-F759-6D2C-464F-1A45A0195CEB}"/>
               </a:ext>
             </a:extLst>
           </p:cNvPr>
@@ -5486,211 +5419,415 @@
         </p:nvSpPr>
         <p:spPr/>
         <p:txBody>
-          <a:bodyPr/>
-          <a:lstStyle/>
-          <a:p>
-            <a:r>
-              <a:rPr lang="en-US" dirty="0" err="1"/>
-              <a:t>Zugriff</a:t>
-            </a:r>
-            <a:r>
-              <a:rPr lang="en-US" dirty="0"/>
-              <a:t> auf </a:t>
-            </a:r>
-            <a:r>
-              <a:rPr lang="en-US" dirty="0" err="1"/>
+          <a:bodyPr>
+            <a:normAutofit/>
+          </a:bodyPr>
+          <a:lstStyle/>
+          <a:p>
+            <a:r>
+              <a:rPr lang="en-US" dirty="0"/>
+              <a:t>Wie </a:t>
+            </a:r>
+            <a:r>
+              <a:rPr lang="en-US" dirty="0" err="1"/>
+              <a:t>kombinieren</a:t>
+            </a:r>
+            <a:r>
+              <a:rPr lang="en-US" dirty="0"/>
+              <a:t> </a:t>
+            </a:r>
+            <a:r>
+              <a:rPr lang="en-US" dirty="0" err="1"/>
+              <a:t>wir</a:t>
+            </a:r>
+            <a:r>
+              <a:rPr lang="en-US" dirty="0"/>
+              <a:t> die </a:t>
+            </a:r>
+            <a:r>
+              <a:rPr lang="en-US" dirty="0" err="1"/>
+              <a:t>zwei</a:t>
+            </a:r>
+            <a:r>
+              <a:rPr lang="en-US" dirty="0"/>
+              <a:t> Bots?</a:t>
+            </a:r>
+          </a:p>
+          <a:p>
+            <a:r>
+              <a:rPr lang="en-US" dirty="0"/>
+              <a:t>Wenn </a:t>
+            </a:r>
+            <a:r>
+              <a:rPr lang="en-US" dirty="0" err="1"/>
+              <a:t>wir</a:t>
+            </a:r>
+            <a:r>
+              <a:rPr lang="en-US" dirty="0"/>
+              <a:t> </a:t>
+            </a:r>
+            <a:r>
+              <a:rPr lang="en-US" dirty="0" err="1"/>
+              <a:t>mehr</a:t>
+            </a:r>
+            <a:r>
+              <a:rPr lang="en-US" dirty="0"/>
+              <a:t> Apps </a:t>
+            </a:r>
+            <a:r>
+              <a:rPr lang="en-US" dirty="0" err="1"/>
+              <a:t>einfügen</a:t>
+            </a:r>
+            <a:r>
+              <a:rPr lang="en-US" dirty="0"/>
+              <a:t>, </a:t>
+            </a:r>
+            <a:r>
+              <a:rPr lang="en-US" dirty="0" err="1"/>
+              <a:t>wird</a:t>
+            </a:r>
+            <a:r>
+              <a:rPr lang="en-US" dirty="0"/>
+              <a:t> der Chatbot </a:t>
+            </a:r>
+            <a:r>
+              <a:rPr lang="en-US" dirty="0" err="1"/>
+              <a:t>dann</a:t>
+            </a:r>
+            <a:r>
+              <a:rPr lang="en-US" dirty="0"/>
+              <a:t> </a:t>
+            </a:r>
+            <a:r>
+              <a:rPr lang="en-US" dirty="0" err="1"/>
+              <a:t>verwirrt</a:t>
+            </a:r>
+            <a:r>
+              <a:rPr lang="en-US" dirty="0"/>
+              <a:t>?</a:t>
+            </a:r>
+          </a:p>
+          <a:p>
+            <a:pPr lvl="1"/>
+            <a:r>
+              <a:rPr lang="en-US" dirty="0">
+                <a:sym typeface="Wingdings" panose="05000000000000000000" pitchFamily="2" charset="2"/>
+              </a:rPr>
+              <a:t> </a:t>
+            </a:r>
+            <a:r>
+              <a:rPr lang="en-US" dirty="0" err="1">
+                <a:sym typeface="Wingdings" panose="05000000000000000000" pitchFamily="2" charset="2"/>
+              </a:rPr>
+              <a:t>oData</a:t>
+            </a:r>
+            <a:r>
+              <a:rPr lang="en-US" dirty="0">
+                <a:sym typeface="Wingdings" panose="05000000000000000000" pitchFamily="2" charset="2"/>
+              </a:rPr>
+              <a:t> </a:t>
+            </a:r>
+            <a:r>
+              <a:rPr lang="en-US" dirty="0" err="1">
+                <a:sym typeface="Wingdings" panose="05000000000000000000" pitchFamily="2" charset="2"/>
+              </a:rPr>
+              <a:t>Schnitstelle</a:t>
+            </a:r>
+            <a:r>
+              <a:rPr lang="en-US" dirty="0">
+                <a:sym typeface="Wingdings" panose="05000000000000000000" pitchFamily="2" charset="2"/>
+              </a:rPr>
+              <a:t> nicht </a:t>
+            </a:r>
+            <a:r>
+              <a:rPr lang="en-US" dirty="0" err="1">
+                <a:sym typeface="Wingdings" panose="05000000000000000000" pitchFamily="2" charset="2"/>
+              </a:rPr>
+              <a:t>nach</a:t>
+            </a:r>
+            <a:r>
+              <a:rPr lang="en-US" dirty="0">
+                <a:sym typeface="Wingdings" panose="05000000000000000000" pitchFamily="2" charset="2"/>
+              </a:rPr>
+              <a:t> Apps </a:t>
+            </a:r>
+            <a:r>
+              <a:rPr lang="en-US" dirty="0" err="1">
+                <a:sym typeface="Wingdings" panose="05000000000000000000" pitchFamily="2" charset="2"/>
+              </a:rPr>
+              <a:t>sortieren</a:t>
+            </a:r>
+            <a:r>
+              <a:rPr lang="en-US" dirty="0">
+                <a:sym typeface="Wingdings" panose="05000000000000000000" pitchFamily="2" charset="2"/>
+              </a:rPr>
+              <a:t> </a:t>
+            </a:r>
+            <a:r>
+              <a:rPr lang="en-US" dirty="0" err="1">
+                <a:sym typeface="Wingdings" panose="05000000000000000000" pitchFamily="2" charset="2"/>
+              </a:rPr>
+              <a:t>sondern</a:t>
+            </a:r>
+            <a:r>
+              <a:rPr lang="en-US" dirty="0">
+                <a:sym typeface="Wingdings" panose="05000000000000000000" pitchFamily="2" charset="2"/>
+              </a:rPr>
+              <a:t> “</a:t>
+            </a:r>
+            <a:r>
+              <a:rPr lang="en-US" dirty="0" err="1">
+                <a:sym typeface="Wingdings" panose="05000000000000000000" pitchFamily="2" charset="2"/>
+              </a:rPr>
+              <a:t>anders</a:t>
+            </a:r>
+            <a:r>
+              <a:rPr lang="en-US" dirty="0">
+                <a:sym typeface="Wingdings" panose="05000000000000000000" pitchFamily="2" charset="2"/>
+              </a:rPr>
+              <a:t>”?</a:t>
+            </a:r>
+          </a:p>
+          <a:p>
+            <a:r>
+              <a:rPr lang="en-US" dirty="0" err="1">
+                <a:sym typeface="Wingdings" panose="05000000000000000000" pitchFamily="2" charset="2"/>
+              </a:rPr>
+              <a:t>Welche</a:t>
+            </a:r>
+            <a:r>
+              <a:rPr lang="en-US" dirty="0">
+                <a:sym typeface="Wingdings" panose="05000000000000000000" pitchFamily="2" charset="2"/>
+              </a:rPr>
+              <a:t> </a:t>
+            </a:r>
+            <a:r>
+              <a:rPr lang="en-US" dirty="0" err="1">
+                <a:sym typeface="Wingdings" panose="05000000000000000000" pitchFamily="2" charset="2"/>
+              </a:rPr>
               <a:t>Dokumente</a:t>
             </a:r>
             <a:r>
-              <a:rPr lang="en-US" dirty="0"/>
-              <a:t> </a:t>
-            </a:r>
-            <a:r>
-              <a:rPr lang="en-US" dirty="0" err="1"/>
-              <a:t>klappt</a:t>
-            </a:r>
-            <a:r>
-              <a:rPr lang="en-US" dirty="0"/>
-              <a:t> bis </a:t>
-            </a:r>
-            <a:r>
-              <a:rPr lang="en-US" dirty="0" err="1"/>
-              <a:t>jetzt</a:t>
-            </a:r>
-            <a:r>
-              <a:rPr lang="en-US" dirty="0"/>
-              <a:t> in “Ordnung”</a:t>
+              <a:rPr lang="en-US" dirty="0">
+                <a:sym typeface="Wingdings" panose="05000000000000000000" pitchFamily="2" charset="2"/>
+              </a:rPr>
+              <a:t> </a:t>
+            </a:r>
+            <a:r>
+              <a:rPr lang="en-US" dirty="0" err="1">
+                <a:sym typeface="Wingdings" panose="05000000000000000000" pitchFamily="2" charset="2"/>
+              </a:rPr>
+              <a:t>fügen</a:t>
+            </a:r>
+            <a:r>
+              <a:rPr lang="en-US" dirty="0">
+                <a:sym typeface="Wingdings" panose="05000000000000000000" pitchFamily="2" charset="2"/>
+              </a:rPr>
+              <a:t> </a:t>
+            </a:r>
+            <a:r>
+              <a:rPr lang="en-US" dirty="0" err="1">
+                <a:sym typeface="Wingdings" panose="05000000000000000000" pitchFamily="2" charset="2"/>
+              </a:rPr>
+              <a:t>wir</a:t>
+            </a:r>
+            <a:r>
+              <a:rPr lang="en-US" dirty="0">
+                <a:sym typeface="Wingdings" panose="05000000000000000000" pitchFamily="2" charset="2"/>
+              </a:rPr>
+              <a:t> </a:t>
+            </a:r>
+            <a:r>
+              <a:rPr lang="en-US" dirty="0" err="1">
+                <a:sym typeface="Wingdings" panose="05000000000000000000" pitchFamily="2" charset="2"/>
+              </a:rPr>
+              <a:t>noch</a:t>
+            </a:r>
+            <a:r>
+              <a:rPr lang="en-US" dirty="0">
+                <a:sym typeface="Wingdings" panose="05000000000000000000" pitchFamily="2" charset="2"/>
+              </a:rPr>
+              <a:t> </a:t>
+            </a:r>
+            <a:r>
+              <a:rPr lang="en-US" dirty="0" err="1">
+                <a:sym typeface="Wingdings" panose="05000000000000000000" pitchFamily="2" charset="2"/>
+              </a:rPr>
+              <a:t>hinzu</a:t>
+            </a:r>
+            <a:r>
+              <a:rPr lang="en-US" dirty="0">
+                <a:sym typeface="Wingdings" panose="05000000000000000000" pitchFamily="2" charset="2"/>
+              </a:rPr>
+              <a:t>?</a:t>
             </a:r>
           </a:p>
           <a:p>
             <a:pPr lvl="1"/>
             <a:r>
-              <a:rPr lang="en-US" dirty="0"/>
-              <a:t>Zum Teil </a:t>
-            </a:r>
-            <a:r>
-              <a:rPr lang="en-US" dirty="0" err="1"/>
-              <a:t>sagt</a:t>
-            </a:r>
-            <a:r>
-              <a:rPr lang="en-US" dirty="0"/>
-              <a:t> es er </a:t>
-            </a:r>
-            <a:r>
-              <a:rPr lang="en-US" dirty="0" err="1"/>
-              <a:t>findet</a:t>
-            </a:r>
-            <a:r>
-              <a:rPr lang="en-US" dirty="0"/>
-              <a:t> Dinge nicht (BO´s </a:t>
-            </a:r>
-            <a:r>
-              <a:rPr lang="en-US" dirty="0" err="1"/>
-              <a:t>zu</a:t>
-            </a:r>
-            <a:r>
-              <a:rPr lang="en-US" dirty="0"/>
-              <a:t> </a:t>
-            </a:r>
-            <a:r>
-              <a:rPr lang="en-US" dirty="0" err="1"/>
-              <a:t>Tabellen</a:t>
-            </a:r>
-            <a:r>
-              <a:rPr lang="en-US" dirty="0"/>
-              <a:t>) </a:t>
-            </a:r>
-            <a:r>
-              <a:rPr lang="en-US" dirty="0" err="1"/>
-              <a:t>obwohl</a:t>
-            </a:r>
-            <a:r>
-              <a:rPr lang="en-US" dirty="0"/>
-              <a:t> </a:t>
-            </a:r>
-            <a:r>
-              <a:rPr lang="en-US" dirty="0" err="1"/>
-              <a:t>sie</a:t>
-            </a:r>
-            <a:r>
-              <a:rPr lang="en-US" dirty="0"/>
-              <a:t> da </a:t>
-            </a:r>
-            <a:r>
-              <a:rPr lang="en-US" dirty="0" err="1"/>
-              <a:t>sind</a:t>
-            </a:r>
-            <a:endParaRPr lang="en-US" dirty="0"/>
-          </a:p>
-          <a:p>
-            <a:pPr lvl="1"/>
-            <a:r>
-              <a:rPr lang="en-US" dirty="0"/>
-              <a:t>Bei </a:t>
-            </a:r>
-            <a:r>
-              <a:rPr lang="en-US" dirty="0" err="1"/>
-              <a:t>sehr</a:t>
-            </a:r>
-            <a:r>
-              <a:rPr lang="en-US" dirty="0"/>
-              <a:t> </a:t>
-            </a:r>
-            <a:r>
-              <a:rPr lang="en-US" dirty="0" err="1"/>
-              <a:t>komplexen</a:t>
-            </a:r>
-            <a:r>
-              <a:rPr lang="en-US" dirty="0"/>
-              <a:t> </a:t>
-            </a:r>
-            <a:r>
-              <a:rPr lang="en-US" dirty="0" err="1"/>
-              <a:t>Fragen</a:t>
-            </a:r>
-            <a:r>
-              <a:rPr lang="en-US" dirty="0"/>
-              <a:t> </a:t>
-            </a:r>
-            <a:r>
-              <a:rPr lang="en-US" dirty="0" err="1"/>
-              <a:t>halluziniert</a:t>
-            </a:r>
-            <a:r>
-              <a:rPr lang="en-US" dirty="0"/>
-              <a:t> er, was die </a:t>
-            </a:r>
-            <a:r>
-              <a:rPr lang="en-US" dirty="0" err="1"/>
-              <a:t>Funktionen</a:t>
-            </a:r>
-            <a:r>
-              <a:rPr lang="en-US" dirty="0"/>
-              <a:t> </a:t>
-            </a:r>
-            <a:r>
-              <a:rPr lang="en-US" dirty="0" err="1"/>
-              <a:t>im</a:t>
-            </a:r>
-            <a:r>
-              <a:rPr lang="en-US" dirty="0"/>
-              <a:t> Doku Bot </a:t>
-            </a:r>
-            <a:r>
-              <a:rPr lang="en-US" dirty="0" err="1"/>
-              <a:t>angeht</a:t>
-            </a:r>
-            <a:endParaRPr lang="en-US" dirty="0"/>
-          </a:p>
-          <a:p>
-            <a:r>
-              <a:rPr lang="en-US" dirty="0"/>
-              <a:t>Ich </a:t>
-            </a:r>
-            <a:r>
-              <a:rPr lang="en-US" dirty="0" err="1"/>
-              <a:t>weiß</a:t>
-            </a:r>
-            <a:r>
-              <a:rPr lang="en-US" dirty="0"/>
-              <a:t> nicht </a:t>
-            </a:r>
-            <a:r>
-              <a:rPr lang="en-US" dirty="0" err="1"/>
-              <a:t>wie</a:t>
-            </a:r>
-            <a:r>
-              <a:rPr lang="en-US" dirty="0"/>
-              <a:t> man den </a:t>
-            </a:r>
-            <a:r>
-              <a:rPr lang="en-US" dirty="0" err="1"/>
+              <a:rPr lang="en-US" dirty="0">
+                <a:sym typeface="Wingdings" panose="05000000000000000000" pitchFamily="2" charset="2"/>
+              </a:rPr>
+              <a:t>Wir </a:t>
+            </a:r>
+            <a:r>
+              <a:rPr lang="en-US" dirty="0" err="1">
+                <a:sym typeface="Wingdings" panose="05000000000000000000" pitchFamily="2" charset="2"/>
+              </a:rPr>
+              <a:t>müssen</a:t>
+            </a:r>
+            <a:r>
+              <a:rPr lang="en-US" dirty="0">
+                <a:sym typeface="Wingdings" panose="05000000000000000000" pitchFamily="2" charset="2"/>
+              </a:rPr>
+              <a:t> alle </a:t>
+            </a:r>
+            <a:r>
+              <a:rPr lang="en-US" dirty="0" err="1">
+                <a:sym typeface="Wingdings" panose="05000000000000000000" pitchFamily="2" charset="2"/>
+              </a:rPr>
+              <a:t>Dokumente</a:t>
+            </a:r>
+            <a:r>
+              <a:rPr lang="en-US" dirty="0">
+                <a:sym typeface="Wingdings" panose="05000000000000000000" pitchFamily="2" charset="2"/>
+              </a:rPr>
+              <a:t> </a:t>
+            </a:r>
+            <a:r>
+              <a:rPr lang="en-US" dirty="0" err="1">
+                <a:sym typeface="Wingdings" panose="05000000000000000000" pitchFamily="2" charset="2"/>
+              </a:rPr>
+              <a:t>regelmäßig</a:t>
+            </a:r>
+            <a:r>
+              <a:rPr lang="en-US" dirty="0">
+                <a:sym typeface="Wingdings" panose="05000000000000000000" pitchFamily="2" charset="2"/>
+              </a:rPr>
+              <a:t> </a:t>
+            </a:r>
+            <a:r>
+              <a:rPr lang="en-US" dirty="0" err="1">
+                <a:sym typeface="Wingdings" panose="05000000000000000000" pitchFamily="2" charset="2"/>
+              </a:rPr>
+              <a:t>updaten</a:t>
+            </a:r>
+            <a:r>
+              <a:rPr lang="en-US" dirty="0">
+                <a:sym typeface="Wingdings" panose="05000000000000000000" pitchFamily="2" charset="2"/>
+              </a:rPr>
+              <a:t> (</a:t>
+            </a:r>
+            <a:r>
+              <a:rPr lang="en-US" dirty="0" err="1">
+                <a:sym typeface="Wingdings" panose="05000000000000000000" pitchFamily="2" charset="2"/>
+              </a:rPr>
+              <a:t>kein</a:t>
+            </a:r>
+            <a:r>
+              <a:rPr lang="en-US" dirty="0">
+                <a:sym typeface="Wingdings" panose="05000000000000000000" pitchFamily="2" charset="2"/>
+              </a:rPr>
+              <a:t> </a:t>
+            </a:r>
+            <a:r>
+              <a:rPr lang="en-US" dirty="0" err="1">
+                <a:sym typeface="Wingdings" panose="05000000000000000000" pitchFamily="2" charset="2"/>
+              </a:rPr>
+              <a:t>dynamischer</a:t>
+            </a:r>
+            <a:r>
+              <a:rPr lang="en-US" dirty="0">
+                <a:sym typeface="Wingdings" panose="05000000000000000000" pitchFamily="2" charset="2"/>
+              </a:rPr>
+              <a:t> </a:t>
+            </a:r>
+            <a:r>
+              <a:rPr lang="en-US" dirty="0" err="1">
+                <a:sym typeface="Wingdings" panose="05000000000000000000" pitchFamily="2" charset="2"/>
+              </a:rPr>
               <a:t>zugriff</a:t>
             </a:r>
             <a:r>
-              <a:rPr lang="en-US" dirty="0"/>
-              <a:t> auf das </a:t>
-            </a:r>
-            <a:r>
-              <a:rPr lang="en-US" dirty="0" err="1"/>
-              <a:t>oData</a:t>
-            </a:r>
-            <a:r>
-              <a:rPr lang="en-US" dirty="0"/>
-              <a:t> in Copilot </a:t>
-            </a:r>
-            <a:r>
-              <a:rPr lang="en-US" dirty="0" err="1"/>
-              <a:t>einrichtet</a:t>
-            </a:r>
-            <a:endParaRPr lang="en-US" dirty="0"/>
+              <a:rPr lang="en-US" dirty="0">
+                <a:sym typeface="Wingdings" panose="05000000000000000000" pitchFamily="2" charset="2"/>
+              </a:rPr>
+              <a:t> </a:t>
+            </a:r>
+            <a:r>
+              <a:rPr lang="en-US" dirty="0" err="1">
+                <a:sym typeface="Wingdings" panose="05000000000000000000" pitchFamily="2" charset="2"/>
+              </a:rPr>
+              <a:t>momentan</a:t>
+            </a:r>
+            <a:r>
+              <a:rPr lang="en-US" dirty="0">
+                <a:sym typeface="Wingdings" panose="05000000000000000000" pitchFamily="2" charset="2"/>
+              </a:rPr>
+              <a:t>)?</a:t>
+            </a:r>
+          </a:p>
+          <a:p>
+            <a:endParaRPr lang="en-US" dirty="0">
+              <a:sym typeface="Wingdings" panose="05000000000000000000" pitchFamily="2" charset="2"/>
+            </a:endParaRPr>
+          </a:p>
+          <a:p>
+            <a:endParaRPr lang="en-US" dirty="0">
+              <a:sym typeface="Wingdings" panose="05000000000000000000" pitchFamily="2" charset="2"/>
+            </a:endParaRPr>
+          </a:p>
+          <a:p>
+            <a:r>
+              <a:rPr lang="en-US" dirty="0">
+                <a:sym typeface="Wingdings" panose="05000000000000000000" pitchFamily="2" charset="2"/>
+              </a:rPr>
+              <a:t>Wie </a:t>
+            </a:r>
+            <a:r>
+              <a:rPr lang="en-US" dirty="0" err="1">
+                <a:sym typeface="Wingdings" panose="05000000000000000000" pitchFamily="2" charset="2"/>
+              </a:rPr>
+              <a:t>vermitteln</a:t>
+            </a:r>
+            <a:r>
+              <a:rPr lang="en-US" dirty="0">
+                <a:sym typeface="Wingdings" panose="05000000000000000000" pitchFamily="2" charset="2"/>
+              </a:rPr>
+              <a:t> </a:t>
+            </a:r>
+            <a:r>
+              <a:rPr lang="en-US" dirty="0" err="1">
+                <a:sym typeface="Wingdings" panose="05000000000000000000" pitchFamily="2" charset="2"/>
+              </a:rPr>
+              <a:t>wir</a:t>
+            </a:r>
+            <a:r>
+              <a:rPr lang="en-US" dirty="0">
+                <a:sym typeface="Wingdings" panose="05000000000000000000" pitchFamily="2" charset="2"/>
+              </a:rPr>
+              <a:t> den </a:t>
+            </a:r>
+            <a:r>
+              <a:rPr lang="en-US" dirty="0" err="1">
+                <a:sym typeface="Wingdings" panose="05000000000000000000" pitchFamily="2" charset="2"/>
+              </a:rPr>
+              <a:t>Nutzern</a:t>
+            </a:r>
+            <a:r>
+              <a:rPr lang="en-US" dirty="0">
+                <a:sym typeface="Wingdings" panose="05000000000000000000" pitchFamily="2" charset="2"/>
+              </a:rPr>
+              <a:t> und Chatbot den Scope?</a:t>
+            </a:r>
+            <a:endParaRPr lang="en-DE" dirty="0"/>
           </a:p>
         </p:txBody>
       </p:sp>
     </p:spTree>
     <p:extLst>
       <p:ext uri="{BB962C8B-B14F-4D97-AF65-F5344CB8AC3E}">
-        <p14:creationId xmlns:p14="http://schemas.microsoft.com/office/powerpoint/2010/main" val="374838372"/>
+        <p14:creationId xmlns:p14="http://schemas.microsoft.com/office/powerpoint/2010/main" val="3232861218"/>
       </p:ext>
     </p:extLst>
   </p:cSld>

--- a/Nico-Silas.pptx
+++ b/Nico-Silas.pptx
@@ -10,11 +10,12 @@
     <p:sldId id="260" r:id="rId4"/>
     <p:sldId id="261" r:id="rId5"/>
     <p:sldId id="262" r:id="rId6"/>
-    <p:sldId id="259" r:id="rId7"/>
-    <p:sldId id="263" r:id="rId8"/>
-    <p:sldId id="264" r:id="rId9"/>
-    <p:sldId id="266" r:id="rId10"/>
-    <p:sldId id="265" r:id="rId11"/>
+    <p:sldId id="267" r:id="rId7"/>
+    <p:sldId id="259" r:id="rId8"/>
+    <p:sldId id="263" r:id="rId9"/>
+    <p:sldId id="264" r:id="rId10"/>
+    <p:sldId id="266" r:id="rId11"/>
+    <p:sldId id="265" r:id="rId12"/>
   </p:sldIdLst>
   <p:sldSz cx="12192000" cy="6858000"/>
   <p:notesSz cx="6858000" cy="9144000"/>
@@ -270,7 +271,7 @@
           <a:p>
             <a:fld id="{F4965A79-D83B-41BE-9FBE-6F4A5E0B5FA3}" type="datetimeFigureOut">
               <a:rPr lang="en-DE" smtClean="0"/>
-              <a:t>26/03/2026</a:t>
+              <a:t>31/03/2026</a:t>
             </a:fld>
             <a:endParaRPr lang="en-DE"/>
           </a:p>
@@ -470,7 +471,7 @@
           <a:p>
             <a:fld id="{F4965A79-D83B-41BE-9FBE-6F4A5E0B5FA3}" type="datetimeFigureOut">
               <a:rPr lang="en-DE" smtClean="0"/>
-              <a:t>26/03/2026</a:t>
+              <a:t>31/03/2026</a:t>
             </a:fld>
             <a:endParaRPr lang="en-DE"/>
           </a:p>
@@ -680,7 +681,7 @@
           <a:p>
             <a:fld id="{F4965A79-D83B-41BE-9FBE-6F4A5E0B5FA3}" type="datetimeFigureOut">
               <a:rPr lang="en-DE" smtClean="0"/>
-              <a:t>26/03/2026</a:t>
+              <a:t>31/03/2026</a:t>
             </a:fld>
             <a:endParaRPr lang="en-DE"/>
           </a:p>
@@ -880,7 +881,7 @@
           <a:p>
             <a:fld id="{F4965A79-D83B-41BE-9FBE-6F4A5E0B5FA3}" type="datetimeFigureOut">
               <a:rPr lang="en-DE" smtClean="0"/>
-              <a:t>26/03/2026</a:t>
+              <a:t>31/03/2026</a:t>
             </a:fld>
             <a:endParaRPr lang="en-DE"/>
           </a:p>
@@ -1156,7 +1157,7 @@
           <a:p>
             <a:fld id="{F4965A79-D83B-41BE-9FBE-6F4A5E0B5FA3}" type="datetimeFigureOut">
               <a:rPr lang="en-DE" smtClean="0"/>
-              <a:t>26/03/2026</a:t>
+              <a:t>31/03/2026</a:t>
             </a:fld>
             <a:endParaRPr lang="en-DE"/>
           </a:p>
@@ -1424,7 +1425,7 @@
           <a:p>
             <a:fld id="{F4965A79-D83B-41BE-9FBE-6F4A5E0B5FA3}" type="datetimeFigureOut">
               <a:rPr lang="en-DE" smtClean="0"/>
-              <a:t>26/03/2026</a:t>
+              <a:t>31/03/2026</a:t>
             </a:fld>
             <a:endParaRPr lang="en-DE"/>
           </a:p>
@@ -1839,7 +1840,7 @@
           <a:p>
             <a:fld id="{F4965A79-D83B-41BE-9FBE-6F4A5E0B5FA3}" type="datetimeFigureOut">
               <a:rPr lang="en-DE" smtClean="0"/>
-              <a:t>26/03/2026</a:t>
+              <a:t>31/03/2026</a:t>
             </a:fld>
             <a:endParaRPr lang="en-DE"/>
           </a:p>
@@ -1981,7 +1982,7 @@
           <a:p>
             <a:fld id="{F4965A79-D83B-41BE-9FBE-6F4A5E0B5FA3}" type="datetimeFigureOut">
               <a:rPr lang="en-DE" smtClean="0"/>
-              <a:t>26/03/2026</a:t>
+              <a:t>31/03/2026</a:t>
             </a:fld>
             <a:endParaRPr lang="en-DE"/>
           </a:p>
@@ -2094,7 +2095,7 @@
           <a:p>
             <a:fld id="{F4965A79-D83B-41BE-9FBE-6F4A5E0B5FA3}" type="datetimeFigureOut">
               <a:rPr lang="en-DE" smtClean="0"/>
-              <a:t>26/03/2026</a:t>
+              <a:t>31/03/2026</a:t>
             </a:fld>
             <a:endParaRPr lang="en-DE"/>
           </a:p>
@@ -2407,7 +2408,7 @@
           <a:p>
             <a:fld id="{F4965A79-D83B-41BE-9FBE-6F4A5E0B5FA3}" type="datetimeFigureOut">
               <a:rPr lang="en-DE" smtClean="0"/>
-              <a:t>26/03/2026</a:t>
+              <a:t>31/03/2026</a:t>
             </a:fld>
             <a:endParaRPr lang="en-DE"/>
           </a:p>
@@ -2696,7 +2697,7 @@
           <a:p>
             <a:fld id="{F4965A79-D83B-41BE-9FBE-6F4A5E0B5FA3}" type="datetimeFigureOut">
               <a:rPr lang="en-DE" smtClean="0"/>
-              <a:t>26/03/2026</a:t>
+              <a:t>31/03/2026</a:t>
             </a:fld>
             <a:endParaRPr lang="en-DE"/>
           </a:p>
@@ -2939,7 +2940,7 @@
           <a:p>
             <a:fld id="{F4965A79-D83B-41BE-9FBE-6F4A5E0B5FA3}" type="datetimeFigureOut">
               <a:rPr lang="en-DE" smtClean="0"/>
-              <a:t>26/03/2026</a:t>
+              <a:t>31/03/2026</a:t>
             </a:fld>
             <a:endParaRPr lang="en-DE"/>
           </a:p>
@@ -3444,7 +3445,7 @@
           <p:cNvPr id="2" name="Title 1">
             <a:extLst>
               <a:ext uri="{FF2B5EF4-FFF2-40B4-BE49-F238E27FC236}">
-                <a16:creationId xmlns:a16="http://schemas.microsoft.com/office/drawing/2014/main" id="{73EEBAE2-85FB-F6A9-8F21-24F62F1832B8}"/>
+                <a16:creationId xmlns:a16="http://schemas.microsoft.com/office/drawing/2014/main" id="{0A600FA2-9A03-B57A-7C25-BCE3E0633F36}"/>
               </a:ext>
             </a:extLst>
           </p:cNvPr>
@@ -3461,8 +3462,20 @@
           <a:lstStyle/>
           <a:p>
             <a:r>
-              <a:rPr lang="en-US" dirty="0" err="1"/>
-              <a:t>Fazit</a:t>
+              <a:rPr lang="en-US" dirty="0"/>
+              <a:t>Chatbot </a:t>
+            </a:r>
+            <a:r>
+              <a:rPr lang="en-US" dirty="0" err="1"/>
+              <a:t>Hürden</a:t>
+            </a:r>
+            <a:r>
+              <a:rPr lang="en-US" dirty="0"/>
+              <a:t> </a:t>
+            </a:r>
+            <a:r>
+              <a:rPr lang="en-US" dirty="0" err="1"/>
+              <a:t>allgemein</a:t>
             </a:r>
             <a:endParaRPr lang="en-DE" dirty="0"/>
           </a:p>
@@ -3473,7 +3486,7 @@
           <p:cNvPr id="3" name="Content Placeholder 2">
             <a:extLst>
               <a:ext uri="{FF2B5EF4-FFF2-40B4-BE49-F238E27FC236}">
-                <a16:creationId xmlns:a16="http://schemas.microsoft.com/office/drawing/2014/main" id="{8BA96E6D-49B6-EA77-5AEC-78885FE964BD}"/>
+                <a16:creationId xmlns:a16="http://schemas.microsoft.com/office/drawing/2014/main" id="{B999B94F-F759-6D2C-464F-1A45A0195CEB}"/>
               </a:ext>
             </a:extLst>
           </p:cNvPr>
@@ -3486,155 +3499,352 @@
         </p:nvSpPr>
         <p:spPr/>
         <p:txBody>
-          <a:bodyPr/>
-          <a:lstStyle/>
-          <a:p>
-            <a:r>
-              <a:rPr lang="en-US" dirty="0"/>
-              <a:t>Ich </a:t>
-            </a:r>
-            <a:r>
-              <a:rPr lang="en-US" dirty="0" err="1"/>
-              <a:t>würde</a:t>
-            </a:r>
-            <a:r>
-              <a:rPr lang="en-US" dirty="0"/>
-              <a:t> </a:t>
-            </a:r>
-            <a:r>
-              <a:rPr lang="en-US" dirty="0" err="1"/>
-              <a:t>eher</a:t>
-            </a:r>
-            <a:r>
-              <a:rPr lang="en-US" dirty="0"/>
-              <a:t> in Copilot </a:t>
-            </a:r>
-            <a:r>
-              <a:rPr lang="en-US" dirty="0" err="1"/>
-              <a:t>weiterarbeiten</a:t>
-            </a:r>
-            <a:endParaRPr lang="en-US" dirty="0"/>
+          <a:bodyPr>
+            <a:normAutofit/>
+          </a:bodyPr>
+          <a:lstStyle/>
+          <a:p>
+            <a:r>
+              <a:rPr lang="en-US" dirty="0"/>
+              <a:t>Wie </a:t>
+            </a:r>
+            <a:r>
+              <a:rPr lang="en-US" dirty="0" err="1"/>
+              <a:t>kombinieren</a:t>
+            </a:r>
+            <a:r>
+              <a:rPr lang="en-US" dirty="0"/>
+              <a:t> </a:t>
+            </a:r>
+            <a:r>
+              <a:rPr lang="en-US" dirty="0" err="1"/>
+              <a:t>wir</a:t>
+            </a:r>
+            <a:r>
+              <a:rPr lang="en-US" dirty="0"/>
+              <a:t> die </a:t>
+            </a:r>
+            <a:r>
+              <a:rPr lang="en-US" dirty="0" err="1"/>
+              <a:t>zwei</a:t>
+            </a:r>
+            <a:r>
+              <a:rPr lang="en-US" dirty="0"/>
+              <a:t> Bots?</a:t>
+            </a:r>
+          </a:p>
+          <a:p>
+            <a:r>
+              <a:rPr lang="en-US" dirty="0"/>
+              <a:t>Wenn </a:t>
+            </a:r>
+            <a:r>
+              <a:rPr lang="en-US" dirty="0" err="1"/>
+              <a:t>wir</a:t>
+            </a:r>
+            <a:r>
+              <a:rPr lang="en-US" dirty="0"/>
+              <a:t> </a:t>
+            </a:r>
+            <a:r>
+              <a:rPr lang="en-US" dirty="0" err="1"/>
+              <a:t>mehr</a:t>
+            </a:r>
+            <a:r>
+              <a:rPr lang="en-US" dirty="0"/>
+              <a:t> Apps </a:t>
+            </a:r>
+            <a:r>
+              <a:rPr lang="en-US" dirty="0" err="1"/>
+              <a:t>einfügen</a:t>
+            </a:r>
+            <a:r>
+              <a:rPr lang="en-US" dirty="0"/>
+              <a:t>, </a:t>
+            </a:r>
+            <a:r>
+              <a:rPr lang="en-US" dirty="0" err="1"/>
+              <a:t>wird</a:t>
+            </a:r>
+            <a:r>
+              <a:rPr lang="en-US" dirty="0"/>
+              <a:t> der Chatbot </a:t>
+            </a:r>
+            <a:r>
+              <a:rPr lang="en-US" dirty="0" err="1"/>
+              <a:t>dann</a:t>
+            </a:r>
+            <a:r>
+              <a:rPr lang="en-US" dirty="0"/>
+              <a:t> </a:t>
+            </a:r>
+            <a:r>
+              <a:rPr lang="en-US" dirty="0" err="1"/>
+              <a:t>verwirrt</a:t>
+            </a:r>
+            <a:r>
+              <a:rPr lang="en-US" dirty="0"/>
+              <a:t>?</a:t>
+            </a:r>
           </a:p>
           <a:p>
             <a:pPr lvl="1"/>
             <a:r>
-              <a:rPr lang="en-US" dirty="0" err="1"/>
-              <a:t>Bessere</a:t>
-            </a:r>
-            <a:r>
-              <a:rPr lang="en-US" dirty="0"/>
-              <a:t> </a:t>
-            </a:r>
-            <a:r>
-              <a:rPr lang="en-US" dirty="0" err="1"/>
-              <a:t>Entwicklungsumgebung</a:t>
-            </a:r>
-            <a:r>
-              <a:rPr lang="en-US" dirty="0"/>
-              <a:t> </a:t>
-            </a:r>
-          </a:p>
-          <a:p>
-            <a:pPr lvl="2"/>
-            <a:r>
-              <a:rPr lang="en-US" dirty="0" err="1"/>
-              <a:t>Übersichtlicher</a:t>
-            </a:r>
-            <a:r>
-              <a:rPr lang="en-US" dirty="0"/>
-              <a:t>, Schneller, Mehr </a:t>
-            </a:r>
-            <a:r>
-              <a:rPr lang="en-US" dirty="0" err="1"/>
-              <a:t>Funktionen</a:t>
-            </a:r>
-            <a:endParaRPr lang="en-US" dirty="0"/>
+              <a:rPr lang="en-US" dirty="0">
+                <a:sym typeface="Wingdings" panose="05000000000000000000" pitchFamily="2" charset="2"/>
+              </a:rPr>
+              <a:t> </a:t>
+            </a:r>
+            <a:r>
+              <a:rPr lang="en-US" dirty="0" err="1">
+                <a:sym typeface="Wingdings" panose="05000000000000000000" pitchFamily="2" charset="2"/>
+              </a:rPr>
+              <a:t>oData</a:t>
+            </a:r>
+            <a:r>
+              <a:rPr lang="en-US" dirty="0">
+                <a:sym typeface="Wingdings" panose="05000000000000000000" pitchFamily="2" charset="2"/>
+              </a:rPr>
+              <a:t> </a:t>
+            </a:r>
+            <a:r>
+              <a:rPr lang="en-US" dirty="0" err="1">
+                <a:sym typeface="Wingdings" panose="05000000000000000000" pitchFamily="2" charset="2"/>
+              </a:rPr>
+              <a:t>Schnitstelle</a:t>
+            </a:r>
+            <a:r>
+              <a:rPr lang="en-US" dirty="0">
+                <a:sym typeface="Wingdings" panose="05000000000000000000" pitchFamily="2" charset="2"/>
+              </a:rPr>
+              <a:t> nicht </a:t>
+            </a:r>
+            <a:r>
+              <a:rPr lang="en-US" dirty="0" err="1">
+                <a:sym typeface="Wingdings" panose="05000000000000000000" pitchFamily="2" charset="2"/>
+              </a:rPr>
+              <a:t>nach</a:t>
+            </a:r>
+            <a:r>
+              <a:rPr lang="en-US" dirty="0">
+                <a:sym typeface="Wingdings" panose="05000000000000000000" pitchFamily="2" charset="2"/>
+              </a:rPr>
+              <a:t> Apps </a:t>
+            </a:r>
+            <a:r>
+              <a:rPr lang="en-US" dirty="0" err="1">
+                <a:sym typeface="Wingdings" panose="05000000000000000000" pitchFamily="2" charset="2"/>
+              </a:rPr>
+              <a:t>sortieren</a:t>
+            </a:r>
+            <a:r>
+              <a:rPr lang="en-US" dirty="0">
+                <a:sym typeface="Wingdings" panose="05000000000000000000" pitchFamily="2" charset="2"/>
+              </a:rPr>
+              <a:t> </a:t>
+            </a:r>
+            <a:r>
+              <a:rPr lang="en-US" dirty="0" err="1">
+                <a:sym typeface="Wingdings" panose="05000000000000000000" pitchFamily="2" charset="2"/>
+              </a:rPr>
+              <a:t>sondern</a:t>
+            </a:r>
+            <a:r>
+              <a:rPr lang="en-US" dirty="0">
+                <a:sym typeface="Wingdings" panose="05000000000000000000" pitchFamily="2" charset="2"/>
+              </a:rPr>
+              <a:t> “</a:t>
+            </a:r>
+            <a:r>
+              <a:rPr lang="en-US" dirty="0" err="1">
+                <a:sym typeface="Wingdings" panose="05000000000000000000" pitchFamily="2" charset="2"/>
+              </a:rPr>
+              <a:t>anders</a:t>
+            </a:r>
+            <a:r>
+              <a:rPr lang="en-US" dirty="0">
+                <a:sym typeface="Wingdings" panose="05000000000000000000" pitchFamily="2" charset="2"/>
+              </a:rPr>
+              <a:t>”?</a:t>
+            </a:r>
+          </a:p>
+          <a:p>
+            <a:r>
+              <a:rPr lang="en-US" dirty="0" err="1">
+                <a:sym typeface="Wingdings" panose="05000000000000000000" pitchFamily="2" charset="2"/>
+              </a:rPr>
+              <a:t>Welche</a:t>
+            </a:r>
+            <a:r>
+              <a:rPr lang="en-US" dirty="0">
+                <a:sym typeface="Wingdings" panose="05000000000000000000" pitchFamily="2" charset="2"/>
+              </a:rPr>
+              <a:t> </a:t>
+            </a:r>
+            <a:r>
+              <a:rPr lang="en-US" dirty="0" err="1">
+                <a:sym typeface="Wingdings" panose="05000000000000000000" pitchFamily="2" charset="2"/>
+              </a:rPr>
+              <a:t>Dokumente</a:t>
+            </a:r>
+            <a:r>
+              <a:rPr lang="en-US" dirty="0">
+                <a:sym typeface="Wingdings" panose="05000000000000000000" pitchFamily="2" charset="2"/>
+              </a:rPr>
+              <a:t> </a:t>
+            </a:r>
+            <a:r>
+              <a:rPr lang="en-US" dirty="0" err="1">
+                <a:sym typeface="Wingdings" panose="05000000000000000000" pitchFamily="2" charset="2"/>
+              </a:rPr>
+              <a:t>fügen</a:t>
+            </a:r>
+            <a:r>
+              <a:rPr lang="en-US" dirty="0">
+                <a:sym typeface="Wingdings" panose="05000000000000000000" pitchFamily="2" charset="2"/>
+              </a:rPr>
+              <a:t> </a:t>
+            </a:r>
+            <a:r>
+              <a:rPr lang="en-US" dirty="0" err="1">
+                <a:sym typeface="Wingdings" panose="05000000000000000000" pitchFamily="2" charset="2"/>
+              </a:rPr>
+              <a:t>wir</a:t>
+            </a:r>
+            <a:r>
+              <a:rPr lang="en-US" dirty="0">
+                <a:sym typeface="Wingdings" panose="05000000000000000000" pitchFamily="2" charset="2"/>
+              </a:rPr>
+              <a:t> </a:t>
+            </a:r>
+            <a:r>
+              <a:rPr lang="en-US" dirty="0" err="1">
+                <a:sym typeface="Wingdings" panose="05000000000000000000" pitchFamily="2" charset="2"/>
+              </a:rPr>
+              <a:t>noch</a:t>
+            </a:r>
+            <a:r>
+              <a:rPr lang="en-US" dirty="0">
+                <a:sym typeface="Wingdings" panose="05000000000000000000" pitchFamily="2" charset="2"/>
+              </a:rPr>
+              <a:t> </a:t>
+            </a:r>
+            <a:r>
+              <a:rPr lang="en-US" dirty="0" err="1">
+                <a:sym typeface="Wingdings" panose="05000000000000000000" pitchFamily="2" charset="2"/>
+              </a:rPr>
+              <a:t>hinzu</a:t>
+            </a:r>
+            <a:r>
+              <a:rPr lang="en-US" dirty="0">
+                <a:sym typeface="Wingdings" panose="05000000000000000000" pitchFamily="2" charset="2"/>
+              </a:rPr>
+              <a:t>?</a:t>
+            </a:r>
           </a:p>
           <a:p>
             <a:pPr lvl="1"/>
             <a:r>
-              <a:rPr lang="en-US" dirty="0" err="1"/>
-              <a:t>Vielversprechender</a:t>
-            </a:r>
-            <a:endParaRPr lang="en-US" dirty="0"/>
-          </a:p>
-          <a:p>
-            <a:pPr lvl="1"/>
-            <a:r>
-              <a:rPr lang="en-US" dirty="0"/>
-              <a:t>Deployment auf Teams </a:t>
-            </a:r>
-            <a:r>
-              <a:rPr lang="en-US" dirty="0" err="1"/>
-              <a:t>funktioniert</a:t>
-            </a:r>
-            <a:r>
-              <a:rPr lang="en-US" dirty="0"/>
-              <a:t> </a:t>
-            </a:r>
-            <a:r>
-              <a:rPr lang="en-US" dirty="0" err="1"/>
-              <a:t>schon</a:t>
-            </a:r>
-            <a:endParaRPr lang="en-US" dirty="0"/>
-          </a:p>
-          <a:p>
-            <a:pPr lvl="2"/>
-            <a:r>
-              <a:rPr lang="en-US" dirty="0" err="1"/>
-              <a:t>Funktionen</a:t>
-            </a:r>
-            <a:r>
-              <a:rPr lang="en-US" dirty="0"/>
-              <a:t> </a:t>
-            </a:r>
-            <a:r>
-              <a:rPr lang="en-US" dirty="0" err="1"/>
-              <a:t>wie</a:t>
-            </a:r>
-            <a:r>
-              <a:rPr lang="en-US" dirty="0"/>
-              <a:t> </a:t>
-            </a:r>
-            <a:r>
-              <a:rPr lang="en-US" dirty="0" err="1"/>
-              <a:t>beispielprompts</a:t>
-            </a:r>
-            <a:r>
-              <a:rPr lang="en-US" dirty="0"/>
-              <a:t> und </a:t>
-            </a:r>
-            <a:r>
-              <a:rPr lang="en-US" dirty="0" err="1"/>
-              <a:t>generell</a:t>
-            </a:r>
-            <a:r>
-              <a:rPr lang="en-US" dirty="0"/>
-              <a:t> UI </a:t>
-            </a:r>
-            <a:r>
-              <a:rPr lang="en-US" dirty="0" err="1"/>
-              <a:t>Elemente</a:t>
-            </a:r>
-            <a:r>
-              <a:rPr lang="en-US" dirty="0"/>
-              <a:t> </a:t>
-            </a:r>
-            <a:r>
-              <a:rPr lang="en-US" dirty="0" err="1"/>
-              <a:t>sind</a:t>
-            </a:r>
-            <a:r>
-              <a:rPr lang="en-US" dirty="0"/>
-              <a:t> </a:t>
-            </a:r>
-            <a:r>
-              <a:rPr lang="en-US" dirty="0" err="1"/>
-              <a:t>bereits</a:t>
-            </a:r>
-            <a:r>
-              <a:rPr lang="en-US" dirty="0"/>
-              <a:t> da</a:t>
+              <a:rPr lang="en-US" dirty="0">
+                <a:sym typeface="Wingdings" panose="05000000000000000000" pitchFamily="2" charset="2"/>
+              </a:rPr>
+              <a:t>Wir </a:t>
+            </a:r>
+            <a:r>
+              <a:rPr lang="en-US" dirty="0" err="1">
+                <a:sym typeface="Wingdings" panose="05000000000000000000" pitchFamily="2" charset="2"/>
+              </a:rPr>
+              <a:t>müssen</a:t>
+            </a:r>
+            <a:r>
+              <a:rPr lang="en-US" dirty="0">
+                <a:sym typeface="Wingdings" panose="05000000000000000000" pitchFamily="2" charset="2"/>
+              </a:rPr>
+              <a:t> alle </a:t>
+            </a:r>
+            <a:r>
+              <a:rPr lang="en-US" dirty="0" err="1">
+                <a:sym typeface="Wingdings" panose="05000000000000000000" pitchFamily="2" charset="2"/>
+              </a:rPr>
+              <a:t>Dokumente</a:t>
+            </a:r>
+            <a:r>
+              <a:rPr lang="en-US" dirty="0">
+                <a:sym typeface="Wingdings" panose="05000000000000000000" pitchFamily="2" charset="2"/>
+              </a:rPr>
+              <a:t> </a:t>
+            </a:r>
+            <a:r>
+              <a:rPr lang="en-US" dirty="0" err="1">
+                <a:sym typeface="Wingdings" panose="05000000000000000000" pitchFamily="2" charset="2"/>
+              </a:rPr>
+              <a:t>regelmäßig</a:t>
+            </a:r>
+            <a:r>
+              <a:rPr lang="en-US" dirty="0">
+                <a:sym typeface="Wingdings" panose="05000000000000000000" pitchFamily="2" charset="2"/>
+              </a:rPr>
+              <a:t> </a:t>
+            </a:r>
+            <a:r>
+              <a:rPr lang="en-US" dirty="0" err="1">
+                <a:sym typeface="Wingdings" panose="05000000000000000000" pitchFamily="2" charset="2"/>
+              </a:rPr>
+              <a:t>updaten</a:t>
+            </a:r>
+            <a:r>
+              <a:rPr lang="en-US" dirty="0">
+                <a:sym typeface="Wingdings" panose="05000000000000000000" pitchFamily="2" charset="2"/>
+              </a:rPr>
+              <a:t> (</a:t>
+            </a:r>
+            <a:r>
+              <a:rPr lang="en-US" dirty="0" err="1">
+                <a:sym typeface="Wingdings" panose="05000000000000000000" pitchFamily="2" charset="2"/>
+              </a:rPr>
+              <a:t>kein</a:t>
+            </a:r>
+            <a:r>
+              <a:rPr lang="en-US" dirty="0">
+                <a:sym typeface="Wingdings" panose="05000000000000000000" pitchFamily="2" charset="2"/>
+              </a:rPr>
+              <a:t> </a:t>
+            </a:r>
+            <a:r>
+              <a:rPr lang="en-US" dirty="0" err="1">
+                <a:sym typeface="Wingdings" panose="05000000000000000000" pitchFamily="2" charset="2"/>
+              </a:rPr>
+              <a:t>dynamischer</a:t>
+            </a:r>
+            <a:r>
+              <a:rPr lang="en-US" dirty="0">
+                <a:sym typeface="Wingdings" panose="05000000000000000000" pitchFamily="2" charset="2"/>
+              </a:rPr>
+              <a:t> </a:t>
+            </a:r>
+            <a:r>
+              <a:rPr lang="en-US" dirty="0" err="1">
+                <a:sym typeface="Wingdings" panose="05000000000000000000" pitchFamily="2" charset="2"/>
+              </a:rPr>
+              <a:t>zugriff</a:t>
+            </a:r>
+            <a:r>
+              <a:rPr lang="en-US" dirty="0">
+                <a:sym typeface="Wingdings" panose="05000000000000000000" pitchFamily="2" charset="2"/>
+              </a:rPr>
+              <a:t> </a:t>
+            </a:r>
+            <a:r>
+              <a:rPr lang="en-US" dirty="0" err="1">
+                <a:sym typeface="Wingdings" panose="05000000000000000000" pitchFamily="2" charset="2"/>
+              </a:rPr>
+              <a:t>momentan</a:t>
+            </a:r>
+            <a:r>
+              <a:rPr lang="en-US" dirty="0">
+                <a:sym typeface="Wingdings" panose="05000000000000000000" pitchFamily="2" charset="2"/>
+              </a:rPr>
+              <a:t>)?</a:t>
             </a:r>
           </a:p>
           <a:p>
@@ -3643,52 +3853,339 @@
             </a:endParaRPr>
           </a:p>
           <a:p>
-            <a:r>
-              <a:rPr lang="en-US" dirty="0">
-                <a:sym typeface="Wingdings" panose="05000000000000000000" pitchFamily="2" charset="2"/>
-              </a:rPr>
-              <a:t> Wenn Chatbot </a:t>
-            </a:r>
-            <a:r>
-              <a:rPr lang="en-US" dirty="0" err="1">
-                <a:sym typeface="Wingdings" panose="05000000000000000000" pitchFamily="2" charset="2"/>
-              </a:rPr>
-              <a:t>funktioniert</a:t>
-            </a:r>
-            <a:r>
-              <a:rPr lang="en-US" dirty="0">
-                <a:sym typeface="Wingdings" panose="05000000000000000000" pitchFamily="2" charset="2"/>
-              </a:rPr>
-              <a:t> </a:t>
-            </a:r>
-            <a:r>
-              <a:rPr lang="en-US" dirty="0" err="1">
-                <a:sym typeface="Wingdings" panose="05000000000000000000" pitchFamily="2" charset="2"/>
-              </a:rPr>
-              <a:t>ist</a:t>
-            </a:r>
-            <a:r>
-              <a:rPr lang="en-US" dirty="0">
-                <a:sym typeface="Wingdings" panose="05000000000000000000" pitchFamily="2" charset="2"/>
-              </a:rPr>
-              <a:t> er definitive </a:t>
-            </a:r>
-            <a:r>
-              <a:rPr lang="en-US" dirty="0" err="1">
-                <a:sym typeface="Wingdings" panose="05000000000000000000" pitchFamily="2" charset="2"/>
-              </a:rPr>
-              <a:t>Sinnvoll</a:t>
-            </a:r>
             <a:endParaRPr lang="en-US" dirty="0">
               <a:sym typeface="Wingdings" panose="05000000000000000000" pitchFamily="2" charset="2"/>
             </a:endParaRPr>
           </a:p>
           <a:p>
+            <a:r>
+              <a:rPr lang="en-US" dirty="0">
+                <a:sym typeface="Wingdings" panose="05000000000000000000" pitchFamily="2" charset="2"/>
+              </a:rPr>
+              <a:t>Wie </a:t>
+            </a:r>
+            <a:r>
+              <a:rPr lang="en-US" dirty="0" err="1">
+                <a:sym typeface="Wingdings" panose="05000000000000000000" pitchFamily="2" charset="2"/>
+              </a:rPr>
+              <a:t>vermitteln</a:t>
+            </a:r>
+            <a:r>
+              <a:rPr lang="en-US" dirty="0">
+                <a:sym typeface="Wingdings" panose="05000000000000000000" pitchFamily="2" charset="2"/>
+              </a:rPr>
+              <a:t> </a:t>
+            </a:r>
+            <a:r>
+              <a:rPr lang="en-US" dirty="0" err="1">
+                <a:sym typeface="Wingdings" panose="05000000000000000000" pitchFamily="2" charset="2"/>
+              </a:rPr>
+              <a:t>wir</a:t>
+            </a:r>
+            <a:r>
+              <a:rPr lang="en-US" dirty="0">
+                <a:sym typeface="Wingdings" panose="05000000000000000000" pitchFamily="2" charset="2"/>
+              </a:rPr>
+              <a:t> den </a:t>
+            </a:r>
+            <a:r>
+              <a:rPr lang="en-US" dirty="0" err="1">
+                <a:sym typeface="Wingdings" panose="05000000000000000000" pitchFamily="2" charset="2"/>
+              </a:rPr>
+              <a:t>Nutzern</a:t>
+            </a:r>
+            <a:r>
+              <a:rPr lang="en-US" dirty="0">
+                <a:sym typeface="Wingdings" panose="05000000000000000000" pitchFamily="2" charset="2"/>
+              </a:rPr>
+              <a:t> und Chatbot den Scope?</a:t>
+            </a:r>
+            <a:endParaRPr lang="en-DE" dirty="0"/>
+          </a:p>
+        </p:txBody>
+      </p:sp>
+    </p:spTree>
+    <p:extLst>
+      <p:ext uri="{BB962C8B-B14F-4D97-AF65-F5344CB8AC3E}">
+        <p14:creationId xmlns:p14="http://schemas.microsoft.com/office/powerpoint/2010/main" val="3232861218"/>
+      </p:ext>
+    </p:extLst>
+  </p:cSld>
+  <p:clrMapOvr>
+    <a:masterClrMapping/>
+  </p:clrMapOvr>
+</p:sld>
+</file>
+
+<file path=ppt/slides/slide11.xml><?xml version="1.0" encoding="utf-8"?>
+<p:sld xmlns:a="http://schemas.openxmlformats.org/drawingml/2006/main" xmlns:r="http://schemas.openxmlformats.org/officeDocument/2006/relationships" xmlns:p="http://schemas.openxmlformats.org/presentationml/2006/main">
+  <p:cSld>
+    <p:spTree>
+      <p:nvGrpSpPr>
+        <p:cNvPr id="1" name=""/>
+        <p:cNvGrpSpPr/>
+        <p:nvPr/>
+      </p:nvGrpSpPr>
+      <p:grpSpPr>
+        <a:xfrm>
+          <a:off x="0" y="0"/>
+          <a:ext cx="0" cy="0"/>
+          <a:chOff x="0" y="0"/>
+          <a:chExt cx="0" cy="0"/>
+        </a:xfrm>
+      </p:grpSpPr>
+      <p:sp>
+        <p:nvSpPr>
+          <p:cNvPr id="2" name="Title 1">
+            <a:extLst>
+              <a:ext uri="{FF2B5EF4-FFF2-40B4-BE49-F238E27FC236}">
+                <a16:creationId xmlns:a16="http://schemas.microsoft.com/office/drawing/2014/main" id="{73EEBAE2-85FB-F6A9-8F21-24F62F1832B8}"/>
+              </a:ext>
+            </a:extLst>
+          </p:cNvPr>
+          <p:cNvSpPr>
+            <a:spLocks noGrp="1"/>
+          </p:cNvSpPr>
+          <p:nvPr>
+            <p:ph type="title"/>
+          </p:nvPr>
+        </p:nvSpPr>
+        <p:spPr/>
+        <p:txBody>
+          <a:bodyPr/>
+          <a:lstStyle/>
+          <a:p>
+            <a:r>
+              <a:rPr lang="en-US" dirty="0" err="1"/>
+              <a:t>Fazit</a:t>
+            </a:r>
+            <a:endParaRPr lang="en-DE" dirty="0"/>
+          </a:p>
+        </p:txBody>
+      </p:sp>
+      <p:sp>
+        <p:nvSpPr>
+          <p:cNvPr id="3" name="Content Placeholder 2">
+            <a:extLst>
+              <a:ext uri="{FF2B5EF4-FFF2-40B4-BE49-F238E27FC236}">
+                <a16:creationId xmlns:a16="http://schemas.microsoft.com/office/drawing/2014/main" id="{8BA96E6D-49B6-EA77-5AEC-78885FE964BD}"/>
+              </a:ext>
+            </a:extLst>
+          </p:cNvPr>
+          <p:cNvSpPr>
+            <a:spLocks noGrp="1"/>
+          </p:cNvSpPr>
+          <p:nvPr>
+            <p:ph idx="1"/>
+          </p:nvPr>
+        </p:nvSpPr>
+        <p:spPr/>
+        <p:txBody>
+          <a:bodyPr>
+            <a:normAutofit fontScale="92500" lnSpcReduction="10000"/>
+          </a:bodyPr>
+          <a:lstStyle/>
+          <a:p>
+            <a:r>
+              <a:rPr lang="en-US" dirty="0"/>
+              <a:t>Ich </a:t>
+            </a:r>
+            <a:r>
+              <a:rPr lang="en-US" dirty="0" err="1"/>
+              <a:t>würde</a:t>
+            </a:r>
+            <a:r>
+              <a:rPr lang="en-US" dirty="0"/>
+              <a:t> </a:t>
+            </a:r>
+            <a:r>
+              <a:rPr lang="en-US" dirty="0" err="1"/>
+              <a:t>eher</a:t>
+            </a:r>
+            <a:r>
+              <a:rPr lang="en-US" dirty="0"/>
+              <a:t> in Copilot </a:t>
+            </a:r>
+            <a:r>
+              <a:rPr lang="en-US" dirty="0" err="1"/>
+              <a:t>weiterarbeiten</a:t>
+            </a:r>
+            <a:endParaRPr lang="en-US" dirty="0"/>
+          </a:p>
+          <a:p>
             <a:pPr lvl="1"/>
             <a:r>
+              <a:rPr lang="en-US" dirty="0" err="1"/>
+              <a:t>Bessere</a:t>
+            </a:r>
+            <a:r>
+              <a:rPr lang="en-US" dirty="0"/>
+              <a:t> </a:t>
+            </a:r>
+            <a:r>
+              <a:rPr lang="en-US" dirty="0" err="1"/>
+              <a:t>Entwicklungsumgebung</a:t>
+            </a:r>
+            <a:r>
+              <a:rPr lang="en-US" dirty="0"/>
+              <a:t> </a:t>
+            </a:r>
+          </a:p>
+          <a:p>
+            <a:pPr lvl="2"/>
+            <a:r>
+              <a:rPr lang="en-US" dirty="0" err="1"/>
+              <a:t>Übersichtlicher</a:t>
+            </a:r>
+            <a:r>
+              <a:rPr lang="en-US" dirty="0"/>
+              <a:t>, Schneller, Mehr </a:t>
+            </a:r>
+            <a:r>
+              <a:rPr lang="en-US" dirty="0" err="1"/>
+              <a:t>Funktionen</a:t>
+            </a:r>
+            <a:endParaRPr lang="en-US" dirty="0"/>
+          </a:p>
+          <a:p>
+            <a:pPr lvl="1"/>
+            <a:r>
+              <a:rPr lang="en-US" dirty="0" err="1"/>
+              <a:t>Vielversprechender</a:t>
+            </a:r>
+            <a:endParaRPr lang="en-US" dirty="0"/>
+          </a:p>
+          <a:p>
+            <a:pPr lvl="1"/>
+            <a:r>
+              <a:rPr lang="en-US" dirty="0"/>
+              <a:t>Deployment auf Teams </a:t>
+            </a:r>
+            <a:r>
+              <a:rPr lang="en-US" dirty="0" err="1"/>
+              <a:t>funktioniert</a:t>
+            </a:r>
+            <a:r>
+              <a:rPr lang="en-US" dirty="0"/>
+              <a:t> </a:t>
+            </a:r>
+            <a:r>
+              <a:rPr lang="en-US" dirty="0" err="1"/>
+              <a:t>schon</a:t>
+            </a:r>
+            <a:endParaRPr lang="en-US" dirty="0"/>
+          </a:p>
+          <a:p>
+            <a:pPr lvl="2"/>
+            <a:r>
+              <a:rPr lang="en-US" dirty="0" err="1"/>
+              <a:t>Funktionen</a:t>
+            </a:r>
+            <a:r>
+              <a:rPr lang="en-US" dirty="0"/>
+              <a:t> </a:t>
+            </a:r>
+            <a:r>
+              <a:rPr lang="en-US" dirty="0" err="1"/>
+              <a:t>wie</a:t>
+            </a:r>
+            <a:r>
+              <a:rPr lang="en-US" dirty="0"/>
+              <a:t> </a:t>
+            </a:r>
+            <a:r>
+              <a:rPr lang="en-US" dirty="0" err="1"/>
+              <a:t>beispielprompts</a:t>
+            </a:r>
+            <a:r>
+              <a:rPr lang="en-US" dirty="0"/>
+              <a:t> und </a:t>
+            </a:r>
+            <a:r>
+              <a:rPr lang="en-US" dirty="0" err="1"/>
+              <a:t>generell</a:t>
+            </a:r>
+            <a:r>
+              <a:rPr lang="en-US" dirty="0"/>
+              <a:t> UI </a:t>
+            </a:r>
+            <a:r>
+              <a:rPr lang="en-US" dirty="0" err="1"/>
+              <a:t>Elemente</a:t>
+            </a:r>
+            <a:r>
+              <a:rPr lang="en-US" dirty="0"/>
+              <a:t> </a:t>
+            </a:r>
+            <a:r>
+              <a:rPr lang="en-US" dirty="0" err="1"/>
+              <a:t>sind</a:t>
+            </a:r>
+            <a:r>
+              <a:rPr lang="en-US" dirty="0"/>
+              <a:t> </a:t>
+            </a:r>
+            <a:r>
+              <a:rPr lang="en-US" dirty="0" err="1"/>
+              <a:t>bereits</a:t>
+            </a:r>
+            <a:r>
+              <a:rPr lang="en-US" dirty="0"/>
+              <a:t> da</a:t>
+            </a:r>
+          </a:p>
+          <a:p>
+            <a:endParaRPr lang="en-US" dirty="0">
+              <a:sym typeface="Wingdings" panose="05000000000000000000" pitchFamily="2" charset="2"/>
+            </a:endParaRPr>
+          </a:p>
+          <a:p>
+            <a:r>
+              <a:rPr lang="en-US" dirty="0">
+                <a:sym typeface="Wingdings" panose="05000000000000000000" pitchFamily="2" charset="2"/>
+              </a:rPr>
+              <a:t> Wenn Chatbot </a:t>
+            </a:r>
+            <a:r>
               <a:rPr lang="en-US" dirty="0" err="1">
                 <a:sym typeface="Wingdings" panose="05000000000000000000" pitchFamily="2" charset="2"/>
               </a:rPr>
+              <a:t>funktioniert</a:t>
+            </a:r>
+            <a:r>
+              <a:rPr lang="en-US" dirty="0">
+                <a:sym typeface="Wingdings" panose="05000000000000000000" pitchFamily="2" charset="2"/>
+              </a:rPr>
+              <a:t> </a:t>
+            </a:r>
+            <a:r>
+              <a:rPr lang="en-US" dirty="0" err="1">
+                <a:sym typeface="Wingdings" panose="05000000000000000000" pitchFamily="2" charset="2"/>
+              </a:rPr>
+              <a:t>ist</a:t>
+            </a:r>
+            <a:r>
+              <a:rPr lang="en-US" dirty="0">
+                <a:sym typeface="Wingdings" panose="05000000000000000000" pitchFamily="2" charset="2"/>
+              </a:rPr>
+              <a:t> er definitive </a:t>
+            </a:r>
+            <a:r>
+              <a:rPr lang="en-US" dirty="0" err="1">
+                <a:sym typeface="Wingdings" panose="05000000000000000000" pitchFamily="2" charset="2"/>
+              </a:rPr>
+              <a:t>Sinnvoll</a:t>
+            </a:r>
+            <a:endParaRPr lang="en-US" dirty="0">
+              <a:sym typeface="Wingdings" panose="05000000000000000000" pitchFamily="2" charset="2"/>
+            </a:endParaRPr>
+          </a:p>
+          <a:p>
+            <a:pPr lvl="1"/>
+            <a:r>
+              <a:rPr lang="en-US" dirty="0" err="1">
+                <a:sym typeface="Wingdings" panose="05000000000000000000" pitchFamily="2" charset="2"/>
+              </a:rPr>
               <a:t>Direkt</a:t>
             </a:r>
             <a:r>
@@ -3744,6 +4241,168 @@
                 <a:sym typeface="Wingdings" panose="05000000000000000000" pitchFamily="2" charset="2"/>
               </a:rPr>
               <a:t> EA)</a:t>
+            </a:r>
+          </a:p>
+          <a:p>
+            <a:pPr lvl="1"/>
+            <a:r>
+              <a:rPr lang="en-US" dirty="0" err="1">
+                <a:sym typeface="Wingdings" panose="05000000000000000000" pitchFamily="2" charset="2"/>
+              </a:rPr>
+              <a:t>Evt</a:t>
+            </a:r>
+            <a:r>
+              <a:rPr lang="en-US" dirty="0">
+                <a:sym typeface="Wingdings" panose="05000000000000000000" pitchFamily="2" charset="2"/>
+              </a:rPr>
+              <a:t>. nicht </a:t>
+            </a:r>
+            <a:r>
+              <a:rPr lang="en-US" dirty="0" err="1">
+                <a:sym typeface="Wingdings" panose="05000000000000000000" pitchFamily="2" charset="2"/>
+              </a:rPr>
+              <a:t>jetzt</a:t>
+            </a:r>
+            <a:r>
+              <a:rPr lang="en-US" dirty="0">
+                <a:sym typeface="Wingdings" panose="05000000000000000000" pitchFamily="2" charset="2"/>
+              </a:rPr>
+              <a:t> </a:t>
+            </a:r>
+            <a:r>
+              <a:rPr lang="en-US" dirty="0" err="1">
+                <a:sym typeface="Wingdings" panose="05000000000000000000" pitchFamily="2" charset="2"/>
+              </a:rPr>
+              <a:t>zu</a:t>
+            </a:r>
+            <a:r>
+              <a:rPr lang="en-US" dirty="0">
+                <a:sym typeface="Wingdings" panose="05000000000000000000" pitchFamily="2" charset="2"/>
+              </a:rPr>
+              <a:t> </a:t>
+            </a:r>
+            <a:r>
+              <a:rPr lang="en-US" dirty="0" err="1">
+                <a:sym typeface="Wingdings" panose="05000000000000000000" pitchFamily="2" charset="2"/>
+              </a:rPr>
+              <a:t>viel</a:t>
+            </a:r>
+            <a:r>
+              <a:rPr lang="en-US" dirty="0">
+                <a:sym typeface="Wingdings" panose="05000000000000000000" pitchFamily="2" charset="2"/>
+              </a:rPr>
+              <a:t> Zeit </a:t>
+            </a:r>
+            <a:r>
+              <a:rPr lang="en-US" dirty="0" err="1">
+                <a:sym typeface="Wingdings" panose="05000000000000000000" pitchFamily="2" charset="2"/>
+              </a:rPr>
+              <a:t>investieren</a:t>
+            </a:r>
+            <a:endParaRPr lang="en-US" dirty="0">
+              <a:sym typeface="Wingdings" panose="05000000000000000000" pitchFamily="2" charset="2"/>
+            </a:endParaRPr>
+          </a:p>
+          <a:p>
+            <a:pPr lvl="2"/>
+            <a:r>
+              <a:rPr lang="en-US" dirty="0">
+                <a:sym typeface="Wingdings" panose="05000000000000000000" pitchFamily="2" charset="2"/>
+              </a:rPr>
+              <a:t>Durch </a:t>
+            </a:r>
+            <a:r>
+              <a:rPr lang="en-US" dirty="0" err="1">
+                <a:sym typeface="Wingdings" panose="05000000000000000000" pitchFamily="2" charset="2"/>
+              </a:rPr>
+              <a:t>unregelmäßige</a:t>
+            </a:r>
+            <a:r>
+              <a:rPr lang="en-US" dirty="0">
+                <a:sym typeface="Wingdings" panose="05000000000000000000" pitchFamily="2" charset="2"/>
+              </a:rPr>
+              <a:t> </a:t>
+            </a:r>
+            <a:r>
+              <a:rPr lang="en-US">
+                <a:sym typeface="Wingdings" panose="05000000000000000000" pitchFamily="2" charset="2"/>
+              </a:rPr>
+              <a:t>Nützlichkeit </a:t>
+            </a:r>
+            <a:r>
+              <a:rPr lang="en-US" dirty="0" err="1">
+                <a:sym typeface="Wingdings" panose="05000000000000000000" pitchFamily="2" charset="2"/>
+              </a:rPr>
+              <a:t>Antworten</a:t>
+            </a:r>
+            <a:r>
+              <a:rPr lang="en-US" dirty="0">
+                <a:sym typeface="Wingdings" panose="05000000000000000000" pitchFamily="2" charset="2"/>
+              </a:rPr>
+              <a:t> </a:t>
+            </a:r>
+            <a:r>
+              <a:rPr lang="en-US" dirty="0" err="1">
+                <a:sym typeface="Wingdings" panose="05000000000000000000" pitchFamily="2" charset="2"/>
+              </a:rPr>
+              <a:t>sinkt</a:t>
+            </a:r>
+            <a:r>
+              <a:rPr lang="en-US" dirty="0">
+                <a:sym typeface="Wingdings" panose="05000000000000000000" pitchFamily="2" charset="2"/>
+              </a:rPr>
+              <a:t> UX stark</a:t>
+            </a:r>
+          </a:p>
+          <a:p>
+            <a:pPr lvl="2"/>
+            <a:r>
+              <a:rPr lang="en-US" dirty="0">
+                <a:sym typeface="Wingdings" panose="05000000000000000000" pitchFamily="2" charset="2"/>
+              </a:rPr>
+              <a:t>Ready </a:t>
+            </a:r>
+            <a:r>
+              <a:rPr lang="en-US" dirty="0" err="1">
+                <a:sym typeface="Wingdings" panose="05000000000000000000" pitchFamily="2" charset="2"/>
+              </a:rPr>
+              <a:t>lösungen</a:t>
+            </a:r>
+            <a:r>
+              <a:rPr lang="en-US" dirty="0">
+                <a:sym typeface="Wingdings" panose="05000000000000000000" pitchFamily="2" charset="2"/>
+              </a:rPr>
+              <a:t> </a:t>
+            </a:r>
+            <a:r>
+              <a:rPr lang="en-US" dirty="0" err="1">
+                <a:sym typeface="Wingdings" panose="05000000000000000000" pitchFamily="2" charset="2"/>
+              </a:rPr>
+              <a:t>entwickeln</a:t>
+            </a:r>
+            <a:r>
+              <a:rPr lang="en-US" dirty="0">
+                <a:sym typeface="Wingdings" panose="05000000000000000000" pitchFamily="2" charset="2"/>
+              </a:rPr>
+              <a:t> </a:t>
+            </a:r>
+            <a:r>
+              <a:rPr lang="en-US" dirty="0" err="1">
+                <a:sym typeface="Wingdings" panose="05000000000000000000" pitchFamily="2" charset="2"/>
+              </a:rPr>
+              <a:t>sich</a:t>
+            </a:r>
+            <a:r>
+              <a:rPr lang="en-US" dirty="0">
+                <a:sym typeface="Wingdings" panose="05000000000000000000" pitchFamily="2" charset="2"/>
+              </a:rPr>
+              <a:t> </a:t>
+            </a:r>
+            <a:r>
+              <a:rPr lang="en-US" dirty="0" err="1">
+                <a:sym typeface="Wingdings" panose="05000000000000000000" pitchFamily="2" charset="2"/>
+              </a:rPr>
+              <a:t>weiter</a:t>
             </a:r>
             <a:endParaRPr lang="en-US" dirty="0"/>
           </a:p>
@@ -3850,6 +4509,34 @@
           <a:bodyPr/>
           <a:lstStyle/>
           <a:p>
+            <a:r>
+              <a:rPr lang="de-DE" dirty="0"/>
+              <a:t>Was habe ich bei den Usern beobachtet</a:t>
+            </a:r>
+          </a:p>
+          <a:p>
+            <a:r>
+              <a:rPr lang="de-DE" dirty="0"/>
+              <a:t>Meine Erfahrungen</a:t>
+            </a:r>
+          </a:p>
+          <a:p>
+            <a:r>
+              <a:rPr lang="de-DE" dirty="0"/>
+              <a:t>Joule und Copilot</a:t>
+            </a:r>
+          </a:p>
+          <a:p>
+            <a:r>
+              <a:rPr lang="de-DE" noProof="0" dirty="0"/>
+              <a:t>Hürden</a:t>
+            </a:r>
+          </a:p>
+          <a:p>
+            <a:r>
+              <a:rPr lang="de-DE" dirty="0"/>
+              <a:t>Wie gehts weiter?</a:t>
+            </a:r>
             <a:endParaRPr lang="de-DE" noProof="0" dirty="0"/>
           </a:p>
         </p:txBody>
@@ -4643,7 +5330,6 @@
               <a:rPr lang="en-US" dirty="0"/>
               <a:t> hat</a:t>
             </a:r>
-            <a:endParaRPr lang="en-DE" dirty="0"/>
           </a:p>
         </p:txBody>
       </p:sp>
@@ -4682,7 +5368,7 @@
           <p:cNvPr id="2" name="Title 1">
             <a:extLst>
               <a:ext uri="{FF2B5EF4-FFF2-40B4-BE49-F238E27FC236}">
-                <a16:creationId xmlns:a16="http://schemas.microsoft.com/office/drawing/2014/main" id="{D9357320-6786-8C23-B010-2B46A856BDEF}"/>
+                <a16:creationId xmlns:a16="http://schemas.microsoft.com/office/drawing/2014/main" id="{33DC6BD3-7C2C-7660-A1C1-95AE263790A7}"/>
               </a:ext>
             </a:extLst>
           </p:cNvPr>
@@ -4699,9 +5385,14 @@
           <a:lstStyle/>
           <a:p>
             <a:r>
-              <a:rPr lang="de-DE" noProof="0" dirty="0"/>
-              <a:t>Meine Erfahrung</a:t>
-            </a:r>
+              <a:rPr lang="en-US" dirty="0"/>
+              <a:t>Bot an </a:t>
+            </a:r>
+            <a:r>
+              <a:rPr lang="en-US" dirty="0" err="1"/>
+              <a:t>sich</a:t>
+            </a:r>
+            <a:endParaRPr lang="en-DE" dirty="0"/>
           </a:p>
         </p:txBody>
       </p:sp>
@@ -4710,7 +5401,7 @@
           <p:cNvPr id="3" name="Content Placeholder 2">
             <a:extLst>
               <a:ext uri="{FF2B5EF4-FFF2-40B4-BE49-F238E27FC236}">
-                <a16:creationId xmlns:a16="http://schemas.microsoft.com/office/drawing/2014/main" id="{B79B7A60-5DEA-C19B-9A60-ECC6AA8E4D3B}"/>
+                <a16:creationId xmlns:a16="http://schemas.microsoft.com/office/drawing/2014/main" id="{0D49C54F-A0F0-2492-302C-740EC6706D62}"/>
               </a:ext>
             </a:extLst>
           </p:cNvPr>
@@ -4727,30 +5418,227 @@
           <a:lstStyle/>
           <a:p>
             <a:r>
-              <a:rPr lang="de-DE" noProof="0" dirty="0"/>
-              <a:t>Es war interessant mit Usern zu arbeiten</a:t>
+              <a:rPr lang="en-US" dirty="0"/>
+              <a:t>Am </a:t>
+            </a:r>
+            <a:r>
+              <a:rPr lang="en-US" dirty="0" err="1"/>
+              <a:t>besten</a:t>
+            </a:r>
+            <a:r>
+              <a:rPr lang="en-US" dirty="0"/>
+              <a:t> </a:t>
+            </a:r>
+            <a:r>
+              <a:rPr lang="en-US" dirty="0" err="1"/>
+              <a:t>wenn</a:t>
+            </a:r>
+            <a:r>
+              <a:rPr lang="en-US" dirty="0"/>
+              <a:t> man </a:t>
+            </a:r>
+            <a:r>
+              <a:rPr lang="en-US" dirty="0" err="1"/>
+              <a:t>mehrere</a:t>
+            </a:r>
+            <a:r>
+              <a:rPr lang="en-US" dirty="0"/>
+              <a:t> </a:t>
+            </a:r>
+            <a:r>
+              <a:rPr lang="en-US" dirty="0" err="1"/>
+              <a:t>Quellen</a:t>
+            </a:r>
+            <a:r>
+              <a:rPr lang="en-US" dirty="0"/>
+              <a:t> </a:t>
+            </a:r>
+            <a:r>
+              <a:rPr lang="en-US" dirty="0" err="1"/>
+              <a:t>kombiniert</a:t>
+            </a:r>
+            <a:endParaRPr lang="en-US" dirty="0"/>
+          </a:p>
+          <a:p>
+            <a:r>
+              <a:rPr lang="en-US" dirty="0"/>
+              <a:t>Gute </a:t>
+            </a:r>
+            <a:r>
+              <a:rPr lang="en-US" dirty="0" err="1"/>
+              <a:t>Suchmaschine</a:t>
+            </a:r>
+            <a:r>
+              <a:rPr lang="en-US" dirty="0"/>
+              <a:t> (</a:t>
+            </a:r>
+            <a:r>
+              <a:rPr lang="en-US" dirty="0" err="1"/>
+              <a:t>keiner</a:t>
+            </a:r>
+            <a:r>
+              <a:rPr lang="en-US" dirty="0"/>
+              <a:t> </a:t>
+            </a:r>
+            <a:r>
+              <a:rPr lang="en-US" dirty="0" err="1"/>
+              <a:t>benutuzt</a:t>
+            </a:r>
+            <a:r>
+              <a:rPr lang="en-US" dirty="0"/>
+              <a:t> gerne Confluence)</a:t>
+            </a:r>
+          </a:p>
+          <a:p>
+            <a:endParaRPr lang="en-US" dirty="0"/>
+          </a:p>
+          <a:p>
+            <a:r>
+              <a:rPr lang="en-US" dirty="0" err="1"/>
+              <a:t>Weiterer</a:t>
+            </a:r>
+            <a:r>
+              <a:rPr lang="en-US" dirty="0"/>
+              <a:t> </a:t>
+            </a:r>
+            <a:r>
+              <a:rPr lang="en-US" dirty="0" err="1"/>
+              <a:t>Usecase</a:t>
+            </a:r>
+            <a:r>
+              <a:rPr lang="en-US" dirty="0"/>
+              <a:t>: </a:t>
             </a:r>
           </a:p>
           <a:p>
             <a:pPr lvl="1"/>
             <a:r>
-              <a:rPr lang="de-DE" noProof="0" dirty="0"/>
-              <a:t>Schwierigkeiten finden</a:t>
-            </a:r>
+              <a:rPr lang="en-US" dirty="0"/>
+              <a:t>Johannes hat </a:t>
+            </a:r>
+            <a:r>
+              <a:rPr lang="en-US" dirty="0" err="1"/>
+              <a:t>vorgeschlagen</a:t>
+            </a:r>
+            <a:r>
+              <a:rPr lang="en-US" dirty="0"/>
+              <a:t>, </a:t>
+            </a:r>
+            <a:r>
+              <a:rPr lang="en-US" dirty="0" err="1"/>
+              <a:t>dass</a:t>
+            </a:r>
+            <a:r>
+              <a:rPr lang="en-US" dirty="0"/>
+              <a:t> der Bot </a:t>
+            </a:r>
+            <a:r>
+              <a:rPr lang="en-US" dirty="0" err="1"/>
+              <a:t>auch</a:t>
+            </a:r>
+            <a:r>
+              <a:rPr lang="en-US" dirty="0"/>
+              <a:t> </a:t>
+            </a:r>
+            <a:r>
+              <a:rPr lang="en-US" dirty="0" err="1"/>
+              <a:t>als</a:t>
+            </a:r>
+            <a:r>
+              <a:rPr lang="en-US" dirty="0"/>
+              <a:t> </a:t>
+            </a:r>
+            <a:r>
+              <a:rPr lang="en-US" dirty="0" err="1"/>
+              <a:t>Hilfe</a:t>
+            </a:r>
+            <a:r>
+              <a:rPr lang="en-US" dirty="0"/>
+              <a:t> </a:t>
+            </a:r>
+            <a:r>
+              <a:rPr lang="en-US" dirty="0" err="1"/>
+              <a:t>dienen</a:t>
+            </a:r>
+            <a:r>
+              <a:rPr lang="en-US" dirty="0"/>
+              <a:t> </a:t>
+            </a:r>
+            <a:r>
+              <a:rPr lang="en-US" dirty="0" err="1"/>
+              <a:t>kann</a:t>
+            </a:r>
+            <a:r>
+              <a:rPr lang="en-US" dirty="0"/>
+              <a:t> </a:t>
+            </a:r>
+            <a:r>
+              <a:rPr lang="en-US" dirty="0" err="1"/>
+              <a:t>neue</a:t>
+            </a:r>
+            <a:r>
+              <a:rPr lang="en-US" dirty="0"/>
+              <a:t> Confluence Seiten </a:t>
+            </a:r>
+            <a:r>
+              <a:rPr lang="en-US" dirty="0" err="1"/>
+              <a:t>zu</a:t>
+            </a:r>
+            <a:r>
+              <a:rPr lang="en-US" dirty="0"/>
+              <a:t> </a:t>
+            </a:r>
+            <a:r>
+              <a:rPr lang="en-US" dirty="0" err="1"/>
+              <a:t>bauen</a:t>
+            </a:r>
+            <a:endParaRPr lang="en-US" dirty="0"/>
           </a:p>
           <a:p>
             <a:pPr lvl="1"/>
             <a:r>
-              <a:rPr lang="de-DE" noProof="0" dirty="0"/>
-              <a:t>Zu ermitteln was sie wollen</a:t>
-            </a:r>
+              <a:rPr lang="en-US" dirty="0" err="1"/>
+              <a:t>Hilfe</a:t>
+            </a:r>
+            <a:r>
+              <a:rPr lang="en-US" dirty="0"/>
+              <a:t> </a:t>
+            </a:r>
+            <a:r>
+              <a:rPr lang="en-US" dirty="0" err="1"/>
+              <a:t>direkt</a:t>
+            </a:r>
+            <a:r>
+              <a:rPr lang="en-US" dirty="0"/>
+              <a:t> </a:t>
+            </a:r>
+            <a:r>
+              <a:rPr lang="en-US" dirty="0" err="1"/>
+              <a:t>beim</a:t>
+            </a:r>
+            <a:r>
+              <a:rPr lang="en-US" dirty="0"/>
+              <a:t> Support </a:t>
+            </a:r>
+            <a:r>
+              <a:rPr lang="en-US" dirty="0" err="1"/>
+              <a:t>oder</a:t>
+            </a:r>
+            <a:r>
+              <a:rPr lang="en-US" dirty="0"/>
+              <a:t> für Supporter</a:t>
+            </a:r>
+            <a:endParaRPr lang="en-DE" dirty="0"/>
+          </a:p>
+          <a:p>
+            <a:endParaRPr lang="en-DE" dirty="0"/>
           </a:p>
         </p:txBody>
       </p:sp>
     </p:spTree>
     <p:extLst>
       <p:ext uri="{BB962C8B-B14F-4D97-AF65-F5344CB8AC3E}">
-        <p14:creationId xmlns:p14="http://schemas.microsoft.com/office/powerpoint/2010/main" val="2947994304"/>
+        <p14:creationId xmlns:p14="http://schemas.microsoft.com/office/powerpoint/2010/main" val="188986821"/>
       </p:ext>
     </p:extLst>
   </p:cSld>
@@ -4782,7 +5670,7 @@
           <p:cNvPr id="2" name="Title 1">
             <a:extLst>
               <a:ext uri="{FF2B5EF4-FFF2-40B4-BE49-F238E27FC236}">
-                <a16:creationId xmlns:a16="http://schemas.microsoft.com/office/drawing/2014/main" id="{DE990F51-83E8-DE5D-ADC5-CFED3DACA8E6}"/>
+                <a16:creationId xmlns:a16="http://schemas.microsoft.com/office/drawing/2014/main" id="{D9357320-6786-8C23-B010-2B46A856BDEF}"/>
               </a:ext>
             </a:extLst>
           </p:cNvPr>
@@ -4799,10 +5687,9 @@
           <a:lstStyle/>
           <a:p>
             <a:r>
-              <a:rPr lang="en-US" dirty="0"/>
-              <a:t>Joule</a:t>
-            </a:r>
-            <a:endParaRPr lang="en-DE" dirty="0"/>
+              <a:rPr lang="de-DE" noProof="0" dirty="0"/>
+              <a:t>Meine Erfahrung</a:t>
+            </a:r>
           </a:p>
         </p:txBody>
       </p:sp>
@@ -4811,7 +5698,7 @@
           <p:cNvPr id="3" name="Content Placeholder 2">
             <a:extLst>
               <a:ext uri="{FF2B5EF4-FFF2-40B4-BE49-F238E27FC236}">
-                <a16:creationId xmlns:a16="http://schemas.microsoft.com/office/drawing/2014/main" id="{CB1FBDE6-E258-2332-C9DC-529E6DAD1A98}"/>
+                <a16:creationId xmlns:a16="http://schemas.microsoft.com/office/drawing/2014/main" id="{B79B7A60-5DEA-C19B-9A60-ECC6AA8E4D3B}"/>
               </a:ext>
             </a:extLst>
           </p:cNvPr>
@@ -4828,234 +5715,48 @@
           <a:lstStyle/>
           <a:p>
             <a:r>
-              <a:rPr lang="en-US" dirty="0"/>
-              <a:t>Wenn es </a:t>
-            </a:r>
-            <a:r>
-              <a:rPr lang="en-US" dirty="0" err="1"/>
-              <a:t>funktioniert</a:t>
-            </a:r>
-            <a:r>
-              <a:rPr lang="en-US" dirty="0"/>
-              <a:t> </a:t>
-            </a:r>
-            <a:r>
-              <a:rPr lang="en-US" dirty="0" err="1"/>
-              <a:t>macht</a:t>
-            </a:r>
-            <a:r>
-              <a:rPr lang="en-US" dirty="0"/>
-              <a:t> Joule die Aufgabe an </a:t>
-            </a:r>
-            <a:r>
-              <a:rPr lang="en-US" dirty="0" err="1"/>
-              <a:t>sich</a:t>
-            </a:r>
-            <a:r>
-              <a:rPr lang="en-US" dirty="0"/>
-              <a:t> gut (</a:t>
-            </a:r>
-            <a:r>
-              <a:rPr lang="en-US" dirty="0" err="1"/>
-              <a:t>wenn</a:t>
-            </a:r>
-            <a:r>
-              <a:rPr lang="en-US" dirty="0"/>
-              <a:t> man </a:t>
-            </a:r>
-            <a:r>
-              <a:rPr lang="en-US" dirty="0" err="1"/>
-              <a:t>im</a:t>
-            </a:r>
-            <a:r>
-              <a:rPr lang="en-US" dirty="0"/>
-              <a:t> Debug Modus auf sein reasoning </a:t>
-            </a:r>
-            <a:r>
-              <a:rPr lang="en-US" dirty="0" err="1"/>
-              <a:t>schaut</a:t>
-            </a:r>
-            <a:r>
-              <a:rPr lang="en-US" dirty="0"/>
-              <a:t>)</a:t>
-            </a:r>
-          </a:p>
-          <a:p>
-            <a:r>
-              <a:rPr lang="en-US" dirty="0" err="1"/>
-              <a:t>Troztdem</a:t>
-            </a:r>
-            <a:r>
-              <a:rPr lang="en-US" dirty="0"/>
-              <a:t> </a:t>
-            </a:r>
-            <a:r>
-              <a:rPr lang="en-US" dirty="0" err="1"/>
-              <a:t>stürzt</a:t>
-            </a:r>
-            <a:r>
-              <a:rPr lang="en-US" dirty="0"/>
-              <a:t> es oft ab (</a:t>
-            </a:r>
-            <a:r>
-              <a:rPr lang="en-US" dirty="0" err="1"/>
-              <a:t>evt</a:t>
-            </a:r>
-            <a:r>
-              <a:rPr lang="en-US" dirty="0"/>
-              <a:t>. </a:t>
-            </a:r>
-            <a:r>
-              <a:rPr lang="en-US" dirty="0" err="1"/>
-              <a:t>Verbesserung</a:t>
-            </a:r>
-            <a:r>
-              <a:rPr lang="en-US" dirty="0"/>
-              <a:t> wen SAP Bug fixt)</a:t>
-            </a:r>
-          </a:p>
-          <a:p>
-            <a:r>
-              <a:rPr lang="en-US" dirty="0"/>
-              <a:t>Viel Manuelle </a:t>
-            </a:r>
-            <a:r>
-              <a:rPr lang="en-US" dirty="0" err="1"/>
-              <a:t>Programmierung</a:t>
-            </a:r>
-            <a:r>
-              <a:rPr lang="en-US" dirty="0"/>
-              <a:t> </a:t>
-            </a:r>
-            <a:r>
-              <a:rPr lang="en-US" dirty="0" err="1"/>
-              <a:t>Notwenig</a:t>
-            </a:r>
-            <a:endParaRPr lang="en-US" dirty="0"/>
-          </a:p>
-          <a:p>
-            <a:r>
-              <a:rPr lang="en-US" b="1" dirty="0"/>
-              <a:t>!Man </a:t>
-            </a:r>
-            <a:r>
-              <a:rPr lang="en-US" b="1" dirty="0" err="1"/>
-              <a:t>schreibt</a:t>
-            </a:r>
-            <a:r>
-              <a:rPr lang="en-US" b="1" dirty="0"/>
-              <a:t> erst </a:t>
-            </a:r>
-            <a:r>
-              <a:rPr lang="en-US" b="1" dirty="0" err="1"/>
-              <a:t>mit</a:t>
-            </a:r>
-            <a:r>
-              <a:rPr lang="en-US" b="1" dirty="0"/>
-              <a:t> Joule und es </a:t>
-            </a:r>
-            <a:r>
-              <a:rPr lang="en-US" b="1" dirty="0" err="1"/>
-              <a:t>sucht</a:t>
-            </a:r>
-            <a:r>
-              <a:rPr lang="en-US" b="1" dirty="0"/>
-              <a:t> </a:t>
-            </a:r>
-            <a:r>
-              <a:rPr lang="en-US" b="1" dirty="0" err="1"/>
-              <a:t>dann</a:t>
-            </a:r>
-            <a:r>
-              <a:rPr lang="en-US" b="1" dirty="0"/>
-              <a:t> </a:t>
-            </a:r>
-            <a:r>
-              <a:rPr lang="en-US" b="1" dirty="0" err="1"/>
-              <a:t>passende</a:t>
-            </a:r>
-            <a:r>
-              <a:rPr lang="en-US" b="1" dirty="0"/>
-              <a:t> </a:t>
-            </a:r>
-            <a:r>
-              <a:rPr lang="en-US" b="1" dirty="0" err="1"/>
-              <a:t>Agenten</a:t>
-            </a:r>
-            <a:r>
-              <a:rPr lang="en-US" b="1" dirty="0"/>
-              <a:t> </a:t>
-            </a:r>
-            <a:r>
-              <a:rPr lang="en-US" b="1" dirty="0" err="1"/>
-              <a:t>heraus</a:t>
-            </a:r>
-            <a:r>
-              <a:rPr lang="en-US" b="1" dirty="0"/>
-              <a:t> -&gt; Joule </a:t>
-            </a:r>
-            <a:r>
-              <a:rPr lang="en-US" b="1" dirty="0" err="1"/>
-              <a:t>selbst</a:t>
-            </a:r>
-            <a:r>
-              <a:rPr lang="en-US" b="1" dirty="0"/>
-              <a:t> nicht </a:t>
-            </a:r>
-            <a:r>
-              <a:rPr lang="en-US" b="1" dirty="0" err="1"/>
-              <a:t>konfigurierbar</a:t>
-            </a:r>
-            <a:r>
-              <a:rPr lang="en-US" b="1" dirty="0"/>
-              <a:t>!</a:t>
-            </a:r>
-          </a:p>
-          <a:p>
-            <a:r>
-              <a:rPr lang="en-US" dirty="0"/>
-              <a:t>Sehr </a:t>
-            </a:r>
-            <a:r>
-              <a:rPr lang="en-US" dirty="0" err="1"/>
-              <a:t>kompliziert</a:t>
-            </a:r>
-            <a:r>
-              <a:rPr lang="en-US" dirty="0"/>
-              <a:t> in Joule </a:t>
-            </a:r>
-            <a:r>
-              <a:rPr lang="en-US" dirty="0" err="1"/>
-              <a:t>Dokumente</a:t>
-            </a:r>
-            <a:r>
-              <a:rPr lang="en-US" dirty="0"/>
-              <a:t> </a:t>
-            </a:r>
-            <a:r>
-              <a:rPr lang="en-US" dirty="0" err="1"/>
-              <a:t>einzubinden</a:t>
-            </a:r>
-            <a:r>
-              <a:rPr lang="en-US" dirty="0"/>
-              <a:t> (</a:t>
-            </a:r>
-            <a:r>
-              <a:rPr lang="en-US" dirty="0" err="1"/>
-              <a:t>noch</a:t>
-            </a:r>
-            <a:r>
-              <a:rPr lang="en-US" dirty="0"/>
-              <a:t>?)</a:t>
-            </a:r>
-            <a:endParaRPr lang="en-DE" dirty="0"/>
+              <a:rPr lang="de-DE" noProof="0" dirty="0"/>
+              <a:t>Es war interessant mit Usern zu arbeiten</a:t>
+            </a:r>
+          </a:p>
+          <a:p>
+            <a:pPr lvl="1"/>
+            <a:r>
+              <a:rPr lang="de-DE" noProof="0" dirty="0"/>
+              <a:t>Schwierigkeiten finden</a:t>
+            </a:r>
+          </a:p>
+          <a:p>
+            <a:pPr lvl="1"/>
+            <a:r>
+              <a:rPr lang="de-DE" noProof="0" dirty="0"/>
+              <a:t>Zu ermitteln was sie wollen</a:t>
+            </a:r>
+          </a:p>
+          <a:p>
+            <a:pPr lvl="1"/>
+            <a:endParaRPr lang="de-DE" dirty="0"/>
+          </a:p>
+          <a:p>
+            <a:r>
+              <a:rPr lang="de-DE" noProof="0" dirty="0"/>
+              <a:t>Bot ist Sinnvoll aber nur unterstützung</a:t>
+            </a:r>
+          </a:p>
+          <a:p>
+            <a:pPr lvl="1"/>
+            <a:r>
+              <a:rPr lang="de-DE" dirty="0"/>
+              <a:t>Keine Halluzinationen und eine 100% Korrektheit wird man nicht erreichen (mit ready Tools wie Copilot / Joule)</a:t>
+            </a:r>
+            <a:endParaRPr lang="de-DE" noProof="0" dirty="0"/>
           </a:p>
         </p:txBody>
       </p:sp>
     </p:spTree>
     <p:extLst>
       <p:ext uri="{BB962C8B-B14F-4D97-AF65-F5344CB8AC3E}">
-        <p14:creationId xmlns:p14="http://schemas.microsoft.com/office/powerpoint/2010/main" val="3206477293"/>
+        <p14:creationId xmlns:p14="http://schemas.microsoft.com/office/powerpoint/2010/main" val="2947994304"/>
       </p:ext>
     </p:extLst>
   </p:cSld>
@@ -5087,7 +5788,7 @@
           <p:cNvPr id="2" name="Title 1">
             <a:extLst>
               <a:ext uri="{FF2B5EF4-FFF2-40B4-BE49-F238E27FC236}">
-                <a16:creationId xmlns:a16="http://schemas.microsoft.com/office/drawing/2014/main" id="{FFF5BB23-38DA-94E8-76D5-29462C579D26}"/>
+                <a16:creationId xmlns:a16="http://schemas.microsoft.com/office/drawing/2014/main" id="{DE990F51-83E8-DE5D-ADC5-CFED3DACA8E6}"/>
               </a:ext>
             </a:extLst>
           </p:cNvPr>
@@ -5105,7 +5806,7 @@
           <a:p>
             <a:r>
               <a:rPr lang="en-US" dirty="0"/>
-              <a:t>Copilot</a:t>
+              <a:t>Joule</a:t>
             </a:r>
             <a:endParaRPr lang="en-DE" dirty="0"/>
           </a:p>
@@ -5116,7 +5817,7 @@
           <p:cNvPr id="3" name="Content Placeholder 2">
             <a:extLst>
               <a:ext uri="{FF2B5EF4-FFF2-40B4-BE49-F238E27FC236}">
-                <a16:creationId xmlns:a16="http://schemas.microsoft.com/office/drawing/2014/main" id="{00F9531C-3E54-F313-1A6E-6C4D007B3406}"/>
+                <a16:creationId xmlns:a16="http://schemas.microsoft.com/office/drawing/2014/main" id="{CB1FBDE6-E258-2332-C9DC-529E6DAD1A98}"/>
               </a:ext>
             </a:extLst>
           </p:cNvPr>
@@ -5133,12 +5834,201 @@
           <a:lstStyle/>
           <a:p>
             <a:r>
-              <a:rPr lang="en-US" dirty="0" err="1"/>
-              <a:t>Zugriff</a:t>
-            </a:r>
-            <a:r>
-              <a:rPr lang="en-US" dirty="0"/>
-              <a:t> auf </a:t>
+              <a:rPr lang="en-US" dirty="0"/>
+              <a:t>Wenn es </a:t>
+            </a:r>
+            <a:r>
+              <a:rPr lang="en-US" dirty="0" err="1"/>
+              <a:t>funktioniert</a:t>
+            </a:r>
+            <a:r>
+              <a:rPr lang="en-US" dirty="0"/>
+              <a:t> </a:t>
+            </a:r>
+            <a:r>
+              <a:rPr lang="en-US" dirty="0" err="1"/>
+              <a:t>macht</a:t>
+            </a:r>
+            <a:r>
+              <a:rPr lang="en-US" dirty="0"/>
+              <a:t> Joule die Aufgabe an </a:t>
+            </a:r>
+            <a:r>
+              <a:rPr lang="en-US" dirty="0" err="1"/>
+              <a:t>sich</a:t>
+            </a:r>
+            <a:r>
+              <a:rPr lang="en-US" dirty="0"/>
+              <a:t> gut (</a:t>
+            </a:r>
+            <a:r>
+              <a:rPr lang="en-US" dirty="0" err="1"/>
+              <a:t>wenn</a:t>
+            </a:r>
+            <a:r>
+              <a:rPr lang="en-US" dirty="0"/>
+              <a:t> man </a:t>
+            </a:r>
+            <a:r>
+              <a:rPr lang="en-US" dirty="0" err="1"/>
+              <a:t>im</a:t>
+            </a:r>
+            <a:r>
+              <a:rPr lang="en-US" dirty="0"/>
+              <a:t> Debug Modus auf sein reasoning </a:t>
+            </a:r>
+            <a:r>
+              <a:rPr lang="en-US" dirty="0" err="1"/>
+              <a:t>schaut</a:t>
+            </a:r>
+            <a:r>
+              <a:rPr lang="en-US" dirty="0"/>
+              <a:t>)</a:t>
+            </a:r>
+          </a:p>
+          <a:p>
+            <a:r>
+              <a:rPr lang="en-US" dirty="0" err="1"/>
+              <a:t>Troztdem</a:t>
+            </a:r>
+            <a:r>
+              <a:rPr lang="en-US" dirty="0"/>
+              <a:t> </a:t>
+            </a:r>
+            <a:r>
+              <a:rPr lang="en-US" dirty="0" err="1"/>
+              <a:t>stürzt</a:t>
+            </a:r>
+            <a:r>
+              <a:rPr lang="en-US" dirty="0"/>
+              <a:t> es oft ab (</a:t>
+            </a:r>
+            <a:r>
+              <a:rPr lang="en-US" dirty="0" err="1"/>
+              <a:t>evt</a:t>
+            </a:r>
+            <a:r>
+              <a:rPr lang="en-US" dirty="0"/>
+              <a:t>. </a:t>
+            </a:r>
+            <a:r>
+              <a:rPr lang="en-US" dirty="0" err="1"/>
+              <a:t>Verbesserung</a:t>
+            </a:r>
+            <a:r>
+              <a:rPr lang="en-US" dirty="0"/>
+              <a:t> wen SAP Bug fixt)</a:t>
+            </a:r>
+          </a:p>
+          <a:p>
+            <a:r>
+              <a:rPr lang="en-US" dirty="0"/>
+              <a:t>Viel Manuelle </a:t>
+            </a:r>
+            <a:r>
+              <a:rPr lang="en-US" dirty="0" err="1"/>
+              <a:t>Programmierung</a:t>
+            </a:r>
+            <a:r>
+              <a:rPr lang="en-US" dirty="0"/>
+              <a:t> </a:t>
+            </a:r>
+            <a:r>
+              <a:rPr lang="en-US" dirty="0" err="1"/>
+              <a:t>Notwenig</a:t>
+            </a:r>
+            <a:endParaRPr lang="en-US" dirty="0"/>
+          </a:p>
+          <a:p>
+            <a:r>
+              <a:rPr lang="en-US" b="1" dirty="0"/>
+              <a:t>!Man </a:t>
+            </a:r>
+            <a:r>
+              <a:rPr lang="en-US" b="1" dirty="0" err="1"/>
+              <a:t>schreibt</a:t>
+            </a:r>
+            <a:r>
+              <a:rPr lang="en-US" b="1" dirty="0"/>
+              <a:t> erst </a:t>
+            </a:r>
+            <a:r>
+              <a:rPr lang="en-US" b="1" dirty="0" err="1"/>
+              <a:t>mit</a:t>
+            </a:r>
+            <a:r>
+              <a:rPr lang="en-US" b="1" dirty="0"/>
+              <a:t> Joule und es </a:t>
+            </a:r>
+            <a:r>
+              <a:rPr lang="en-US" b="1" dirty="0" err="1"/>
+              <a:t>sucht</a:t>
+            </a:r>
+            <a:r>
+              <a:rPr lang="en-US" b="1" dirty="0"/>
+              <a:t> </a:t>
+            </a:r>
+            <a:r>
+              <a:rPr lang="en-US" b="1" dirty="0" err="1"/>
+              <a:t>dann</a:t>
+            </a:r>
+            <a:r>
+              <a:rPr lang="en-US" b="1" dirty="0"/>
+              <a:t> </a:t>
+            </a:r>
+            <a:r>
+              <a:rPr lang="en-US" b="1" dirty="0" err="1"/>
+              <a:t>passende</a:t>
+            </a:r>
+            <a:r>
+              <a:rPr lang="en-US" b="1" dirty="0"/>
+              <a:t> </a:t>
+            </a:r>
+            <a:r>
+              <a:rPr lang="en-US" b="1" dirty="0" err="1"/>
+              <a:t>Agenten</a:t>
+            </a:r>
+            <a:r>
+              <a:rPr lang="en-US" b="1" dirty="0"/>
+              <a:t> </a:t>
+            </a:r>
+            <a:r>
+              <a:rPr lang="en-US" b="1" dirty="0" err="1"/>
+              <a:t>heraus</a:t>
+            </a:r>
+            <a:r>
+              <a:rPr lang="en-US" b="1" dirty="0"/>
+              <a:t> -&gt; Joule </a:t>
+            </a:r>
+            <a:r>
+              <a:rPr lang="en-US" b="1" dirty="0" err="1"/>
+              <a:t>selbst</a:t>
+            </a:r>
+            <a:r>
+              <a:rPr lang="en-US" b="1" dirty="0"/>
+              <a:t> nicht </a:t>
+            </a:r>
+            <a:r>
+              <a:rPr lang="en-US" b="1" dirty="0" err="1"/>
+              <a:t>konfigurierbar</a:t>
+            </a:r>
+            <a:r>
+              <a:rPr lang="en-US" b="1" dirty="0"/>
+              <a:t>!</a:t>
+            </a:r>
+          </a:p>
+          <a:p>
+            <a:r>
+              <a:rPr lang="en-US" dirty="0"/>
+              <a:t>Sehr </a:t>
+            </a:r>
+            <a:r>
+              <a:rPr lang="en-US" dirty="0" err="1"/>
+              <a:t>kompliziert</a:t>
+            </a:r>
+            <a:r>
+              <a:rPr lang="en-US" dirty="0"/>
+              <a:t> in Joule </a:t>
             </a:r>
             <a:r>
               <a:rPr lang="en-US" dirty="0" err="1"/>
@@ -5150,190 +6040,34 @@
             </a:r>
             <a:r>
               <a:rPr lang="en-US" dirty="0" err="1"/>
-              <a:t>klappt</a:t>
-            </a:r>
-            <a:r>
-              <a:rPr lang="en-US" dirty="0"/>
-              <a:t> bis </a:t>
-            </a:r>
-            <a:r>
-              <a:rPr lang="en-US" dirty="0" err="1"/>
-              <a:t>jetzt</a:t>
-            </a:r>
-            <a:r>
-              <a:rPr lang="en-US" dirty="0"/>
-              <a:t> in “Ordnung”</a:t>
-            </a:r>
-          </a:p>
-          <a:p>
-            <a:pPr lvl="1"/>
-            <a:r>
-              <a:rPr lang="en-US" dirty="0"/>
-              <a:t>Zum Teil </a:t>
-            </a:r>
-            <a:r>
-              <a:rPr lang="en-US" dirty="0" err="1"/>
-              <a:t>sagt</a:t>
-            </a:r>
-            <a:r>
-              <a:rPr lang="en-US" dirty="0"/>
-              <a:t> es er </a:t>
-            </a:r>
-            <a:r>
-              <a:rPr lang="en-US" dirty="0" err="1"/>
-              <a:t>findet</a:t>
-            </a:r>
-            <a:r>
-              <a:rPr lang="en-US" dirty="0"/>
-              <a:t> Dinge nicht (BO´s </a:t>
-            </a:r>
-            <a:r>
-              <a:rPr lang="en-US" dirty="0" err="1"/>
-              <a:t>zu</a:t>
-            </a:r>
-            <a:r>
-              <a:rPr lang="en-US" dirty="0"/>
-              <a:t> </a:t>
-            </a:r>
-            <a:r>
-              <a:rPr lang="en-US" dirty="0" err="1"/>
-              <a:t>Tabellen</a:t>
-            </a:r>
-            <a:r>
-              <a:rPr lang="en-US" dirty="0"/>
-              <a:t>) </a:t>
-            </a:r>
-            <a:r>
-              <a:rPr lang="en-US" dirty="0" err="1"/>
-              <a:t>obwohl</a:t>
-            </a:r>
-            <a:r>
-              <a:rPr lang="en-US" dirty="0"/>
-              <a:t> </a:t>
-            </a:r>
-            <a:r>
-              <a:rPr lang="en-US" dirty="0" err="1"/>
-              <a:t>sie</a:t>
-            </a:r>
-            <a:r>
-              <a:rPr lang="en-US" dirty="0"/>
-              <a:t> da </a:t>
-            </a:r>
-            <a:r>
-              <a:rPr lang="en-US" dirty="0" err="1"/>
-              <a:t>sind</a:t>
-            </a:r>
-            <a:endParaRPr lang="en-US" dirty="0"/>
-          </a:p>
-          <a:p>
-            <a:pPr lvl="1"/>
-            <a:r>
-              <a:rPr lang="en-US" dirty="0"/>
-              <a:t>Bei </a:t>
-            </a:r>
-            <a:r>
-              <a:rPr lang="en-US" dirty="0" err="1"/>
-              <a:t>sehr</a:t>
-            </a:r>
-            <a:r>
-              <a:rPr lang="en-US" dirty="0"/>
-              <a:t> </a:t>
-            </a:r>
-            <a:r>
-              <a:rPr lang="en-US" dirty="0" err="1"/>
-              <a:t>komplexen</a:t>
-            </a:r>
-            <a:r>
-              <a:rPr lang="en-US" dirty="0"/>
-              <a:t> </a:t>
-            </a:r>
-            <a:r>
-              <a:rPr lang="en-US" dirty="0" err="1"/>
-              <a:t>Fragen</a:t>
-            </a:r>
-            <a:r>
-              <a:rPr lang="en-US" dirty="0"/>
-              <a:t> </a:t>
-            </a:r>
-            <a:r>
-              <a:rPr lang="en-US" dirty="0" err="1"/>
-              <a:t>halluziniert</a:t>
-            </a:r>
-            <a:r>
-              <a:rPr lang="en-US" dirty="0"/>
-              <a:t> er, was die </a:t>
-            </a:r>
-            <a:r>
-              <a:rPr lang="en-US" dirty="0" err="1"/>
-              <a:t>Funktionen</a:t>
-            </a:r>
-            <a:r>
-              <a:rPr lang="en-US" dirty="0"/>
-              <a:t> </a:t>
-            </a:r>
-            <a:r>
-              <a:rPr lang="en-US" dirty="0" err="1"/>
-              <a:t>im</a:t>
-            </a:r>
-            <a:r>
-              <a:rPr lang="en-US" dirty="0"/>
-              <a:t> Doku Bot </a:t>
-            </a:r>
-            <a:r>
-              <a:rPr lang="en-US" dirty="0" err="1"/>
-              <a:t>angeht</a:t>
-            </a:r>
-            <a:endParaRPr lang="en-US" dirty="0"/>
-          </a:p>
-          <a:p>
-            <a:r>
-              <a:rPr lang="en-US" dirty="0"/>
-              <a:t>Ich </a:t>
-            </a:r>
-            <a:r>
-              <a:rPr lang="en-US" dirty="0" err="1"/>
-              <a:t>weiß</a:t>
-            </a:r>
-            <a:r>
-              <a:rPr lang="en-US" dirty="0"/>
-              <a:t> nicht </a:t>
-            </a:r>
-            <a:r>
-              <a:rPr lang="en-US" dirty="0" err="1"/>
-              <a:t>wie</a:t>
-            </a:r>
-            <a:r>
-              <a:rPr lang="en-US" dirty="0"/>
-              <a:t> man den </a:t>
-            </a:r>
-            <a:r>
-              <a:rPr lang="en-US" dirty="0" err="1"/>
-              <a:t>zugriff</a:t>
-            </a:r>
-            <a:r>
-              <a:rPr lang="en-US" dirty="0"/>
-              <a:t> auf das </a:t>
-            </a:r>
-            <a:r>
-              <a:rPr lang="en-US" dirty="0" err="1"/>
-              <a:t>oData</a:t>
-            </a:r>
-            <a:r>
-              <a:rPr lang="en-US" dirty="0"/>
-              <a:t> in Copilot </a:t>
-            </a:r>
-            <a:r>
-              <a:rPr lang="en-US" dirty="0" err="1"/>
-              <a:t>einrichtet</a:t>
-            </a:r>
-            <a:endParaRPr lang="en-US" dirty="0"/>
+              <a:t>einzubinden</a:t>
+            </a:r>
+            <a:r>
+              <a:rPr lang="en-US" dirty="0"/>
+              <a:t> (</a:t>
+            </a:r>
+            <a:r>
+              <a:rPr lang="en-US" dirty="0" err="1"/>
+              <a:t>noch</a:t>
+            </a:r>
+            <a:r>
+              <a:rPr lang="en-US" dirty="0"/>
+              <a:t>?)</a:t>
+            </a:r>
+          </a:p>
+          <a:p>
+            <a:r>
+              <a:rPr lang="en-US" dirty="0"/>
+              <a:t>Langsam</a:t>
+            </a:r>
+            <a:endParaRPr lang="en-DE" dirty="0"/>
           </a:p>
         </p:txBody>
       </p:sp>
     </p:spTree>
     <p:extLst>
       <p:ext uri="{BB962C8B-B14F-4D97-AF65-F5344CB8AC3E}">
-        <p14:creationId xmlns:p14="http://schemas.microsoft.com/office/powerpoint/2010/main" val="374838372"/>
+        <p14:creationId xmlns:p14="http://schemas.microsoft.com/office/powerpoint/2010/main" val="3206477293"/>
       </p:ext>
     </p:extLst>
   </p:cSld>
@@ -5365,7 +6099,7 @@
           <p:cNvPr id="2" name="Title 1">
             <a:extLst>
               <a:ext uri="{FF2B5EF4-FFF2-40B4-BE49-F238E27FC236}">
-                <a16:creationId xmlns:a16="http://schemas.microsoft.com/office/drawing/2014/main" id="{0A600FA2-9A03-B57A-7C25-BCE3E0633F36}"/>
+                <a16:creationId xmlns:a16="http://schemas.microsoft.com/office/drawing/2014/main" id="{FFF5BB23-38DA-94E8-76D5-29462C579D26}"/>
               </a:ext>
             </a:extLst>
           </p:cNvPr>
@@ -5383,19 +6117,7 @@
           <a:p>
             <a:r>
               <a:rPr lang="en-US" dirty="0"/>
-              <a:t>Chatbot </a:t>
-            </a:r>
-            <a:r>
-              <a:rPr lang="en-US" dirty="0" err="1"/>
-              <a:t>Hürden</a:t>
-            </a:r>
-            <a:r>
-              <a:rPr lang="en-US" dirty="0"/>
-              <a:t> </a:t>
-            </a:r>
-            <a:r>
-              <a:rPr lang="en-US" dirty="0" err="1"/>
-              <a:t>allgemein</a:t>
+              <a:t>Copilot</a:t>
             </a:r>
             <a:endParaRPr lang="en-DE" dirty="0"/>
           </a:p>
@@ -5406,7 +6128,7 @@
           <p:cNvPr id="3" name="Content Placeholder 2">
             <a:extLst>
               <a:ext uri="{FF2B5EF4-FFF2-40B4-BE49-F238E27FC236}">
-                <a16:creationId xmlns:a16="http://schemas.microsoft.com/office/drawing/2014/main" id="{B999B94F-F759-6D2C-464F-1A45A0195CEB}"/>
+                <a16:creationId xmlns:a16="http://schemas.microsoft.com/office/drawing/2014/main" id="{00F9531C-3E54-F313-1A6E-6C4D007B3406}"/>
               </a:ext>
             </a:extLst>
           </p:cNvPr>
@@ -5419,415 +6141,211 @@
         </p:nvSpPr>
         <p:spPr/>
         <p:txBody>
-          <a:bodyPr>
-            <a:normAutofit/>
-          </a:bodyPr>
-          <a:lstStyle/>
-          <a:p>
-            <a:r>
-              <a:rPr lang="en-US" dirty="0"/>
-              <a:t>Wie </a:t>
-            </a:r>
-            <a:r>
-              <a:rPr lang="en-US" dirty="0" err="1"/>
-              <a:t>kombinieren</a:t>
-            </a:r>
-            <a:r>
-              <a:rPr lang="en-US" dirty="0"/>
-              <a:t> </a:t>
-            </a:r>
-            <a:r>
-              <a:rPr lang="en-US" dirty="0" err="1"/>
-              <a:t>wir</a:t>
-            </a:r>
-            <a:r>
-              <a:rPr lang="en-US" dirty="0"/>
-              <a:t> die </a:t>
-            </a:r>
-            <a:r>
-              <a:rPr lang="en-US" dirty="0" err="1"/>
-              <a:t>zwei</a:t>
-            </a:r>
-            <a:r>
-              <a:rPr lang="en-US" dirty="0"/>
-              <a:t> Bots?</a:t>
-            </a:r>
-          </a:p>
-          <a:p>
-            <a:r>
-              <a:rPr lang="en-US" dirty="0"/>
-              <a:t>Wenn </a:t>
-            </a:r>
-            <a:r>
-              <a:rPr lang="en-US" dirty="0" err="1"/>
-              <a:t>wir</a:t>
-            </a:r>
-            <a:r>
-              <a:rPr lang="en-US" dirty="0"/>
-              <a:t> </a:t>
-            </a:r>
-            <a:r>
-              <a:rPr lang="en-US" dirty="0" err="1"/>
-              <a:t>mehr</a:t>
-            </a:r>
-            <a:r>
-              <a:rPr lang="en-US" dirty="0"/>
-              <a:t> Apps </a:t>
-            </a:r>
-            <a:r>
-              <a:rPr lang="en-US" dirty="0" err="1"/>
-              <a:t>einfügen</a:t>
-            </a:r>
-            <a:r>
-              <a:rPr lang="en-US" dirty="0"/>
-              <a:t>, </a:t>
-            </a:r>
-            <a:r>
-              <a:rPr lang="en-US" dirty="0" err="1"/>
-              <a:t>wird</a:t>
-            </a:r>
-            <a:r>
-              <a:rPr lang="en-US" dirty="0"/>
-              <a:t> der Chatbot </a:t>
-            </a:r>
-            <a:r>
-              <a:rPr lang="en-US" dirty="0" err="1"/>
-              <a:t>dann</a:t>
-            </a:r>
-            <a:r>
-              <a:rPr lang="en-US" dirty="0"/>
-              <a:t> </a:t>
-            </a:r>
-            <a:r>
-              <a:rPr lang="en-US" dirty="0" err="1"/>
-              <a:t>verwirrt</a:t>
-            </a:r>
-            <a:r>
-              <a:rPr lang="en-US" dirty="0"/>
-              <a:t>?</a:t>
+          <a:bodyPr/>
+          <a:lstStyle/>
+          <a:p>
+            <a:r>
+              <a:rPr lang="en-US" dirty="0" err="1"/>
+              <a:t>Zugriff</a:t>
+            </a:r>
+            <a:r>
+              <a:rPr lang="en-US" dirty="0"/>
+              <a:t> auf </a:t>
+            </a:r>
+            <a:r>
+              <a:rPr lang="en-US" dirty="0" err="1"/>
+              <a:t>Dokumente</a:t>
+            </a:r>
+            <a:r>
+              <a:rPr lang="en-US" dirty="0"/>
+              <a:t> </a:t>
+            </a:r>
+            <a:r>
+              <a:rPr lang="en-US" dirty="0" err="1"/>
+              <a:t>klappt</a:t>
+            </a:r>
+            <a:r>
+              <a:rPr lang="en-US" dirty="0"/>
+              <a:t> </a:t>
+            </a:r>
+            <a:r>
+              <a:rPr lang="en-US" dirty="0" err="1"/>
+              <a:t>ganz</a:t>
+            </a:r>
+            <a:r>
+              <a:rPr lang="en-US" dirty="0"/>
+              <a:t> gut</a:t>
             </a:r>
           </a:p>
           <a:p>
             <a:pPr lvl="1"/>
             <a:r>
-              <a:rPr lang="en-US" dirty="0">
-                <a:sym typeface="Wingdings" panose="05000000000000000000" pitchFamily="2" charset="2"/>
-              </a:rPr>
-              <a:t> </a:t>
-            </a:r>
-            <a:r>
-              <a:rPr lang="en-US" dirty="0" err="1">
-                <a:sym typeface="Wingdings" panose="05000000000000000000" pitchFamily="2" charset="2"/>
-              </a:rPr>
+              <a:rPr lang="en-US" dirty="0"/>
+              <a:t>Zum Teil </a:t>
+            </a:r>
+            <a:r>
+              <a:rPr lang="en-US" dirty="0" err="1"/>
+              <a:t>sagt</a:t>
+            </a:r>
+            <a:r>
+              <a:rPr lang="en-US" dirty="0"/>
+              <a:t> es er </a:t>
+            </a:r>
+            <a:r>
+              <a:rPr lang="en-US" dirty="0" err="1"/>
+              <a:t>findet</a:t>
+            </a:r>
+            <a:r>
+              <a:rPr lang="en-US" dirty="0"/>
+              <a:t> Dinge nicht (BO´s </a:t>
+            </a:r>
+            <a:r>
+              <a:rPr lang="en-US" dirty="0" err="1"/>
+              <a:t>zu</a:t>
+            </a:r>
+            <a:r>
+              <a:rPr lang="en-US" dirty="0"/>
+              <a:t> </a:t>
+            </a:r>
+            <a:r>
+              <a:rPr lang="en-US" dirty="0" err="1"/>
+              <a:t>Tabellen</a:t>
+            </a:r>
+            <a:r>
+              <a:rPr lang="en-US" dirty="0"/>
+              <a:t>) </a:t>
+            </a:r>
+            <a:r>
+              <a:rPr lang="en-US" dirty="0" err="1"/>
+              <a:t>obwohl</a:t>
+            </a:r>
+            <a:r>
+              <a:rPr lang="en-US" dirty="0"/>
+              <a:t> </a:t>
+            </a:r>
+            <a:r>
+              <a:rPr lang="en-US" dirty="0" err="1"/>
+              <a:t>sie</a:t>
+            </a:r>
+            <a:r>
+              <a:rPr lang="en-US" dirty="0"/>
+              <a:t> da </a:t>
+            </a:r>
+            <a:r>
+              <a:rPr lang="en-US" dirty="0" err="1"/>
+              <a:t>sind</a:t>
+            </a:r>
+            <a:endParaRPr lang="en-US" dirty="0"/>
+          </a:p>
+          <a:p>
+            <a:pPr lvl="1"/>
+            <a:r>
+              <a:rPr lang="en-US" dirty="0"/>
+              <a:t>Bei </a:t>
+            </a:r>
+            <a:r>
+              <a:rPr lang="en-US" dirty="0" err="1"/>
+              <a:t>sehr</a:t>
+            </a:r>
+            <a:r>
+              <a:rPr lang="en-US" dirty="0"/>
+              <a:t> </a:t>
+            </a:r>
+            <a:r>
+              <a:rPr lang="en-US" dirty="0" err="1"/>
+              <a:t>komplexen</a:t>
+            </a:r>
+            <a:r>
+              <a:rPr lang="en-US" dirty="0"/>
+              <a:t> </a:t>
+            </a:r>
+            <a:r>
+              <a:rPr lang="en-US" dirty="0" err="1"/>
+              <a:t>Fragen</a:t>
+            </a:r>
+            <a:r>
+              <a:rPr lang="en-US" dirty="0"/>
+              <a:t> </a:t>
+            </a:r>
+            <a:r>
+              <a:rPr lang="en-US" dirty="0" err="1"/>
+              <a:t>halluziniert</a:t>
+            </a:r>
+            <a:r>
+              <a:rPr lang="en-US" dirty="0"/>
+              <a:t> er, was die </a:t>
+            </a:r>
+            <a:r>
+              <a:rPr lang="en-US" dirty="0" err="1"/>
+              <a:t>Funktionen</a:t>
+            </a:r>
+            <a:r>
+              <a:rPr lang="en-US" dirty="0"/>
+              <a:t> </a:t>
+            </a:r>
+            <a:r>
+              <a:rPr lang="en-US" dirty="0" err="1"/>
+              <a:t>im</a:t>
+            </a:r>
+            <a:r>
+              <a:rPr lang="en-US" dirty="0"/>
+              <a:t> Doku Bot </a:t>
+            </a:r>
+            <a:r>
+              <a:rPr lang="en-US" dirty="0" err="1"/>
+              <a:t>angeht</a:t>
+            </a:r>
+            <a:endParaRPr lang="en-US" dirty="0"/>
+          </a:p>
+          <a:p>
+            <a:r>
+              <a:rPr lang="en-US" dirty="0"/>
+              <a:t>Ich </a:t>
+            </a:r>
+            <a:r>
+              <a:rPr lang="en-US" dirty="0" err="1"/>
+              <a:t>weiß</a:t>
+            </a:r>
+            <a:r>
+              <a:rPr lang="en-US" dirty="0"/>
+              <a:t> nicht </a:t>
+            </a:r>
+            <a:r>
+              <a:rPr lang="en-US" dirty="0" err="1"/>
+              <a:t>wie</a:t>
+            </a:r>
+            <a:r>
+              <a:rPr lang="en-US" dirty="0"/>
+              <a:t> man den </a:t>
+            </a:r>
+            <a:r>
+              <a:rPr lang="en-US" dirty="0" err="1"/>
+              <a:t>zugriff</a:t>
+            </a:r>
+            <a:r>
+              <a:rPr lang="en-US" dirty="0"/>
+              <a:t> auf das </a:t>
+            </a:r>
+            <a:r>
+              <a:rPr lang="en-US" dirty="0" err="1"/>
               <a:t>oData</a:t>
             </a:r>
             <a:r>
-              <a:rPr lang="en-US" dirty="0">
-                <a:sym typeface="Wingdings" panose="05000000000000000000" pitchFamily="2" charset="2"/>
-              </a:rPr>
-              <a:t> </a:t>
-            </a:r>
-            <a:r>
-              <a:rPr lang="en-US" dirty="0" err="1">
-                <a:sym typeface="Wingdings" panose="05000000000000000000" pitchFamily="2" charset="2"/>
-              </a:rPr>
-              <a:t>Schnitstelle</a:t>
-            </a:r>
-            <a:r>
-              <a:rPr lang="en-US" dirty="0">
-                <a:sym typeface="Wingdings" panose="05000000000000000000" pitchFamily="2" charset="2"/>
-              </a:rPr>
-              <a:t> nicht </a:t>
-            </a:r>
-            <a:r>
-              <a:rPr lang="en-US" dirty="0" err="1">
-                <a:sym typeface="Wingdings" panose="05000000000000000000" pitchFamily="2" charset="2"/>
-              </a:rPr>
-              <a:t>nach</a:t>
-            </a:r>
-            <a:r>
-              <a:rPr lang="en-US" dirty="0">
-                <a:sym typeface="Wingdings" panose="05000000000000000000" pitchFamily="2" charset="2"/>
-              </a:rPr>
-              <a:t> Apps </a:t>
-            </a:r>
-            <a:r>
-              <a:rPr lang="en-US" dirty="0" err="1">
-                <a:sym typeface="Wingdings" panose="05000000000000000000" pitchFamily="2" charset="2"/>
-              </a:rPr>
-              <a:t>sortieren</a:t>
-            </a:r>
-            <a:r>
-              <a:rPr lang="en-US" dirty="0">
-                <a:sym typeface="Wingdings" panose="05000000000000000000" pitchFamily="2" charset="2"/>
-              </a:rPr>
-              <a:t> </a:t>
-            </a:r>
-            <a:r>
-              <a:rPr lang="en-US" dirty="0" err="1">
-                <a:sym typeface="Wingdings" panose="05000000000000000000" pitchFamily="2" charset="2"/>
-              </a:rPr>
-              <a:t>sondern</a:t>
-            </a:r>
-            <a:r>
-              <a:rPr lang="en-US" dirty="0">
-                <a:sym typeface="Wingdings" panose="05000000000000000000" pitchFamily="2" charset="2"/>
-              </a:rPr>
-              <a:t> “</a:t>
-            </a:r>
-            <a:r>
-              <a:rPr lang="en-US" dirty="0" err="1">
-                <a:sym typeface="Wingdings" panose="05000000000000000000" pitchFamily="2" charset="2"/>
-              </a:rPr>
-              <a:t>anders</a:t>
-            </a:r>
-            <a:r>
-              <a:rPr lang="en-US" dirty="0">
-                <a:sym typeface="Wingdings" panose="05000000000000000000" pitchFamily="2" charset="2"/>
-              </a:rPr>
-              <a:t>”?</a:t>
-            </a:r>
-          </a:p>
-          <a:p>
-            <a:r>
-              <a:rPr lang="en-US" dirty="0" err="1">
-                <a:sym typeface="Wingdings" panose="05000000000000000000" pitchFamily="2" charset="2"/>
-              </a:rPr>
-              <a:t>Welche</a:t>
-            </a:r>
-            <a:r>
-              <a:rPr lang="en-US" dirty="0">
-                <a:sym typeface="Wingdings" panose="05000000000000000000" pitchFamily="2" charset="2"/>
-              </a:rPr>
-              <a:t> </a:t>
-            </a:r>
-            <a:r>
-              <a:rPr lang="en-US" dirty="0" err="1">
-                <a:sym typeface="Wingdings" panose="05000000000000000000" pitchFamily="2" charset="2"/>
-              </a:rPr>
-              <a:t>Dokumente</a:t>
-            </a:r>
-            <a:r>
-              <a:rPr lang="en-US" dirty="0">
-                <a:sym typeface="Wingdings" panose="05000000000000000000" pitchFamily="2" charset="2"/>
-              </a:rPr>
-              <a:t> </a:t>
-            </a:r>
-            <a:r>
-              <a:rPr lang="en-US" dirty="0" err="1">
-                <a:sym typeface="Wingdings" panose="05000000000000000000" pitchFamily="2" charset="2"/>
-              </a:rPr>
-              <a:t>fügen</a:t>
-            </a:r>
-            <a:r>
-              <a:rPr lang="en-US" dirty="0">
-                <a:sym typeface="Wingdings" panose="05000000000000000000" pitchFamily="2" charset="2"/>
-              </a:rPr>
-              <a:t> </a:t>
-            </a:r>
-            <a:r>
-              <a:rPr lang="en-US" dirty="0" err="1">
-                <a:sym typeface="Wingdings" panose="05000000000000000000" pitchFamily="2" charset="2"/>
-              </a:rPr>
-              <a:t>wir</a:t>
-            </a:r>
-            <a:r>
-              <a:rPr lang="en-US" dirty="0">
-                <a:sym typeface="Wingdings" panose="05000000000000000000" pitchFamily="2" charset="2"/>
-              </a:rPr>
-              <a:t> </a:t>
-            </a:r>
-            <a:r>
-              <a:rPr lang="en-US" dirty="0" err="1">
-                <a:sym typeface="Wingdings" panose="05000000000000000000" pitchFamily="2" charset="2"/>
-              </a:rPr>
-              <a:t>noch</a:t>
-            </a:r>
-            <a:r>
-              <a:rPr lang="en-US" dirty="0">
-                <a:sym typeface="Wingdings" panose="05000000000000000000" pitchFamily="2" charset="2"/>
-              </a:rPr>
-              <a:t> </a:t>
-            </a:r>
-            <a:r>
-              <a:rPr lang="en-US" dirty="0" err="1">
-                <a:sym typeface="Wingdings" panose="05000000000000000000" pitchFamily="2" charset="2"/>
-              </a:rPr>
-              <a:t>hinzu</a:t>
-            </a:r>
-            <a:r>
-              <a:rPr lang="en-US" dirty="0">
-                <a:sym typeface="Wingdings" panose="05000000000000000000" pitchFamily="2" charset="2"/>
-              </a:rPr>
-              <a:t>?</a:t>
-            </a:r>
-          </a:p>
-          <a:p>
-            <a:pPr lvl="1"/>
-            <a:r>
-              <a:rPr lang="en-US" dirty="0">
-                <a:sym typeface="Wingdings" panose="05000000000000000000" pitchFamily="2" charset="2"/>
-              </a:rPr>
-              <a:t>Wir </a:t>
-            </a:r>
-            <a:r>
-              <a:rPr lang="en-US" dirty="0" err="1">
-                <a:sym typeface="Wingdings" panose="05000000000000000000" pitchFamily="2" charset="2"/>
-              </a:rPr>
-              <a:t>müssen</a:t>
-            </a:r>
-            <a:r>
-              <a:rPr lang="en-US" dirty="0">
-                <a:sym typeface="Wingdings" panose="05000000000000000000" pitchFamily="2" charset="2"/>
-              </a:rPr>
-              <a:t> alle </a:t>
-            </a:r>
-            <a:r>
-              <a:rPr lang="en-US" dirty="0" err="1">
-                <a:sym typeface="Wingdings" panose="05000000000000000000" pitchFamily="2" charset="2"/>
-              </a:rPr>
-              <a:t>Dokumente</a:t>
-            </a:r>
-            <a:r>
-              <a:rPr lang="en-US" dirty="0">
-                <a:sym typeface="Wingdings" panose="05000000000000000000" pitchFamily="2" charset="2"/>
-              </a:rPr>
-              <a:t> </a:t>
-            </a:r>
-            <a:r>
-              <a:rPr lang="en-US" dirty="0" err="1">
-                <a:sym typeface="Wingdings" panose="05000000000000000000" pitchFamily="2" charset="2"/>
-              </a:rPr>
-              <a:t>regelmäßig</a:t>
-            </a:r>
-            <a:r>
-              <a:rPr lang="en-US" dirty="0">
-                <a:sym typeface="Wingdings" panose="05000000000000000000" pitchFamily="2" charset="2"/>
-              </a:rPr>
-              <a:t> </a:t>
-            </a:r>
-            <a:r>
-              <a:rPr lang="en-US" dirty="0" err="1">
-                <a:sym typeface="Wingdings" panose="05000000000000000000" pitchFamily="2" charset="2"/>
-              </a:rPr>
-              <a:t>updaten</a:t>
-            </a:r>
-            <a:r>
-              <a:rPr lang="en-US" dirty="0">
-                <a:sym typeface="Wingdings" panose="05000000000000000000" pitchFamily="2" charset="2"/>
-              </a:rPr>
-              <a:t> (</a:t>
-            </a:r>
-            <a:r>
-              <a:rPr lang="en-US" dirty="0" err="1">
-                <a:sym typeface="Wingdings" panose="05000000000000000000" pitchFamily="2" charset="2"/>
-              </a:rPr>
-              <a:t>kein</a:t>
-            </a:r>
-            <a:r>
-              <a:rPr lang="en-US" dirty="0">
-                <a:sym typeface="Wingdings" panose="05000000000000000000" pitchFamily="2" charset="2"/>
-              </a:rPr>
-              <a:t> </a:t>
-            </a:r>
-            <a:r>
-              <a:rPr lang="en-US" dirty="0" err="1">
-                <a:sym typeface="Wingdings" panose="05000000000000000000" pitchFamily="2" charset="2"/>
-              </a:rPr>
-              <a:t>dynamischer</a:t>
-            </a:r>
-            <a:r>
-              <a:rPr lang="en-US" dirty="0">
-                <a:sym typeface="Wingdings" panose="05000000000000000000" pitchFamily="2" charset="2"/>
-              </a:rPr>
-              <a:t> </a:t>
-            </a:r>
-            <a:r>
-              <a:rPr lang="en-US" dirty="0" err="1">
-                <a:sym typeface="Wingdings" panose="05000000000000000000" pitchFamily="2" charset="2"/>
-              </a:rPr>
-              <a:t>zugriff</a:t>
-            </a:r>
-            <a:r>
-              <a:rPr lang="en-US" dirty="0">
-                <a:sym typeface="Wingdings" panose="05000000000000000000" pitchFamily="2" charset="2"/>
-              </a:rPr>
-              <a:t> </a:t>
-            </a:r>
-            <a:r>
-              <a:rPr lang="en-US" dirty="0" err="1">
-                <a:sym typeface="Wingdings" panose="05000000000000000000" pitchFamily="2" charset="2"/>
-              </a:rPr>
-              <a:t>momentan</a:t>
-            </a:r>
-            <a:r>
-              <a:rPr lang="en-US" dirty="0">
-                <a:sym typeface="Wingdings" panose="05000000000000000000" pitchFamily="2" charset="2"/>
-              </a:rPr>
-              <a:t>)?</a:t>
-            </a:r>
-          </a:p>
-          <a:p>
-            <a:endParaRPr lang="en-US" dirty="0">
-              <a:sym typeface="Wingdings" panose="05000000000000000000" pitchFamily="2" charset="2"/>
-            </a:endParaRPr>
-          </a:p>
-          <a:p>
-            <a:endParaRPr lang="en-US" dirty="0">
-              <a:sym typeface="Wingdings" panose="05000000000000000000" pitchFamily="2" charset="2"/>
-            </a:endParaRPr>
-          </a:p>
-          <a:p>
-            <a:r>
-              <a:rPr lang="en-US" dirty="0">
-                <a:sym typeface="Wingdings" panose="05000000000000000000" pitchFamily="2" charset="2"/>
-              </a:rPr>
-              <a:t>Wie </a:t>
-            </a:r>
-            <a:r>
-              <a:rPr lang="en-US" dirty="0" err="1">
-                <a:sym typeface="Wingdings" panose="05000000000000000000" pitchFamily="2" charset="2"/>
-              </a:rPr>
-              <a:t>vermitteln</a:t>
-            </a:r>
-            <a:r>
-              <a:rPr lang="en-US" dirty="0">
-                <a:sym typeface="Wingdings" panose="05000000000000000000" pitchFamily="2" charset="2"/>
-              </a:rPr>
-              <a:t> </a:t>
-            </a:r>
-            <a:r>
-              <a:rPr lang="en-US" dirty="0" err="1">
-                <a:sym typeface="Wingdings" panose="05000000000000000000" pitchFamily="2" charset="2"/>
-              </a:rPr>
-              <a:t>wir</a:t>
-            </a:r>
-            <a:r>
-              <a:rPr lang="en-US" dirty="0">
-                <a:sym typeface="Wingdings" panose="05000000000000000000" pitchFamily="2" charset="2"/>
-              </a:rPr>
-              <a:t> den </a:t>
-            </a:r>
-            <a:r>
-              <a:rPr lang="en-US" dirty="0" err="1">
-                <a:sym typeface="Wingdings" panose="05000000000000000000" pitchFamily="2" charset="2"/>
-              </a:rPr>
-              <a:t>Nutzern</a:t>
-            </a:r>
-            <a:r>
-              <a:rPr lang="en-US" dirty="0">
-                <a:sym typeface="Wingdings" panose="05000000000000000000" pitchFamily="2" charset="2"/>
-              </a:rPr>
-              <a:t> und Chatbot den Scope?</a:t>
-            </a:r>
-            <a:endParaRPr lang="en-DE" dirty="0"/>
+              <a:rPr lang="en-US" dirty="0"/>
+              <a:t> in Copilot </a:t>
+            </a:r>
+            <a:r>
+              <a:rPr lang="en-US" dirty="0" err="1"/>
+              <a:t>einrichtet</a:t>
+            </a:r>
+            <a:endParaRPr lang="en-US" dirty="0"/>
           </a:p>
         </p:txBody>
       </p:sp>
     </p:spTree>
     <p:extLst>
       <p:ext uri="{BB962C8B-B14F-4D97-AF65-F5344CB8AC3E}">
-        <p14:creationId xmlns:p14="http://schemas.microsoft.com/office/powerpoint/2010/main" val="3232861218"/>
+        <p14:creationId xmlns:p14="http://schemas.microsoft.com/office/powerpoint/2010/main" val="374838372"/>
       </p:ext>
     </p:extLst>
   </p:cSld>
